--- a/MLOps1.pptx
+++ b/MLOps1.pptx
@@ -9,6 +9,12 @@
     <p:sldId id="257" r:id="rId3"/>
     <p:sldId id="258" r:id="rId4"/>
     <p:sldId id="259" r:id="rId5"/>
+    <p:sldId id="260" r:id="rId6"/>
+    <p:sldId id="261" r:id="rId7"/>
+    <p:sldId id="262" r:id="rId8"/>
+    <p:sldId id="263" r:id="rId9"/>
+    <p:sldId id="264" r:id="rId10"/>
+    <p:sldId id="265" r:id="rId11"/>
   </p:sldIdLst>
   <p:sldSz cx="12192000" cy="6858000"/>
   <p:notesSz cx="6858000" cy="9144000"/>
@@ -262,7 +268,7 @@
           <a:p>
             <a:fld id="{8340E07E-EE19-4182-A636-F839E11FFF2A}" type="datetimeFigureOut">
               <a:rPr lang="en-US" smtClean="0"/>
-              <a:t>11/3/2024</a:t>
+              <a:t>11/5/2024</a:t>
             </a:fld>
             <a:endParaRPr lang="en-US"/>
           </a:p>
@@ -460,7 +466,7 @@
           <a:p>
             <a:fld id="{8340E07E-EE19-4182-A636-F839E11FFF2A}" type="datetimeFigureOut">
               <a:rPr lang="en-US" smtClean="0"/>
-              <a:t>11/3/2024</a:t>
+              <a:t>11/5/2024</a:t>
             </a:fld>
             <a:endParaRPr lang="en-US"/>
           </a:p>
@@ -668,7 +674,7 @@
           <a:p>
             <a:fld id="{8340E07E-EE19-4182-A636-F839E11FFF2A}" type="datetimeFigureOut">
               <a:rPr lang="en-US" smtClean="0"/>
-              <a:t>11/3/2024</a:t>
+              <a:t>11/5/2024</a:t>
             </a:fld>
             <a:endParaRPr lang="en-US"/>
           </a:p>
@@ -866,7 +872,7 @@
           <a:p>
             <a:fld id="{8340E07E-EE19-4182-A636-F839E11FFF2A}" type="datetimeFigureOut">
               <a:rPr lang="en-US" smtClean="0"/>
-              <a:t>11/3/2024</a:t>
+              <a:t>11/5/2024</a:t>
             </a:fld>
             <a:endParaRPr lang="en-US"/>
           </a:p>
@@ -1141,7 +1147,7 @@
           <a:p>
             <a:fld id="{8340E07E-EE19-4182-A636-F839E11FFF2A}" type="datetimeFigureOut">
               <a:rPr lang="en-US" smtClean="0"/>
-              <a:t>11/3/2024</a:t>
+              <a:t>11/5/2024</a:t>
             </a:fld>
             <a:endParaRPr lang="en-US"/>
           </a:p>
@@ -1406,7 +1412,7 @@
           <a:p>
             <a:fld id="{8340E07E-EE19-4182-A636-F839E11FFF2A}" type="datetimeFigureOut">
               <a:rPr lang="en-US" smtClean="0"/>
-              <a:t>11/3/2024</a:t>
+              <a:t>11/5/2024</a:t>
             </a:fld>
             <a:endParaRPr lang="en-US"/>
           </a:p>
@@ -1818,7 +1824,7 @@
           <a:p>
             <a:fld id="{8340E07E-EE19-4182-A636-F839E11FFF2A}" type="datetimeFigureOut">
               <a:rPr lang="en-US" smtClean="0"/>
-              <a:t>11/3/2024</a:t>
+              <a:t>11/5/2024</a:t>
             </a:fld>
             <a:endParaRPr lang="en-US"/>
           </a:p>
@@ -1959,7 +1965,7 @@
           <a:p>
             <a:fld id="{8340E07E-EE19-4182-A636-F839E11FFF2A}" type="datetimeFigureOut">
               <a:rPr lang="en-US" smtClean="0"/>
-              <a:t>11/3/2024</a:t>
+              <a:t>11/5/2024</a:t>
             </a:fld>
             <a:endParaRPr lang="en-US"/>
           </a:p>
@@ -2072,7 +2078,7 @@
           <a:p>
             <a:fld id="{8340E07E-EE19-4182-A636-F839E11FFF2A}" type="datetimeFigureOut">
               <a:rPr lang="en-US" smtClean="0"/>
-              <a:t>11/3/2024</a:t>
+              <a:t>11/5/2024</a:t>
             </a:fld>
             <a:endParaRPr lang="en-US"/>
           </a:p>
@@ -2383,7 +2389,7 @@
           <a:p>
             <a:fld id="{8340E07E-EE19-4182-A636-F839E11FFF2A}" type="datetimeFigureOut">
               <a:rPr lang="en-US" smtClean="0"/>
-              <a:t>11/3/2024</a:t>
+              <a:t>11/5/2024</a:t>
             </a:fld>
             <a:endParaRPr lang="en-US"/>
           </a:p>
@@ -2671,7 +2677,7 @@
           <a:p>
             <a:fld id="{8340E07E-EE19-4182-A636-F839E11FFF2A}" type="datetimeFigureOut">
               <a:rPr lang="en-US" smtClean="0"/>
-              <a:t>11/3/2024</a:t>
+              <a:t>11/5/2024</a:t>
             </a:fld>
             <a:endParaRPr lang="en-US"/>
           </a:p>
@@ -2912,7 +2918,7 @@
           <a:p>
             <a:fld id="{8340E07E-EE19-4182-A636-F839E11FFF2A}" type="datetimeFigureOut">
               <a:rPr lang="en-US" smtClean="0"/>
-              <a:t>11/3/2024</a:t>
+              <a:t>11/5/2024</a:t>
             </a:fld>
             <a:endParaRPr lang="en-US"/>
           </a:p>
@@ -3329,55 +3335,6 @@
           <a:chExt cx="0" cy="0"/>
         </a:xfrm>
       </p:grpSpPr>
-      <p:sp>
-        <p:nvSpPr>
-          <p:cNvPr id="3" name="Rectangle: Rounded Corners 2">
-            <a:extLst>
-              <a:ext uri="{FF2B5EF4-FFF2-40B4-BE49-F238E27FC236}">
-                <a16:creationId xmlns:a16="http://schemas.microsoft.com/office/drawing/2014/main" id="{1FEC878E-DB73-CB30-39A8-7DC16ED567BD}"/>
-              </a:ext>
-            </a:extLst>
-          </p:cNvPr>
-          <p:cNvSpPr/>
-          <p:nvPr/>
-        </p:nvSpPr>
-        <p:spPr>
-          <a:xfrm>
-            <a:off x="5148072" y="155448"/>
-            <a:ext cx="1600200" cy="621792"/>
-          </a:xfrm>
-          <a:prstGeom prst="roundRect">
-            <a:avLst/>
-          </a:prstGeom>
-        </p:spPr>
-        <p:style>
-          <a:lnRef idx="2">
-            <a:schemeClr val="accent5">
-              <a:shade val="15000"/>
-            </a:schemeClr>
-          </a:lnRef>
-          <a:fillRef idx="1">
-            <a:schemeClr val="accent5"/>
-          </a:fillRef>
-          <a:effectRef idx="0">
-            <a:schemeClr val="accent5"/>
-          </a:effectRef>
-          <a:fontRef idx="minor">
-            <a:schemeClr val="lt1"/>
-          </a:fontRef>
-        </p:style>
-        <p:txBody>
-          <a:bodyPr rtlCol="0" anchor="ctr"/>
-          <a:lstStyle/>
-          <a:p>
-            <a:pPr algn="ctr"/>
-            <a:r>
-              <a:rPr lang="en-US" dirty="0"/>
-              <a:t>ML Ops</a:t>
-            </a:r>
-          </a:p>
-        </p:txBody>
-      </p:sp>
       <p:cxnSp>
         <p:nvCxnSpPr>
           <p:cNvPr id="5" name="Straight Connector 4">
@@ -4611,10 +4568,592 @@
           </a:p>
         </p:txBody>
       </p:sp>
+      <p:pic>
+        <p:nvPicPr>
+          <p:cNvPr id="7170" name="Picture 2" descr="MLOps">
+            <a:extLst>
+              <a:ext uri="{FF2B5EF4-FFF2-40B4-BE49-F238E27FC236}">
+                <a16:creationId xmlns:a16="http://schemas.microsoft.com/office/drawing/2014/main" id="{363C4A36-A772-39CD-7655-A6F03D25FC5D}"/>
+              </a:ext>
+            </a:extLst>
+          </p:cNvPr>
+          <p:cNvPicPr>
+            <a:picLocks noChangeAspect="1" noChangeArrowheads="1"/>
+          </p:cNvPicPr>
+          <p:nvPr/>
+        </p:nvPicPr>
+        <p:blipFill>
+          <a:blip r:embed="rId2">
+            <a:extLst>
+              <a:ext uri="{28A0092B-C50C-407E-A947-70E740481C1C}">
+                <a14:useLocalDpi xmlns:a14="http://schemas.microsoft.com/office/drawing/2010/main" val="0"/>
+              </a:ext>
+            </a:extLst>
+          </a:blip>
+          <a:srcRect/>
+          <a:stretch>
+            <a:fillRect/>
+          </a:stretch>
+        </p:blipFill>
+        <p:spPr bwMode="auto">
+          <a:xfrm>
+            <a:off x="5339629" y="-13015"/>
+            <a:ext cx="1162221" cy="835776"/>
+          </a:xfrm>
+          <a:prstGeom prst="rect">
+            <a:avLst/>
+          </a:prstGeom>
+          <a:noFill/>
+          <a:extLst>
+            <a:ext uri="{909E8E84-426E-40DD-AFC4-6F175D3DCCD1}">
+              <a14:hiddenFill xmlns:a14="http://schemas.microsoft.com/office/drawing/2010/main">
+                <a:solidFill>
+                  <a:srgbClr val="FFFFFF"/>
+                </a:solidFill>
+              </a14:hiddenFill>
+            </a:ext>
+          </a:extLst>
+        </p:spPr>
+      </p:pic>
     </p:spTree>
     <p:extLst>
       <p:ext uri="{BB962C8B-B14F-4D97-AF65-F5344CB8AC3E}">
         <p14:creationId xmlns:p14="http://schemas.microsoft.com/office/powerpoint/2010/main" val="259305771"/>
+      </p:ext>
+    </p:extLst>
+  </p:cSld>
+  <p:clrMapOvr>
+    <a:masterClrMapping/>
+  </p:clrMapOvr>
+</p:sld>
+</file>
+
+<file path=ppt/slides/slide10.xml><?xml version="1.0" encoding="utf-8"?>
+<p:sld xmlns:a="http://schemas.openxmlformats.org/drawingml/2006/main" xmlns:r="http://schemas.openxmlformats.org/officeDocument/2006/relationships" xmlns:p="http://schemas.openxmlformats.org/presentationml/2006/main">
+  <p:cSld>
+    <p:spTree>
+      <p:nvGrpSpPr>
+        <p:cNvPr id="1" name=""/>
+        <p:cNvGrpSpPr/>
+        <p:nvPr/>
+      </p:nvGrpSpPr>
+      <p:grpSpPr>
+        <a:xfrm>
+          <a:off x="0" y="0"/>
+          <a:ext cx="0" cy="0"/>
+          <a:chOff x="0" y="0"/>
+          <a:chExt cx="0" cy="0"/>
+        </a:xfrm>
+      </p:grpSpPr>
+      <p:sp>
+        <p:nvSpPr>
+          <p:cNvPr id="3" name="TextBox 2">
+            <a:extLst>
+              <a:ext uri="{FF2B5EF4-FFF2-40B4-BE49-F238E27FC236}">
+                <a16:creationId xmlns:a16="http://schemas.microsoft.com/office/drawing/2014/main" id="{3980EC81-00B5-BB1E-8459-9C4CF2E67A63}"/>
+              </a:ext>
+            </a:extLst>
+          </p:cNvPr>
+          <p:cNvSpPr txBox="1"/>
+          <p:nvPr/>
+        </p:nvSpPr>
+        <p:spPr>
+          <a:xfrm>
+            <a:off x="530353" y="722376"/>
+            <a:ext cx="6556248" cy="5047536"/>
+          </a:xfrm>
+          <a:prstGeom prst="rect">
+            <a:avLst/>
+          </a:prstGeom>
+          <a:noFill/>
+        </p:spPr>
+        <p:txBody>
+          <a:bodyPr wrap="square" rtlCol="0">
+            <a:spAutoFit/>
+          </a:bodyPr>
+          <a:lstStyle/>
+          <a:p>
+            <a:pPr marL="285750" indent="-285750">
+              <a:buFontTx/>
+              <a:buChar char="-"/>
+            </a:pPr>
+            <a:r>
+              <a:rPr lang="en-US" sz="1400" dirty="0"/>
+              <a:t>There are 2 ways to execute container: detach mode “-d” and interactive mode “-</a:t>
+            </a:r>
+            <a:r>
+              <a:rPr lang="en-US" sz="1400" dirty="0" err="1"/>
+              <a:t>i</a:t>
+            </a:r>
+            <a:r>
+              <a:rPr lang="en-US" sz="1400" dirty="0"/>
+              <a:t>”</a:t>
+            </a:r>
+          </a:p>
+          <a:p>
+            <a:pPr marL="285750" indent="-285750">
+              <a:buFontTx/>
+              <a:buChar char="-"/>
+            </a:pPr>
+            <a:r>
+              <a:rPr lang="en-US" sz="1400" dirty="0"/>
+              <a:t>To delete docker image: docker </a:t>
+            </a:r>
+            <a:r>
+              <a:rPr lang="en-US" sz="1400" dirty="0" err="1"/>
+              <a:t>rmi</a:t>
+            </a:r>
+            <a:r>
+              <a:rPr lang="en-US" sz="1400" dirty="0"/>
+              <a:t> –f Jenkins/</a:t>
+            </a:r>
+            <a:r>
+              <a:rPr lang="en-US" sz="1400" dirty="0" err="1"/>
+              <a:t>Jenkins:lts</a:t>
+            </a:r>
+            <a:r>
+              <a:rPr lang="en-US" sz="1400" dirty="0"/>
+              <a:t> or docker </a:t>
+            </a:r>
+            <a:r>
+              <a:rPr lang="en-US" sz="1400" dirty="0" err="1"/>
+              <a:t>rmi</a:t>
+            </a:r>
+            <a:r>
+              <a:rPr lang="en-US" sz="1400" dirty="0"/>
+              <a:t> </a:t>
+            </a:r>
+            <a:r>
+              <a:rPr lang="en-US" sz="1400" dirty="0" err="1"/>
+              <a:t>redis</a:t>
+            </a:r>
+            <a:endParaRPr lang="en-US" sz="1400" dirty="0"/>
+          </a:p>
+          <a:p>
+            <a:pPr marL="285750" indent="-285750">
+              <a:buFontTx/>
+              <a:buChar char="-"/>
+            </a:pPr>
+            <a:r>
+              <a:rPr lang="en-US" sz="1400" dirty="0"/>
+              <a:t>To run the image &amp; run it directly like Jenkins.. Which is not installed in our system but we can still run it using docker</a:t>
+            </a:r>
+          </a:p>
+          <a:p>
+            <a:pPr marL="285750" indent="-285750">
+              <a:buFontTx/>
+              <a:buChar char="-"/>
+            </a:pPr>
+            <a:r>
+              <a:rPr lang="en-US" sz="1400" b="1" dirty="0"/>
+              <a:t>docker run -p 8080:8080 </a:t>
+            </a:r>
+            <a:r>
+              <a:rPr lang="en-US" sz="1400" b="1" dirty="0" err="1"/>
+              <a:t>jenkins</a:t>
+            </a:r>
+            <a:r>
+              <a:rPr lang="en-US" sz="1400" b="1" dirty="0"/>
+              <a:t>/</a:t>
+            </a:r>
+            <a:r>
+              <a:rPr lang="en-US" sz="1400" b="1" dirty="0" err="1"/>
+              <a:t>jenkins:lts</a:t>
+            </a:r>
+            <a:endParaRPr lang="en-US" sz="1400" b="1" dirty="0"/>
+          </a:p>
+          <a:p>
+            <a:pPr marL="285750" indent="-285750">
+              <a:buFontTx/>
+              <a:buChar char="-"/>
+            </a:pPr>
+            <a:endParaRPr lang="en-US" sz="1400" b="1" dirty="0"/>
+          </a:p>
+          <a:p>
+            <a:pPr marL="285750" indent="-285750">
+              <a:buFontTx/>
+              <a:buChar char="-"/>
+            </a:pPr>
+            <a:r>
+              <a:rPr lang="en-US" sz="1400" b="1" dirty="0"/>
+              <a:t>How to create an image from container itself like we’re running an image inside container, how to share the image to next team?</a:t>
+            </a:r>
+          </a:p>
+          <a:p>
+            <a:pPr marL="285750" indent="-285750">
+              <a:buFontTx/>
+              <a:buChar char="-"/>
+            </a:pPr>
+            <a:endParaRPr lang="en-US" sz="1400" b="1" dirty="0"/>
+          </a:p>
+          <a:p>
+            <a:pPr marL="285750" indent="-285750">
+              <a:buFontTx/>
+              <a:buChar char="-"/>
+            </a:pPr>
+            <a:r>
+              <a:rPr lang="en-US" sz="1400" dirty="0"/>
+              <a:t>We can ship these containers from 1 place to another that’s why we use docker.. To share containers b/w teams from development to testing to deployment teams</a:t>
+            </a:r>
+          </a:p>
+          <a:p>
+            <a:pPr marL="285750" indent="-285750">
+              <a:buFontTx/>
+              <a:buChar char="-"/>
+            </a:pPr>
+            <a:endParaRPr lang="en-US" sz="1400" dirty="0"/>
+          </a:p>
+          <a:p>
+            <a:pPr marL="285750" indent="-285750">
+              <a:buFontTx/>
+              <a:buChar char="-"/>
+            </a:pPr>
+            <a:r>
+              <a:rPr lang="en-US" sz="1400" b="1" dirty="0"/>
+              <a:t>Run ubuntu container &amp; make some changes to it and share it</a:t>
+            </a:r>
+          </a:p>
+          <a:p>
+            <a:pPr marL="285750" indent="-285750">
+              <a:buFontTx/>
+              <a:buChar char="-"/>
+            </a:pPr>
+            <a:r>
+              <a:rPr lang="en-US" sz="1400" dirty="0"/>
+              <a:t>docker run --name </a:t>
+            </a:r>
+            <a:r>
+              <a:rPr lang="en-US" sz="1400" dirty="0" err="1"/>
+              <a:t>mycontainerpras</a:t>
+            </a:r>
+            <a:r>
+              <a:rPr lang="en-US" sz="1400" dirty="0"/>
+              <a:t> -it ubuntu /bin/bash</a:t>
+            </a:r>
+          </a:p>
+          <a:p>
+            <a:pPr marL="285750" indent="-285750">
+              <a:buFontTx/>
+              <a:buChar char="-"/>
+            </a:pPr>
+            <a:r>
+              <a:rPr lang="en-US" sz="1400" dirty="0"/>
+              <a:t>cd </a:t>
+            </a:r>
+            <a:r>
+              <a:rPr lang="en-US" sz="1400" dirty="0" err="1"/>
+              <a:t>tmp</a:t>
+            </a:r>
+            <a:r>
+              <a:rPr lang="en-US" sz="1400" dirty="0"/>
+              <a:t> &amp; touch myfile.txt to create new file (as developer we write app file)</a:t>
+            </a:r>
+          </a:p>
+          <a:p>
+            <a:pPr marL="285750" indent="-285750">
+              <a:buFontTx/>
+              <a:buChar char="-"/>
+            </a:pPr>
+            <a:r>
+              <a:rPr lang="en-US" sz="1400" dirty="0"/>
+              <a:t>To check what changes we have made:</a:t>
+            </a:r>
+          </a:p>
+          <a:p>
+            <a:pPr marL="285750" indent="-285750">
+              <a:buFontTx/>
+              <a:buChar char="-"/>
+            </a:pPr>
+            <a:r>
+              <a:rPr lang="en-US" sz="1400" dirty="0"/>
+              <a:t>docker diff &lt;container name&gt;</a:t>
+            </a:r>
+          </a:p>
+          <a:p>
+            <a:pPr marL="285750" indent="-285750">
+              <a:buFontTx/>
+              <a:buChar char="-"/>
+            </a:pPr>
+            <a:r>
+              <a:rPr lang="en-US" sz="1400" dirty="0"/>
+              <a:t>Now we can share this directly to my testing team, we can create image from this container .</a:t>
+            </a:r>
+          </a:p>
+          <a:p>
+            <a:pPr marL="285750" indent="-285750">
+              <a:buFontTx/>
+              <a:buChar char="-"/>
+            </a:pPr>
+            <a:r>
+              <a:rPr lang="en-US" sz="1400" dirty="0"/>
+              <a:t>docker commit &lt;container name&gt; &lt;updated image name&gt;</a:t>
+            </a:r>
+          </a:p>
+          <a:p>
+            <a:pPr marL="285750" indent="-285750">
+              <a:buFontTx/>
+              <a:buChar char="-"/>
+            </a:pPr>
+            <a:r>
+              <a:rPr lang="en-US" sz="1400" b="1" dirty="0"/>
+              <a:t>docker commit </a:t>
+            </a:r>
+            <a:r>
+              <a:rPr lang="en-US" sz="1400" b="1" dirty="0" err="1"/>
+              <a:t>mycontainerpras</a:t>
+            </a:r>
+            <a:r>
+              <a:rPr lang="en-US" sz="1400" b="1" dirty="0"/>
+              <a:t> </a:t>
+            </a:r>
+            <a:r>
+              <a:rPr lang="en-US" sz="1400" b="1" dirty="0" err="1"/>
+              <a:t>mycontainerprasimage</a:t>
+            </a:r>
+            <a:endParaRPr lang="en-US" sz="1400" b="1" dirty="0"/>
+          </a:p>
+          <a:p>
+            <a:pPr marL="285750" indent="-285750">
+              <a:buFontTx/>
+              <a:buChar char="-"/>
+            </a:pPr>
+            <a:r>
+              <a:rPr lang="en-US" sz="1400" dirty="0"/>
+              <a:t>Now we can push this image to docker hub, which anybody can pull &amp; use</a:t>
+            </a:r>
+          </a:p>
+          <a:p>
+            <a:pPr marL="285750" indent="-285750">
+              <a:buFontTx/>
+              <a:buChar char="-"/>
+            </a:pPr>
+            <a:endParaRPr lang="en-US" sz="1400" b="1" dirty="0"/>
+          </a:p>
+        </p:txBody>
+      </p:sp>
+      <p:pic>
+        <p:nvPicPr>
+          <p:cNvPr id="5" name="Picture 4">
+            <a:extLst>
+              <a:ext uri="{FF2B5EF4-FFF2-40B4-BE49-F238E27FC236}">
+                <a16:creationId xmlns:a16="http://schemas.microsoft.com/office/drawing/2014/main" id="{C1A14A7E-4717-2E5D-9A50-A4E1B7EF5B9F}"/>
+              </a:ext>
+            </a:extLst>
+          </p:cNvPr>
+          <p:cNvPicPr>
+            <a:picLocks noChangeAspect="1"/>
+          </p:cNvPicPr>
+          <p:nvPr/>
+        </p:nvPicPr>
+        <p:blipFill>
+          <a:blip r:embed="rId2"/>
+          <a:stretch>
+            <a:fillRect/>
+          </a:stretch>
+        </p:blipFill>
+        <p:spPr>
+          <a:xfrm>
+            <a:off x="7193547" y="59436"/>
+            <a:ext cx="4876082" cy="3172968"/>
+          </a:xfrm>
+          <a:prstGeom prst="rect">
+            <a:avLst/>
+          </a:prstGeom>
+        </p:spPr>
+      </p:pic>
+      <p:pic>
+        <p:nvPicPr>
+          <p:cNvPr id="1028" name="Picture 4" descr="Docker for Developers: Understanding the Core Concepts – Code with Dan Blog">
+            <a:extLst>
+              <a:ext uri="{FF2B5EF4-FFF2-40B4-BE49-F238E27FC236}">
+                <a16:creationId xmlns:a16="http://schemas.microsoft.com/office/drawing/2014/main" id="{1368A1F2-CFBD-ADA8-7C7E-8B552AAC1998}"/>
+              </a:ext>
+            </a:extLst>
+          </p:cNvPr>
+          <p:cNvPicPr>
+            <a:picLocks noChangeAspect="1" noChangeArrowheads="1"/>
+          </p:cNvPicPr>
+          <p:nvPr/>
+        </p:nvPicPr>
+        <p:blipFill>
+          <a:blip r:embed="rId3">
+            <a:extLst>
+              <a:ext uri="{28A0092B-C50C-407E-A947-70E740481C1C}">
+                <a14:useLocalDpi xmlns:a14="http://schemas.microsoft.com/office/drawing/2010/main" val="0"/>
+              </a:ext>
+            </a:extLst>
+          </a:blip>
+          <a:srcRect/>
+          <a:stretch>
+            <a:fillRect/>
+          </a:stretch>
+        </p:blipFill>
+        <p:spPr bwMode="auto">
+          <a:xfrm>
+            <a:off x="4320541" y="0"/>
+            <a:ext cx="889747" cy="585550"/>
+          </a:xfrm>
+          <a:prstGeom prst="rect">
+            <a:avLst/>
+          </a:prstGeom>
+          <a:noFill/>
+          <a:extLst>
+            <a:ext uri="{909E8E84-426E-40DD-AFC4-6F175D3DCCD1}">
+              <a14:hiddenFill xmlns:a14="http://schemas.microsoft.com/office/drawing/2010/main">
+                <a:solidFill>
+                  <a:srgbClr val="FFFFFF"/>
+                </a:solidFill>
+              </a14:hiddenFill>
+            </a:ext>
+          </a:extLst>
+        </p:spPr>
+      </p:pic>
+      <p:pic>
+        <p:nvPicPr>
+          <p:cNvPr id="7" name="Picture 6">
+            <a:extLst>
+              <a:ext uri="{FF2B5EF4-FFF2-40B4-BE49-F238E27FC236}">
+                <a16:creationId xmlns:a16="http://schemas.microsoft.com/office/drawing/2014/main" id="{3E524C25-5774-E11F-9A19-FC7B1D49D332}"/>
+              </a:ext>
+            </a:extLst>
+          </p:cNvPr>
+          <p:cNvPicPr>
+            <a:picLocks noChangeAspect="1"/>
+          </p:cNvPicPr>
+          <p:nvPr/>
+        </p:nvPicPr>
+        <p:blipFill>
+          <a:blip r:embed="rId4"/>
+          <a:stretch>
+            <a:fillRect/>
+          </a:stretch>
+        </p:blipFill>
+        <p:spPr>
+          <a:xfrm>
+            <a:off x="7193547" y="3166491"/>
+            <a:ext cx="4775949" cy="984886"/>
+          </a:xfrm>
+          <a:prstGeom prst="rect">
+            <a:avLst/>
+          </a:prstGeom>
+        </p:spPr>
+      </p:pic>
+      <p:cxnSp>
+        <p:nvCxnSpPr>
+          <p:cNvPr id="9" name="Straight Arrow Connector 8">
+            <a:extLst>
+              <a:ext uri="{FF2B5EF4-FFF2-40B4-BE49-F238E27FC236}">
+                <a16:creationId xmlns:a16="http://schemas.microsoft.com/office/drawing/2014/main" id="{08B0769E-C3DF-2BC3-D46E-9A17468E3767}"/>
+              </a:ext>
+            </a:extLst>
+          </p:cNvPr>
+          <p:cNvCxnSpPr>
+            <a:cxnSpLocks/>
+          </p:cNvCxnSpPr>
+          <p:nvPr/>
+        </p:nvCxnSpPr>
+        <p:spPr>
+          <a:xfrm flipV="1">
+            <a:off x="2991345" y="3705606"/>
+            <a:ext cx="4102069" cy="557784"/>
+          </a:xfrm>
+          <a:prstGeom prst="straightConnector1">
+            <a:avLst/>
+          </a:prstGeom>
+          <a:ln>
+            <a:tailEnd type="triangle"/>
+          </a:ln>
+        </p:spPr>
+        <p:style>
+          <a:lnRef idx="1">
+            <a:schemeClr val="accent1"/>
+          </a:lnRef>
+          <a:fillRef idx="0">
+            <a:schemeClr val="accent1"/>
+          </a:fillRef>
+          <a:effectRef idx="0">
+            <a:schemeClr val="accent1"/>
+          </a:effectRef>
+          <a:fontRef idx="minor">
+            <a:schemeClr val="tx1"/>
+          </a:fontRef>
+        </p:style>
+      </p:cxnSp>
+      <p:pic>
+        <p:nvPicPr>
+          <p:cNvPr id="12" name="Picture 11">
+            <a:extLst>
+              <a:ext uri="{FF2B5EF4-FFF2-40B4-BE49-F238E27FC236}">
+                <a16:creationId xmlns:a16="http://schemas.microsoft.com/office/drawing/2014/main" id="{705FDD7E-6F60-6AB7-DCAA-682EE8E73FB3}"/>
+              </a:ext>
+            </a:extLst>
+          </p:cNvPr>
+          <p:cNvPicPr>
+            <a:picLocks noChangeAspect="1"/>
+          </p:cNvPicPr>
+          <p:nvPr/>
+        </p:nvPicPr>
+        <p:blipFill>
+          <a:blip r:embed="rId5"/>
+          <a:stretch>
+            <a:fillRect/>
+          </a:stretch>
+        </p:blipFill>
+        <p:spPr>
+          <a:xfrm>
+            <a:off x="7193547" y="4200489"/>
+            <a:ext cx="4876082" cy="1600200"/>
+          </a:xfrm>
+          <a:prstGeom prst="rect">
+            <a:avLst/>
+          </a:prstGeom>
+        </p:spPr>
+      </p:pic>
+      <p:cxnSp>
+        <p:nvCxnSpPr>
+          <p:cNvPr id="15" name="Straight Arrow Connector 14">
+            <a:extLst>
+              <a:ext uri="{FF2B5EF4-FFF2-40B4-BE49-F238E27FC236}">
+                <a16:creationId xmlns:a16="http://schemas.microsoft.com/office/drawing/2014/main" id="{9AB10D01-CDA0-9FDD-6E8D-F4BE7DF5E2F0}"/>
+              </a:ext>
+            </a:extLst>
+          </p:cNvPr>
+          <p:cNvCxnSpPr>
+            <a:cxnSpLocks/>
+          </p:cNvCxnSpPr>
+          <p:nvPr/>
+        </p:nvCxnSpPr>
+        <p:spPr>
+          <a:xfrm flipV="1">
+            <a:off x="4998454" y="4736592"/>
+            <a:ext cx="2195093" cy="420624"/>
+          </a:xfrm>
+          <a:prstGeom prst="straightConnector1">
+            <a:avLst/>
+          </a:prstGeom>
+          <a:ln>
+            <a:tailEnd type="triangle"/>
+          </a:ln>
+        </p:spPr>
+        <p:style>
+          <a:lnRef idx="1">
+            <a:schemeClr val="accent1"/>
+          </a:lnRef>
+          <a:fillRef idx="0">
+            <a:schemeClr val="accent1"/>
+          </a:fillRef>
+          <a:effectRef idx="0">
+            <a:schemeClr val="accent1"/>
+          </a:effectRef>
+          <a:fontRef idx="minor">
+            <a:schemeClr val="tx1"/>
+          </a:fontRef>
+        </p:style>
+      </p:cxnSp>
+    </p:spTree>
+    <p:extLst>
+      <p:ext uri="{BB962C8B-B14F-4D97-AF65-F5344CB8AC3E}">
+        <p14:creationId xmlns:p14="http://schemas.microsoft.com/office/powerpoint/2010/main" val="1799578996"/>
       </p:ext>
     </p:extLst>
   </p:cSld>
@@ -4839,10 +5378,10 @@
       </p:grpSpPr>
       <p:sp>
         <p:nvSpPr>
-          <p:cNvPr id="2" name="Rectangle: Rounded Corners 1">
-            <a:extLst>
-              <a:ext uri="{FF2B5EF4-FFF2-40B4-BE49-F238E27FC236}">
-                <a16:creationId xmlns:a16="http://schemas.microsoft.com/office/drawing/2014/main" id="{07C7E0A2-D834-2F24-4E65-196F11BFD7B0}"/>
+          <p:cNvPr id="4" name="Rectangle 3">
+            <a:extLst>
+              <a:ext uri="{FF2B5EF4-FFF2-40B4-BE49-F238E27FC236}">
+                <a16:creationId xmlns:a16="http://schemas.microsoft.com/office/drawing/2014/main" id="{70DA0AC5-B2E1-778C-B445-A5D0265DDFAB}"/>
               </a:ext>
             </a:extLst>
           </p:cNvPr>
@@ -4851,10 +5390,10 @@
         </p:nvSpPr>
         <p:spPr>
           <a:xfrm>
-            <a:off x="4866132" y="201168"/>
-            <a:ext cx="2459736" cy="621792"/>
-          </a:xfrm>
-          <a:prstGeom prst="roundRect">
+            <a:off x="295656" y="1335024"/>
+            <a:ext cx="11600688" cy="5257800"/>
+          </a:xfrm>
+          <a:prstGeom prst="rect">
             <a:avLst/>
           </a:prstGeom>
         </p:spPr>
@@ -4875,55 +5414,6 @@
           </a:fontRef>
         </p:style>
         <p:txBody>
-          <a:bodyPr rtlCol="0" anchor="ctr"/>
-          <a:lstStyle/>
-          <a:p>
-            <a:pPr algn="ctr"/>
-            <a:r>
-              <a:rPr lang="en-US" dirty="0"/>
-              <a:t>GitHub Setup of the Project</a:t>
-            </a:r>
-          </a:p>
-        </p:txBody>
-      </p:sp>
-      <p:sp>
-        <p:nvSpPr>
-          <p:cNvPr id="4" name="Rectangle 3">
-            <a:extLst>
-              <a:ext uri="{FF2B5EF4-FFF2-40B4-BE49-F238E27FC236}">
-                <a16:creationId xmlns:a16="http://schemas.microsoft.com/office/drawing/2014/main" id="{70DA0AC5-B2E1-778C-B445-A5D0265DDFAB}"/>
-              </a:ext>
-            </a:extLst>
-          </p:cNvPr>
-          <p:cNvSpPr/>
-          <p:nvPr/>
-        </p:nvSpPr>
-        <p:spPr>
-          <a:xfrm>
-            <a:off x="295656" y="1335024"/>
-            <a:ext cx="11600688" cy="5257800"/>
-          </a:xfrm>
-          <a:prstGeom prst="rect">
-            <a:avLst/>
-          </a:prstGeom>
-        </p:spPr>
-        <p:style>
-          <a:lnRef idx="2">
-            <a:schemeClr val="accent5">
-              <a:shade val="15000"/>
-            </a:schemeClr>
-          </a:lnRef>
-          <a:fillRef idx="1">
-            <a:schemeClr val="accent5"/>
-          </a:fillRef>
-          <a:effectRef idx="0">
-            <a:schemeClr val="accent5"/>
-          </a:effectRef>
-          <a:fontRef idx="minor">
-            <a:schemeClr val="lt1"/>
-          </a:fontRef>
-        </p:style>
-        <p:txBody>
           <a:bodyPr rtlCol="0" anchor="t"/>
           <a:lstStyle/>
           <a:p>
@@ -5852,6 +6342,53 @@
           </a:p>
         </p:txBody>
       </p:sp>
+      <p:pic>
+        <p:nvPicPr>
+          <p:cNvPr id="3" name="Picture 2" descr="Git and Github basics served right. | by Sameer Kashyap | Medium">
+            <a:extLst>
+              <a:ext uri="{FF2B5EF4-FFF2-40B4-BE49-F238E27FC236}">
+                <a16:creationId xmlns:a16="http://schemas.microsoft.com/office/drawing/2014/main" id="{81ECD92A-1673-8E73-2D49-A89A1A8931E9}"/>
+              </a:ext>
+            </a:extLst>
+          </p:cNvPr>
+          <p:cNvPicPr>
+            <a:picLocks noChangeAspect="1" noChangeArrowheads="1"/>
+          </p:cNvPicPr>
+          <p:nvPr/>
+        </p:nvPicPr>
+        <p:blipFill>
+          <a:blip r:embed="rId3">
+            <a:extLst>
+              <a:ext uri="{28A0092B-C50C-407E-A947-70E740481C1C}">
+                <a14:useLocalDpi xmlns:a14="http://schemas.microsoft.com/office/drawing/2010/main" val="0"/>
+              </a:ext>
+            </a:extLst>
+          </a:blip>
+          <a:srcRect/>
+          <a:stretch>
+            <a:fillRect/>
+          </a:stretch>
+        </p:blipFill>
+        <p:spPr bwMode="auto">
+          <a:xfrm>
+            <a:off x="5408253" y="10218"/>
+            <a:ext cx="1375494" cy="591229"/>
+          </a:xfrm>
+          <a:prstGeom prst="rect">
+            <a:avLst/>
+          </a:prstGeom>
+          <a:noFill/>
+          <a:extLst>
+            <a:ext uri="{909E8E84-426E-40DD-AFC4-6F175D3DCCD1}">
+              <a14:hiddenFill xmlns:a14="http://schemas.microsoft.com/office/drawing/2010/main">
+                <a:solidFill>
+                  <a:srgbClr val="FFFFFF"/>
+                </a:solidFill>
+              </a14:hiddenFill>
+            </a:ext>
+          </a:extLst>
+        </p:spPr>
+      </p:pic>
     </p:spTree>
     <p:extLst>
       <p:ext uri="{BB962C8B-B14F-4D97-AF65-F5344CB8AC3E}">
@@ -6202,6 +6739,2114 @@
     <p:extLst>
       <p:ext uri="{BB962C8B-B14F-4D97-AF65-F5344CB8AC3E}">
         <p14:creationId xmlns:p14="http://schemas.microsoft.com/office/powerpoint/2010/main" val="1625477926"/>
+      </p:ext>
+    </p:extLst>
+  </p:cSld>
+  <p:clrMapOvr>
+    <a:masterClrMapping/>
+  </p:clrMapOvr>
+</p:sld>
+</file>
+
+<file path=ppt/slides/slide5.xml><?xml version="1.0" encoding="utf-8"?>
+<p:sld xmlns:a="http://schemas.openxmlformats.org/drawingml/2006/main" xmlns:r="http://schemas.openxmlformats.org/officeDocument/2006/relationships" xmlns:p="http://schemas.openxmlformats.org/presentationml/2006/main">
+  <p:cSld>
+    <p:spTree>
+      <p:nvGrpSpPr>
+        <p:cNvPr id="1" name=""/>
+        <p:cNvGrpSpPr/>
+        <p:nvPr/>
+      </p:nvGrpSpPr>
+      <p:grpSpPr>
+        <a:xfrm>
+          <a:off x="0" y="0"/>
+          <a:ext cx="0" cy="0"/>
+          <a:chOff x="0" y="0"/>
+          <a:chExt cx="0" cy="0"/>
+        </a:xfrm>
+      </p:grpSpPr>
+      <p:sp>
+        <p:nvSpPr>
+          <p:cNvPr id="3" name="TextBox 2">
+            <a:extLst>
+              <a:ext uri="{FF2B5EF4-FFF2-40B4-BE49-F238E27FC236}">
+                <a16:creationId xmlns:a16="http://schemas.microsoft.com/office/drawing/2014/main" id="{EA6C6BAB-A0DC-9A3F-0BBD-AFC7A693BB01}"/>
+              </a:ext>
+            </a:extLst>
+          </p:cNvPr>
+          <p:cNvSpPr txBox="1"/>
+          <p:nvPr/>
+        </p:nvSpPr>
+        <p:spPr>
+          <a:xfrm>
+            <a:off x="576072" y="1353312"/>
+            <a:ext cx="7565982" cy="3416320"/>
+          </a:xfrm>
+          <a:prstGeom prst="rect">
+            <a:avLst/>
+          </a:prstGeom>
+          <a:noFill/>
+        </p:spPr>
+        <p:txBody>
+          <a:bodyPr wrap="none" rtlCol="0">
+            <a:spAutoFit/>
+          </a:bodyPr>
+          <a:lstStyle/>
+          <a:p>
+            <a:pPr marL="285750" indent="-285750">
+              <a:buFontTx/>
+              <a:buChar char="-"/>
+            </a:pPr>
+            <a:r>
+              <a:rPr lang="en-US" dirty="0"/>
+              <a:t>GIT is a Source Code Management Tool. What is SCM and Version Control?</a:t>
+            </a:r>
+          </a:p>
+          <a:p>
+            <a:pPr marL="285750" indent="-285750">
+              <a:buFontTx/>
+              <a:buChar char="-"/>
+            </a:pPr>
+            <a:r>
+              <a:rPr lang="en-US" dirty="0"/>
+              <a:t>Source code is the code that we write for any program</a:t>
+            </a:r>
+          </a:p>
+          <a:p>
+            <a:pPr marL="285750" indent="-285750">
+              <a:buFontTx/>
+              <a:buChar char="-"/>
+            </a:pPr>
+            <a:r>
+              <a:rPr lang="en-US" dirty="0"/>
+              <a:t>Lets say we write some code on day1 &amp; write more code</a:t>
+            </a:r>
+          </a:p>
+          <a:p>
+            <a:r>
+              <a:rPr lang="en-US" dirty="0"/>
+              <a:t>On day 2, so day 1 file is v1 &amp; day 2 file is v2, even though </a:t>
+            </a:r>
+          </a:p>
+          <a:p>
+            <a:r>
+              <a:rPr lang="en-US" dirty="0"/>
+              <a:t>It’s the same file, but it has 2 versions</a:t>
+            </a:r>
+          </a:p>
+          <a:p>
+            <a:pPr marL="285750" indent="-285750">
+              <a:buFontTx/>
+              <a:buChar char="-"/>
+            </a:pPr>
+            <a:r>
+              <a:rPr lang="en-US" dirty="0"/>
+              <a:t>By using “git” we can manage different versions of the code, It’s a SCM tool.</a:t>
+            </a:r>
+          </a:p>
+          <a:p>
+            <a:pPr marL="285750" indent="-285750">
+              <a:buFontTx/>
+              <a:buChar char="-"/>
+            </a:pPr>
+            <a:r>
+              <a:rPr lang="en-US" dirty="0"/>
+              <a:t>Git is a Open Source tool</a:t>
+            </a:r>
+          </a:p>
+          <a:p>
+            <a:pPr marL="285750" indent="-285750">
+              <a:buFontTx/>
+              <a:buChar char="-"/>
+            </a:pPr>
+            <a:r>
+              <a:rPr lang="en-US" dirty="0"/>
+              <a:t>“git </a:t>
+            </a:r>
+            <a:r>
+              <a:rPr lang="en-US" dirty="0" err="1"/>
+              <a:t>init</a:t>
+            </a:r>
+            <a:r>
+              <a:rPr lang="en-US" dirty="0"/>
+              <a:t>” in local folder to local repo, git add &lt;</a:t>
+            </a:r>
+            <a:r>
+              <a:rPr lang="en-US" dirty="0" err="1"/>
+              <a:t>file_name</a:t>
+            </a:r>
+            <a:r>
+              <a:rPr lang="en-US" dirty="0"/>
+              <a:t>&gt; to add the file in</a:t>
+            </a:r>
+          </a:p>
+          <a:p>
+            <a:r>
+              <a:rPr lang="en-US" dirty="0"/>
+              <a:t>Staging area &amp; finally we can commit to take a snapshot of the code</a:t>
+            </a:r>
+          </a:p>
+          <a:p>
+            <a:r>
+              <a:rPr lang="en-US" dirty="0"/>
+              <a:t>git </a:t>
+            </a:r>
+            <a:r>
+              <a:rPr lang="en-US" dirty="0" err="1"/>
+              <a:t>cimmit</a:t>
+            </a:r>
+            <a:r>
+              <a:rPr lang="en-US" dirty="0"/>
+              <a:t> –m “&lt;comment&gt;”</a:t>
+            </a:r>
+          </a:p>
+          <a:p>
+            <a:endParaRPr lang="en-US" dirty="0"/>
+          </a:p>
+          <a:p>
+            <a:r>
+              <a:rPr lang="en-US" dirty="0"/>
+              <a:t>- </a:t>
+            </a:r>
+            <a:r>
+              <a:rPr lang="en-US" b="1" dirty="0"/>
+              <a:t>&lt;skipped&gt;</a:t>
+            </a:r>
+          </a:p>
+        </p:txBody>
+      </p:sp>
+      <p:pic>
+        <p:nvPicPr>
+          <p:cNvPr id="5" name="Picture 4">
+            <a:extLst>
+              <a:ext uri="{FF2B5EF4-FFF2-40B4-BE49-F238E27FC236}">
+                <a16:creationId xmlns:a16="http://schemas.microsoft.com/office/drawing/2014/main" id="{956EBAF2-3070-D4FC-CBAE-BCD02754AC11}"/>
+              </a:ext>
+            </a:extLst>
+          </p:cNvPr>
+          <p:cNvPicPr>
+            <a:picLocks noChangeAspect="1"/>
+          </p:cNvPicPr>
+          <p:nvPr/>
+        </p:nvPicPr>
+        <p:blipFill>
+          <a:blip r:embed="rId2"/>
+          <a:stretch>
+            <a:fillRect/>
+          </a:stretch>
+        </p:blipFill>
+        <p:spPr>
+          <a:xfrm>
+            <a:off x="8142054" y="68258"/>
+            <a:ext cx="4008316" cy="3196150"/>
+          </a:xfrm>
+          <a:prstGeom prst="rect">
+            <a:avLst/>
+          </a:prstGeom>
+        </p:spPr>
+      </p:pic>
+      <p:pic>
+        <p:nvPicPr>
+          <p:cNvPr id="7" name="Picture 6">
+            <a:extLst>
+              <a:ext uri="{FF2B5EF4-FFF2-40B4-BE49-F238E27FC236}">
+                <a16:creationId xmlns:a16="http://schemas.microsoft.com/office/drawing/2014/main" id="{7CD1F3C7-5650-73AB-731F-79AB0B49B4EA}"/>
+              </a:ext>
+            </a:extLst>
+          </p:cNvPr>
+          <p:cNvPicPr>
+            <a:picLocks noChangeAspect="1"/>
+          </p:cNvPicPr>
+          <p:nvPr/>
+        </p:nvPicPr>
+        <p:blipFill>
+          <a:blip r:embed="rId3"/>
+          <a:stretch>
+            <a:fillRect/>
+          </a:stretch>
+        </p:blipFill>
+        <p:spPr>
+          <a:xfrm>
+            <a:off x="8142055" y="3364992"/>
+            <a:ext cx="4008316" cy="3322623"/>
+          </a:xfrm>
+          <a:prstGeom prst="rect">
+            <a:avLst/>
+          </a:prstGeom>
+        </p:spPr>
+      </p:pic>
+      <p:pic>
+        <p:nvPicPr>
+          <p:cNvPr id="2050" name="Picture 2" descr="Git and Github basics served right. | by Sameer Kashyap | Medium">
+            <a:extLst>
+              <a:ext uri="{FF2B5EF4-FFF2-40B4-BE49-F238E27FC236}">
+                <a16:creationId xmlns:a16="http://schemas.microsoft.com/office/drawing/2014/main" id="{3A025A47-27DA-30A1-C245-8094B7AF2585}"/>
+              </a:ext>
+            </a:extLst>
+          </p:cNvPr>
+          <p:cNvPicPr>
+            <a:picLocks noChangeAspect="1" noChangeArrowheads="1"/>
+          </p:cNvPicPr>
+          <p:nvPr/>
+        </p:nvPicPr>
+        <p:blipFill>
+          <a:blip r:embed="rId4">
+            <a:extLst>
+              <a:ext uri="{28A0092B-C50C-407E-A947-70E740481C1C}">
+                <a14:useLocalDpi xmlns:a14="http://schemas.microsoft.com/office/drawing/2010/main" val="0"/>
+              </a:ext>
+            </a:extLst>
+          </a:blip>
+          <a:srcRect/>
+          <a:stretch>
+            <a:fillRect/>
+          </a:stretch>
+        </p:blipFill>
+        <p:spPr bwMode="auto">
+          <a:xfrm>
+            <a:off x="4359063" y="0"/>
+            <a:ext cx="1375494" cy="591229"/>
+          </a:xfrm>
+          <a:prstGeom prst="rect">
+            <a:avLst/>
+          </a:prstGeom>
+          <a:noFill/>
+          <a:extLst>
+            <a:ext uri="{909E8E84-426E-40DD-AFC4-6F175D3DCCD1}">
+              <a14:hiddenFill xmlns:a14="http://schemas.microsoft.com/office/drawing/2010/main">
+                <a:solidFill>
+                  <a:srgbClr val="FFFFFF"/>
+                </a:solidFill>
+              </a14:hiddenFill>
+            </a:ext>
+          </a:extLst>
+        </p:spPr>
+      </p:pic>
+    </p:spTree>
+    <p:extLst>
+      <p:ext uri="{BB962C8B-B14F-4D97-AF65-F5344CB8AC3E}">
+        <p14:creationId xmlns:p14="http://schemas.microsoft.com/office/powerpoint/2010/main" val="1075447266"/>
+      </p:ext>
+    </p:extLst>
+  </p:cSld>
+  <p:clrMapOvr>
+    <a:masterClrMapping/>
+  </p:clrMapOvr>
+</p:sld>
+</file>
+
+<file path=ppt/slides/slide6.xml><?xml version="1.0" encoding="utf-8"?>
+<p:sld xmlns:a="http://schemas.openxmlformats.org/drawingml/2006/main" xmlns:r="http://schemas.openxmlformats.org/officeDocument/2006/relationships" xmlns:p="http://schemas.openxmlformats.org/presentationml/2006/main">
+  <p:cSld>
+    <p:spTree>
+      <p:nvGrpSpPr>
+        <p:cNvPr id="1" name=""/>
+        <p:cNvGrpSpPr/>
+        <p:nvPr/>
+      </p:nvGrpSpPr>
+      <p:grpSpPr>
+        <a:xfrm>
+          <a:off x="0" y="0"/>
+          <a:ext cx="0" cy="0"/>
+          <a:chOff x="0" y="0"/>
+          <a:chExt cx="0" cy="0"/>
+        </a:xfrm>
+      </p:grpSpPr>
+      <p:sp>
+        <p:nvSpPr>
+          <p:cNvPr id="4" name="TextBox 3">
+            <a:extLst>
+              <a:ext uri="{FF2B5EF4-FFF2-40B4-BE49-F238E27FC236}">
+                <a16:creationId xmlns:a16="http://schemas.microsoft.com/office/drawing/2014/main" id="{658FC4DD-64E6-31A2-0173-4A37668BA387}"/>
+              </a:ext>
+            </a:extLst>
+          </p:cNvPr>
+          <p:cNvSpPr txBox="1"/>
+          <p:nvPr/>
+        </p:nvSpPr>
+        <p:spPr>
+          <a:xfrm>
+            <a:off x="234615" y="219456"/>
+            <a:ext cx="10722359" cy="5755422"/>
+          </a:xfrm>
+          <a:prstGeom prst="rect">
+            <a:avLst/>
+          </a:prstGeom>
+          <a:noFill/>
+        </p:spPr>
+        <p:txBody>
+          <a:bodyPr wrap="none" rtlCol="0">
+            <a:spAutoFit/>
+          </a:bodyPr>
+          <a:lstStyle/>
+          <a:p>
+            <a:pPr marL="285750" indent="-285750">
+              <a:buFontTx/>
+              <a:buChar char="-"/>
+            </a:pPr>
+            <a:r>
+              <a:rPr lang="en-US" sz="1600" dirty="0"/>
+              <a:t>What is docker?</a:t>
+            </a:r>
+          </a:p>
+          <a:p>
+            <a:pPr marL="285750" indent="-285750">
+              <a:buFontTx/>
+              <a:buChar char="-"/>
+            </a:pPr>
+            <a:r>
+              <a:rPr lang="en-US" sz="1600" dirty="0"/>
+              <a:t>Docker was developed in 2013 developed by Solomon Hikes. It’s open-source tool.</a:t>
+            </a:r>
+          </a:p>
+          <a:p>
+            <a:pPr marL="285750" indent="-285750">
+              <a:buFontTx/>
+              <a:buChar char="-"/>
+            </a:pPr>
+            <a:r>
+              <a:rPr lang="en-US" sz="1600" dirty="0"/>
+              <a:t>Actual virtualization is done by “docker engine”</a:t>
+            </a:r>
+          </a:p>
+          <a:p>
+            <a:pPr marL="285750" indent="-285750">
+              <a:buFontTx/>
+              <a:buChar char="-"/>
+            </a:pPr>
+            <a:r>
+              <a:rPr lang="en-US" sz="1600" dirty="0"/>
+              <a:t>Written using “Go” language of google.</a:t>
+            </a:r>
+          </a:p>
+          <a:p>
+            <a:pPr marL="285750" indent="-285750">
+              <a:buFontTx/>
+              <a:buChar char="-"/>
+            </a:pPr>
+            <a:r>
+              <a:rPr lang="en-US" sz="1600" dirty="0"/>
+              <a:t>There are 3 services: IAAS, PAAS, SAAS. Docker is a PAAS since its providing a platform to run application</a:t>
+            </a:r>
+          </a:p>
+          <a:p>
+            <a:pPr marL="285750" indent="-285750">
+              <a:buFontTx/>
+              <a:buChar char="-"/>
+            </a:pPr>
+            <a:r>
+              <a:rPr lang="en-US" sz="1600" dirty="0"/>
+              <a:t>We can build, run &amp; deploy application using docker</a:t>
+            </a:r>
+          </a:p>
+          <a:p>
+            <a:pPr marL="285750" indent="-285750">
+              <a:buFontTx/>
+              <a:buChar char="-"/>
+            </a:pPr>
+            <a:endParaRPr lang="en-US" sz="1600" dirty="0"/>
+          </a:p>
+          <a:p>
+            <a:pPr marL="285750" indent="-285750">
+              <a:buFontTx/>
+              <a:buChar char="-"/>
+            </a:pPr>
+            <a:r>
+              <a:rPr lang="en-US" sz="1600" dirty="0"/>
+              <a:t>What was the problem before?</a:t>
+            </a:r>
+          </a:p>
+          <a:p>
+            <a:pPr marL="285750" indent="-285750">
+              <a:buFontTx/>
+              <a:buChar char="-"/>
+            </a:pPr>
+            <a:r>
+              <a:rPr lang="en-US" sz="1600" dirty="0"/>
+              <a:t>Lets say we have a development, testing and deployment team. When development team creates a program and send it to </a:t>
+            </a:r>
+          </a:p>
+          <a:p>
+            <a:r>
+              <a:rPr lang="en-US" sz="1600" dirty="0"/>
+              <a:t>Testing team to test, Its doesn’t work on their system due to development environment or dependencies not available.</a:t>
+            </a:r>
+          </a:p>
+          <a:p>
+            <a:pPr marL="285750" indent="-285750">
+              <a:buFontTx/>
+              <a:buChar char="-"/>
+            </a:pPr>
+            <a:r>
+              <a:rPr lang="en-US" sz="1600" dirty="0"/>
+              <a:t>Or when we write code in our local system, It works flawlessly but when we deploy it on </a:t>
+            </a:r>
+            <a:r>
+              <a:rPr lang="en-US" sz="1600" dirty="0" err="1"/>
+              <a:t>aws</a:t>
+            </a:r>
+            <a:r>
+              <a:rPr lang="en-US" sz="1600" dirty="0"/>
+              <a:t> or cloud then it fails, it gives</a:t>
+            </a:r>
+          </a:p>
+          <a:p>
+            <a:r>
+              <a:rPr lang="en-US" sz="1600" dirty="0"/>
+              <a:t>“internal server error”</a:t>
+            </a:r>
+          </a:p>
+          <a:p>
+            <a:pPr marL="285750" indent="-285750">
+              <a:buFontTx/>
+              <a:buChar char="-"/>
+            </a:pPr>
+            <a:r>
+              <a:rPr lang="en-US" sz="1600" dirty="0"/>
+              <a:t>Solution was “Virtualization” and actual program which is responsible for virtualization called</a:t>
+            </a:r>
+          </a:p>
+          <a:p>
+            <a:r>
+              <a:rPr lang="en-US" sz="1600" dirty="0"/>
+              <a:t>“hypervisor”</a:t>
+            </a:r>
+          </a:p>
+          <a:p>
+            <a:pPr marL="285750" indent="-285750">
+              <a:buFontTx/>
+              <a:buChar char="-"/>
+            </a:pPr>
+            <a:r>
+              <a:rPr lang="en-US" sz="1600" dirty="0"/>
+              <a:t>We can create multiple VMs by sharing resources using hypervisor and we can create a template</a:t>
+            </a:r>
+          </a:p>
+          <a:p>
+            <a:r>
+              <a:rPr lang="en-US" sz="1600" dirty="0"/>
+              <a:t>Of it and share that template to Testing team and it will work on their system also but the issue</a:t>
+            </a:r>
+          </a:p>
+          <a:p>
+            <a:r>
+              <a:rPr lang="en-US" sz="1600" dirty="0"/>
+              <a:t>with this is that we cant create unlimited VMs since its sharing the resources of the host pc since </a:t>
+            </a:r>
+          </a:p>
+          <a:p>
+            <a:r>
+              <a:rPr lang="en-US" sz="1600" dirty="0"/>
+              <a:t>Resources are fixed and will not be free until VM are shut down.</a:t>
+            </a:r>
+          </a:p>
+          <a:p>
+            <a:pPr marL="285750" indent="-285750">
+              <a:buFontTx/>
+              <a:buChar char="-"/>
+            </a:pPr>
+            <a:r>
+              <a:rPr lang="en-US" sz="1600" dirty="0"/>
+              <a:t>We are installing separate OS in virtualization which takes more memory. Solution to this is</a:t>
+            </a:r>
+          </a:p>
+          <a:p>
+            <a:r>
+              <a:rPr lang="en-US" sz="1600" dirty="0"/>
+              <a:t>“Containerization”, we can use Docker Engine for containerization. In containerization we share </a:t>
+            </a:r>
+          </a:p>
+          <a:p>
+            <a:r>
+              <a:rPr lang="en-US" sz="1600" dirty="0"/>
+              <a:t>Host OS &amp; resources and they are not fixed. Its not directly interacting with hardware.</a:t>
+            </a:r>
+          </a:p>
+          <a:p>
+            <a:pPr marL="285750" indent="-285750">
+              <a:buFontTx/>
+              <a:buChar char="-"/>
+            </a:pPr>
+            <a:r>
+              <a:rPr lang="en-US" sz="1600" dirty="0"/>
+              <a:t>Port Mapping: Lets say we’re running flask on docker which uses 5000 port but we cant access it on host </a:t>
+            </a:r>
+            <a:r>
+              <a:rPr lang="en-US" sz="1600" dirty="0" err="1"/>
+              <a:t>os</a:t>
+            </a:r>
+            <a:endParaRPr lang="en-US" sz="1600" dirty="0"/>
+          </a:p>
+          <a:p>
+            <a:r>
+              <a:rPr lang="en-US" sz="1600" dirty="0"/>
+              <a:t>unless its mapped, 5000(host port): 5000(container app port)</a:t>
+            </a:r>
+          </a:p>
+        </p:txBody>
+      </p:sp>
+      <p:pic>
+        <p:nvPicPr>
+          <p:cNvPr id="8" name="Picture 7">
+            <a:extLst>
+              <a:ext uri="{FF2B5EF4-FFF2-40B4-BE49-F238E27FC236}">
+                <a16:creationId xmlns:a16="http://schemas.microsoft.com/office/drawing/2014/main" id="{545888E4-0E68-F522-2766-07FB990A2885}"/>
+              </a:ext>
+            </a:extLst>
+          </p:cNvPr>
+          <p:cNvPicPr>
+            <a:picLocks noChangeAspect="1"/>
+          </p:cNvPicPr>
+          <p:nvPr/>
+        </p:nvPicPr>
+        <p:blipFill>
+          <a:blip r:embed="rId2"/>
+          <a:stretch>
+            <a:fillRect/>
+          </a:stretch>
+        </p:blipFill>
+        <p:spPr>
+          <a:xfrm>
+            <a:off x="9627945" y="3339840"/>
+            <a:ext cx="2448312" cy="2448312"/>
+          </a:xfrm>
+          <a:prstGeom prst="rect">
+            <a:avLst/>
+          </a:prstGeom>
+        </p:spPr>
+      </p:pic>
+      <p:pic>
+        <p:nvPicPr>
+          <p:cNvPr id="9" name="Picture 4" descr="Docker for Developers: Understanding the Core Concepts – Code with Dan Blog">
+            <a:extLst>
+              <a:ext uri="{FF2B5EF4-FFF2-40B4-BE49-F238E27FC236}">
+                <a16:creationId xmlns:a16="http://schemas.microsoft.com/office/drawing/2014/main" id="{D96A6FB8-47E6-EF09-B392-C4BD24A7FA75}"/>
+              </a:ext>
+            </a:extLst>
+          </p:cNvPr>
+          <p:cNvPicPr>
+            <a:picLocks noChangeAspect="1" noChangeArrowheads="1"/>
+          </p:cNvPicPr>
+          <p:nvPr/>
+        </p:nvPicPr>
+        <p:blipFill>
+          <a:blip r:embed="rId3">
+            <a:extLst>
+              <a:ext uri="{28A0092B-C50C-407E-A947-70E740481C1C}">
+                <a14:useLocalDpi xmlns:a14="http://schemas.microsoft.com/office/drawing/2010/main" val="0"/>
+              </a:ext>
+            </a:extLst>
+          </a:blip>
+          <a:srcRect/>
+          <a:stretch>
+            <a:fillRect/>
+          </a:stretch>
+        </p:blipFill>
+        <p:spPr bwMode="auto">
+          <a:xfrm>
+            <a:off x="5206253" y="-73319"/>
+            <a:ext cx="889747" cy="585550"/>
+          </a:xfrm>
+          <a:prstGeom prst="rect">
+            <a:avLst/>
+          </a:prstGeom>
+          <a:noFill/>
+          <a:extLst>
+            <a:ext uri="{909E8E84-426E-40DD-AFC4-6F175D3DCCD1}">
+              <a14:hiddenFill xmlns:a14="http://schemas.microsoft.com/office/drawing/2010/main">
+                <a:solidFill>
+                  <a:srgbClr val="FFFFFF"/>
+                </a:solidFill>
+              </a14:hiddenFill>
+            </a:ext>
+          </a:extLst>
+        </p:spPr>
+      </p:pic>
+    </p:spTree>
+    <p:extLst>
+      <p:ext uri="{BB962C8B-B14F-4D97-AF65-F5344CB8AC3E}">
+        <p14:creationId xmlns:p14="http://schemas.microsoft.com/office/powerpoint/2010/main" val="698163394"/>
+      </p:ext>
+    </p:extLst>
+  </p:cSld>
+  <p:clrMapOvr>
+    <a:masterClrMapping/>
+  </p:clrMapOvr>
+</p:sld>
+</file>
+
+<file path=ppt/slides/slide7.xml><?xml version="1.0" encoding="utf-8"?>
+<p:sld xmlns:a="http://schemas.openxmlformats.org/drawingml/2006/main" xmlns:r="http://schemas.openxmlformats.org/officeDocument/2006/relationships" xmlns:p="http://schemas.openxmlformats.org/presentationml/2006/main">
+  <p:cSld>
+    <p:spTree>
+      <p:nvGrpSpPr>
+        <p:cNvPr id="1" name=""/>
+        <p:cNvGrpSpPr/>
+        <p:nvPr/>
+      </p:nvGrpSpPr>
+      <p:grpSpPr>
+        <a:xfrm>
+          <a:off x="0" y="0"/>
+          <a:ext cx="0" cy="0"/>
+          <a:chOff x="0" y="0"/>
+          <a:chExt cx="0" cy="0"/>
+        </a:xfrm>
+      </p:grpSpPr>
+      <p:sp>
+        <p:nvSpPr>
+          <p:cNvPr id="4" name="TextBox 3">
+            <a:extLst>
+              <a:ext uri="{FF2B5EF4-FFF2-40B4-BE49-F238E27FC236}">
+                <a16:creationId xmlns:a16="http://schemas.microsoft.com/office/drawing/2014/main" id="{4E0E8D03-CF9D-DE5B-CDCF-8AE33D679EE1}"/>
+              </a:ext>
+            </a:extLst>
+          </p:cNvPr>
+          <p:cNvSpPr txBox="1"/>
+          <p:nvPr/>
+        </p:nvSpPr>
+        <p:spPr>
+          <a:xfrm>
+            <a:off x="365760" y="379476"/>
+            <a:ext cx="9597499" cy="5847755"/>
+          </a:xfrm>
+          <a:prstGeom prst="rect">
+            <a:avLst/>
+          </a:prstGeom>
+          <a:noFill/>
+        </p:spPr>
+        <p:txBody>
+          <a:bodyPr wrap="none" rtlCol="0">
+            <a:spAutoFit/>
+          </a:bodyPr>
+          <a:lstStyle/>
+          <a:p>
+            <a:pPr marL="285750" indent="-285750">
+              <a:buFontTx/>
+              <a:buChar char="-"/>
+            </a:pPr>
+            <a:r>
+              <a:rPr lang="en-US" sz="1100" b="1" dirty="0"/>
+              <a:t>TASK: Create flask app and run it on docker container inside docker image</a:t>
+            </a:r>
+            <a:br>
+              <a:rPr lang="en-US" sz="1100" b="1" dirty="0"/>
+            </a:br>
+            <a:endParaRPr lang="en-US" sz="1100" b="1" dirty="0"/>
+          </a:p>
+          <a:p>
+            <a:pPr marL="285750" indent="-285750">
+              <a:buFontTx/>
+              <a:buChar char="-"/>
+            </a:pPr>
+            <a:r>
+              <a:rPr lang="en-US" sz="1100" b="1" dirty="0"/>
+              <a:t>Inside docker hub there are images of almost all technologies like </a:t>
+            </a:r>
+            <a:r>
+              <a:rPr lang="en-US" sz="1100" b="1" dirty="0" err="1"/>
+              <a:t>os</a:t>
+            </a:r>
+            <a:r>
+              <a:rPr lang="en-US" sz="1100" b="1" dirty="0"/>
+              <a:t>, web servers like nginx, </a:t>
+            </a:r>
+            <a:r>
+              <a:rPr lang="en-US" sz="1100" b="1" dirty="0" err="1"/>
+              <a:t>dbs</a:t>
+            </a:r>
+            <a:r>
+              <a:rPr lang="en-US" sz="1100" b="1" dirty="0"/>
+              <a:t> like </a:t>
+            </a:r>
+            <a:r>
+              <a:rPr lang="en-US" sz="1100" b="1" dirty="0" err="1"/>
+              <a:t>sql</a:t>
+            </a:r>
+            <a:r>
+              <a:rPr lang="en-US" sz="1100" b="1" dirty="0"/>
+              <a:t> </a:t>
+            </a:r>
+            <a:r>
+              <a:rPr lang="en-US" sz="1100" b="1" dirty="0" err="1"/>
+              <a:t>etc</a:t>
+            </a:r>
+            <a:endParaRPr lang="en-US" sz="1100" b="1" dirty="0"/>
+          </a:p>
+          <a:p>
+            <a:pPr marL="285750" indent="-285750">
+              <a:buFontTx/>
+              <a:buChar char="-"/>
+            </a:pPr>
+            <a:r>
+              <a:rPr lang="en-US" sz="1100" b="1" dirty="0"/>
+              <a:t>There are 3 ways to  create a image:</a:t>
+            </a:r>
+          </a:p>
+          <a:p>
+            <a:pPr marL="800100" lvl="1" indent="-342900">
+              <a:buAutoNum type="arabicPeriod"/>
+            </a:pPr>
+            <a:r>
+              <a:rPr lang="en-US" sz="1100" b="1" dirty="0"/>
+              <a:t>We can write a docker file and create image</a:t>
+            </a:r>
+          </a:p>
+          <a:p>
+            <a:pPr marL="800100" lvl="1" indent="-342900">
+              <a:buAutoNum type="arabicPeriod"/>
+            </a:pPr>
+            <a:r>
+              <a:rPr lang="en-US" sz="1100" b="1" dirty="0"/>
+              <a:t>We can create image directly from container</a:t>
+            </a:r>
+          </a:p>
+          <a:p>
+            <a:pPr marL="285750" indent="-285750">
+              <a:buFontTx/>
+              <a:buChar char="-"/>
+            </a:pPr>
+            <a:r>
+              <a:rPr lang="en-US" sz="1100" b="1" dirty="0"/>
+              <a:t>Run “docker images” to check all images</a:t>
+            </a:r>
+          </a:p>
+          <a:p>
+            <a:pPr marL="285750" indent="-285750">
+              <a:buFontTx/>
+              <a:buChar char="-"/>
+            </a:pPr>
+            <a:r>
+              <a:rPr lang="en-US" sz="1100" b="1" dirty="0"/>
+              <a:t>Run “docker </a:t>
+            </a:r>
+            <a:r>
+              <a:rPr lang="en-US" sz="1100" b="1" dirty="0" err="1"/>
+              <a:t>ps</a:t>
+            </a:r>
+            <a:r>
+              <a:rPr lang="en-US" sz="1100" b="1" dirty="0"/>
+              <a:t>” to check all running containers</a:t>
+            </a:r>
+          </a:p>
+          <a:p>
+            <a:pPr marL="285750" indent="-285750">
+              <a:buFontTx/>
+              <a:buChar char="-"/>
+            </a:pPr>
+            <a:endParaRPr lang="en-US" sz="1100" b="1" dirty="0"/>
+          </a:p>
+          <a:p>
+            <a:pPr marL="285750" indent="-285750">
+              <a:buFontTx/>
+              <a:buChar char="-"/>
+            </a:pPr>
+            <a:r>
+              <a:rPr lang="en-US" sz="1100" b="1" dirty="0"/>
+              <a:t>Create app.py file for flask and run it on local system</a:t>
+            </a:r>
+          </a:p>
+          <a:p>
+            <a:pPr marL="285750" indent="-285750">
+              <a:buFontTx/>
+              <a:buChar char="-"/>
+            </a:pPr>
+            <a:r>
+              <a:rPr lang="en-US" sz="1100" b="1" dirty="0"/>
+              <a:t>Now we can containerize this app, there 3 ways to create a image</a:t>
+            </a:r>
+          </a:p>
+          <a:p>
+            <a:pPr marL="742950" lvl="1" indent="-285750">
+              <a:buFontTx/>
+              <a:buChar char="-"/>
+            </a:pPr>
+            <a:r>
+              <a:rPr lang="en-US" sz="1100" b="1" dirty="0"/>
+              <a:t>Write a docker file for this app and create a docker image</a:t>
+            </a:r>
+          </a:p>
+          <a:p>
+            <a:pPr marL="742950" lvl="1" indent="-285750">
+              <a:buFontTx/>
+              <a:buChar char="-"/>
+            </a:pPr>
+            <a:r>
+              <a:rPr lang="en-US" sz="1100" b="1" dirty="0"/>
+              <a:t>Run this docker image inside container</a:t>
+            </a:r>
+          </a:p>
+          <a:p>
+            <a:pPr marL="742950" lvl="1" indent="-285750">
+              <a:buFontTx/>
+              <a:buChar char="-"/>
+            </a:pPr>
+            <a:r>
+              <a:rPr lang="en-US" sz="1100" b="1" dirty="0"/>
+              <a:t>By default, Flask runs on 5000 port</a:t>
+            </a:r>
+          </a:p>
+          <a:p>
+            <a:pPr marL="742950" lvl="1" indent="-285750">
+              <a:buFontTx/>
+              <a:buChar char="-"/>
+            </a:pPr>
+            <a:r>
+              <a:rPr lang="en-US" sz="1100" b="1" dirty="0"/>
+              <a:t>To access the flask app on local system which is running inside the container we need to perform port mapping</a:t>
+            </a:r>
+          </a:p>
+          <a:p>
+            <a:pPr lvl="1"/>
+            <a:r>
+              <a:rPr lang="en-US" sz="1100" b="1" dirty="0"/>
+              <a:t>“host port : container port”</a:t>
+            </a:r>
+          </a:p>
+          <a:p>
+            <a:pPr lvl="1"/>
+            <a:endParaRPr lang="en-US" sz="1100" b="1" dirty="0"/>
+          </a:p>
+          <a:p>
+            <a:pPr marL="285750" indent="-285750">
+              <a:buFontTx/>
+              <a:buChar char="-"/>
+            </a:pPr>
+            <a:r>
+              <a:rPr lang="en-US" sz="1100" b="1" dirty="0"/>
+              <a:t>In summary, we need to create a docker file to create a docker image of flask app &amp; run that image inside docker</a:t>
+            </a:r>
+          </a:p>
+          <a:p>
+            <a:r>
+              <a:rPr lang="en-US" sz="1100" b="1" dirty="0"/>
+              <a:t>Container, to access the flask app in local system, we need to perform port mapping</a:t>
+            </a:r>
+          </a:p>
+          <a:p>
+            <a:endParaRPr lang="en-US" sz="1100" b="1" dirty="0"/>
+          </a:p>
+          <a:p>
+            <a:pPr marL="285750" indent="-285750">
+              <a:buFontTx/>
+              <a:buChar char="-"/>
+            </a:pPr>
+            <a:r>
+              <a:rPr lang="en-US" sz="1100" b="1" dirty="0"/>
+              <a:t>In order to create image we have 2 ways:</a:t>
+            </a:r>
+          </a:p>
+          <a:p>
+            <a:r>
+              <a:rPr lang="en-US" sz="1100" b="1" dirty="0"/>
+              <a:t>	1. Create a docker file which contains instructions</a:t>
+            </a:r>
+          </a:p>
+          <a:p>
+            <a:r>
+              <a:rPr lang="en-US" sz="1100" b="1" dirty="0"/>
+              <a:t>	2. Create an image directly using docker commands</a:t>
+            </a:r>
+          </a:p>
+          <a:p>
+            <a:endParaRPr lang="en-US" sz="1100" b="1" dirty="0"/>
+          </a:p>
+          <a:p>
+            <a:pPr marL="171450" indent="-171450">
+              <a:buFontTx/>
+              <a:buChar char="-"/>
+            </a:pPr>
+            <a:r>
+              <a:rPr lang="en-US" sz="1100" b="1" dirty="0"/>
+              <a:t>Write docker file : FROM, COPY, WORKDIR, RUN, CMD</a:t>
+            </a:r>
+          </a:p>
+          <a:p>
+            <a:pPr marL="171450" indent="-171450">
+              <a:buFontTx/>
+              <a:buChar char="-"/>
+            </a:pPr>
+            <a:r>
+              <a:rPr lang="en-US" sz="1100" b="1" dirty="0"/>
+              <a:t>Create docker image using this docker file: “docker build  -t &lt;image name&gt; &lt;.&gt;”</a:t>
+            </a:r>
+          </a:p>
+          <a:p>
+            <a:pPr marL="171450" indent="-171450">
+              <a:buFontTx/>
+              <a:buChar char="-"/>
+            </a:pPr>
+            <a:r>
+              <a:rPr lang="en-US" sz="1100" b="1" dirty="0"/>
+              <a:t>Image name = image name we want to keep &amp; “.” means file is available in the same folder</a:t>
+            </a:r>
+          </a:p>
+          <a:p>
+            <a:pPr marL="171450" indent="-171450">
+              <a:buFontTx/>
+              <a:buChar char="-"/>
+            </a:pPr>
+            <a:r>
+              <a:rPr lang="en-US" sz="1100" b="1" dirty="0"/>
+              <a:t>Once image is created, check it : “docker images” (This is the 1</a:t>
+            </a:r>
+            <a:r>
+              <a:rPr lang="en-US" sz="1100" b="1" baseline="30000" dirty="0"/>
+              <a:t>st</a:t>
+            </a:r>
+            <a:r>
+              <a:rPr lang="en-US" sz="1100" b="1" dirty="0"/>
+              <a:t> way to create an image, 2</a:t>
+            </a:r>
+            <a:r>
+              <a:rPr lang="en-US" sz="1100" b="1" baseline="30000" dirty="0"/>
+              <a:t>nd</a:t>
+            </a:r>
+            <a:r>
+              <a:rPr lang="en-US" sz="1100" b="1" dirty="0"/>
+              <a:t> way is we can convert container to image &amp; share it to next team)</a:t>
+            </a:r>
+          </a:p>
+          <a:p>
+            <a:pPr marL="171450" indent="-171450">
+              <a:buFontTx/>
+              <a:buChar char="-"/>
+            </a:pPr>
+            <a:r>
+              <a:rPr lang="en-US" sz="1100" b="1" dirty="0"/>
+              <a:t>Now we can run this image in container: docker run -d -p &lt;</a:t>
+            </a:r>
+            <a:r>
+              <a:rPr lang="en-US" sz="1100" b="1" dirty="0" err="1"/>
+              <a:t>host_port</a:t>
+            </a:r>
+            <a:r>
+              <a:rPr lang="en-US" sz="1100" b="1" dirty="0"/>
+              <a:t>&gt;:&lt;</a:t>
+            </a:r>
+            <a:r>
+              <a:rPr lang="en-US" sz="1100" b="1" dirty="0" err="1"/>
+              <a:t>container_port</a:t>
+            </a:r>
+            <a:r>
+              <a:rPr lang="en-US" sz="1100" b="1" dirty="0"/>
+              <a:t>&gt; &lt;</a:t>
+            </a:r>
+            <a:r>
+              <a:rPr lang="en-US" sz="1100" b="1" dirty="0" err="1"/>
+              <a:t>image_name</a:t>
+            </a:r>
+            <a:r>
+              <a:rPr lang="en-US" sz="1100" b="1" dirty="0"/>
+              <a:t>&gt;</a:t>
+            </a:r>
+          </a:p>
+          <a:p>
+            <a:pPr marL="171450" indent="-171450">
+              <a:buFontTx/>
+              <a:buChar char="-"/>
+            </a:pPr>
+            <a:r>
+              <a:rPr lang="en-US" sz="1100" b="1" dirty="0"/>
+              <a:t>docker run –d –p 5000:5000 </a:t>
+            </a:r>
+            <a:r>
+              <a:rPr lang="en-US" sz="1100" b="1" dirty="0" err="1"/>
+              <a:t>myhelloapp</a:t>
+            </a:r>
+            <a:endParaRPr lang="en-US" sz="1100" b="1" dirty="0"/>
+          </a:p>
+          <a:p>
+            <a:pPr marL="171450" indent="-171450">
+              <a:buFontTx/>
+              <a:buChar char="-"/>
+            </a:pPr>
+            <a:r>
+              <a:rPr lang="en-US" sz="1100" b="1" dirty="0"/>
+              <a:t>Now check in local browser: </a:t>
+            </a:r>
+            <a:r>
+              <a:rPr lang="en-US" sz="1100" b="1" dirty="0">
+                <a:hlinkClick r:id="rId2"/>
+              </a:rPr>
+              <a:t>http://localhost:5000/</a:t>
+            </a:r>
+            <a:r>
+              <a:rPr lang="en-US" sz="1100" b="1" dirty="0"/>
+              <a:t> this app is running from container</a:t>
+            </a:r>
+          </a:p>
+          <a:p>
+            <a:pPr marL="171450" indent="-171450">
+              <a:buFontTx/>
+              <a:buChar char="-"/>
+            </a:pPr>
+            <a:r>
+              <a:rPr lang="en-US" sz="1100" b="1" dirty="0"/>
+              <a:t>To stop this container and free resources: docker stop &lt;</a:t>
+            </a:r>
+            <a:r>
+              <a:rPr lang="en-US" sz="1100" b="1" dirty="0" err="1"/>
+              <a:t>containerid</a:t>
+            </a:r>
+            <a:r>
+              <a:rPr lang="en-US" sz="1100" b="1" dirty="0"/>
+              <a:t>&gt;</a:t>
+            </a:r>
+          </a:p>
+          <a:p>
+            <a:pPr marL="171450" indent="-171450">
+              <a:buFontTx/>
+              <a:buChar char="-"/>
+            </a:pPr>
+            <a:r>
+              <a:rPr lang="en-US" sz="1100" b="1" dirty="0"/>
+              <a:t>Container is an isolated process</a:t>
+            </a:r>
+          </a:p>
+        </p:txBody>
+      </p:sp>
+      <p:pic>
+        <p:nvPicPr>
+          <p:cNvPr id="6" name="Picture 5">
+            <a:extLst>
+              <a:ext uri="{FF2B5EF4-FFF2-40B4-BE49-F238E27FC236}">
+                <a16:creationId xmlns:a16="http://schemas.microsoft.com/office/drawing/2014/main" id="{8F64A991-5A3E-7970-CC55-D8FF54904789}"/>
+              </a:ext>
+            </a:extLst>
+          </p:cNvPr>
+          <p:cNvPicPr>
+            <a:picLocks noChangeAspect="1"/>
+          </p:cNvPicPr>
+          <p:nvPr/>
+        </p:nvPicPr>
+        <p:blipFill>
+          <a:blip r:embed="rId3"/>
+          <a:stretch>
+            <a:fillRect/>
+          </a:stretch>
+        </p:blipFill>
+        <p:spPr>
+          <a:xfrm>
+            <a:off x="7348727" y="130111"/>
+            <a:ext cx="4752976" cy="2347913"/>
+          </a:xfrm>
+          <a:prstGeom prst="rect">
+            <a:avLst/>
+          </a:prstGeom>
+        </p:spPr>
+      </p:pic>
+      <p:cxnSp>
+        <p:nvCxnSpPr>
+          <p:cNvPr id="8" name="Straight Arrow Connector 7">
+            <a:extLst>
+              <a:ext uri="{FF2B5EF4-FFF2-40B4-BE49-F238E27FC236}">
+                <a16:creationId xmlns:a16="http://schemas.microsoft.com/office/drawing/2014/main" id="{7239C7E7-365D-70C0-189F-62F08077D83D}"/>
+              </a:ext>
+            </a:extLst>
+          </p:cNvPr>
+          <p:cNvCxnSpPr/>
+          <p:nvPr/>
+        </p:nvCxnSpPr>
+        <p:spPr>
+          <a:xfrm flipV="1">
+            <a:off x="5184648" y="1773936"/>
+            <a:ext cx="2084832" cy="2889504"/>
+          </a:xfrm>
+          <a:prstGeom prst="straightConnector1">
+            <a:avLst/>
+          </a:prstGeom>
+          <a:ln>
+            <a:tailEnd type="triangle"/>
+          </a:ln>
+        </p:spPr>
+        <p:style>
+          <a:lnRef idx="1">
+            <a:schemeClr val="accent1"/>
+          </a:lnRef>
+          <a:fillRef idx="0">
+            <a:schemeClr val="accent1"/>
+          </a:fillRef>
+          <a:effectRef idx="0">
+            <a:schemeClr val="accent1"/>
+          </a:effectRef>
+          <a:fontRef idx="minor">
+            <a:schemeClr val="tx1"/>
+          </a:fontRef>
+        </p:style>
+      </p:cxnSp>
+      <p:pic>
+        <p:nvPicPr>
+          <p:cNvPr id="10" name="Picture 9">
+            <a:extLst>
+              <a:ext uri="{FF2B5EF4-FFF2-40B4-BE49-F238E27FC236}">
+                <a16:creationId xmlns:a16="http://schemas.microsoft.com/office/drawing/2014/main" id="{8BF727A4-7DBB-AAC7-8C54-4A13D4F35BF0}"/>
+              </a:ext>
+            </a:extLst>
+          </p:cNvPr>
+          <p:cNvPicPr>
+            <a:picLocks noChangeAspect="1"/>
+          </p:cNvPicPr>
+          <p:nvPr/>
+        </p:nvPicPr>
+        <p:blipFill>
+          <a:blip r:embed="rId4"/>
+          <a:stretch>
+            <a:fillRect/>
+          </a:stretch>
+        </p:blipFill>
+        <p:spPr>
+          <a:xfrm>
+            <a:off x="7310613" y="3509773"/>
+            <a:ext cx="4777755" cy="870204"/>
+          </a:xfrm>
+          <a:prstGeom prst="rect">
+            <a:avLst/>
+          </a:prstGeom>
+        </p:spPr>
+      </p:pic>
+      <p:cxnSp>
+        <p:nvCxnSpPr>
+          <p:cNvPr id="12" name="Straight Arrow Connector 11">
+            <a:extLst>
+              <a:ext uri="{FF2B5EF4-FFF2-40B4-BE49-F238E27FC236}">
+                <a16:creationId xmlns:a16="http://schemas.microsoft.com/office/drawing/2014/main" id="{E10D6CAE-4963-3805-FE75-65ABDC7BB991}"/>
+              </a:ext>
+            </a:extLst>
+          </p:cNvPr>
+          <p:cNvCxnSpPr/>
+          <p:nvPr/>
+        </p:nvCxnSpPr>
+        <p:spPr>
+          <a:xfrm flipV="1">
+            <a:off x="3502152" y="4187952"/>
+            <a:ext cx="3767328" cy="868680"/>
+          </a:xfrm>
+          <a:prstGeom prst="straightConnector1">
+            <a:avLst/>
+          </a:prstGeom>
+          <a:ln>
+            <a:tailEnd type="triangle"/>
+          </a:ln>
+        </p:spPr>
+        <p:style>
+          <a:lnRef idx="1">
+            <a:schemeClr val="accent1"/>
+          </a:lnRef>
+          <a:fillRef idx="0">
+            <a:schemeClr val="accent1"/>
+          </a:fillRef>
+          <a:effectRef idx="0">
+            <a:schemeClr val="accent1"/>
+          </a:effectRef>
+          <a:fontRef idx="minor">
+            <a:schemeClr val="tx1"/>
+          </a:fontRef>
+        </p:style>
+      </p:cxnSp>
+      <p:pic>
+        <p:nvPicPr>
+          <p:cNvPr id="14" name="Picture 13">
+            <a:extLst>
+              <a:ext uri="{FF2B5EF4-FFF2-40B4-BE49-F238E27FC236}">
+                <a16:creationId xmlns:a16="http://schemas.microsoft.com/office/drawing/2014/main" id="{B9CCE167-FDDC-AF8E-C676-F476EE30297B}"/>
+              </a:ext>
+            </a:extLst>
+          </p:cNvPr>
+          <p:cNvPicPr>
+            <a:picLocks noChangeAspect="1"/>
+          </p:cNvPicPr>
+          <p:nvPr/>
+        </p:nvPicPr>
+        <p:blipFill>
+          <a:blip r:embed="rId5"/>
+          <a:stretch>
+            <a:fillRect/>
+          </a:stretch>
+        </p:blipFill>
+        <p:spPr>
+          <a:xfrm>
+            <a:off x="6967728" y="5173599"/>
+            <a:ext cx="5079508" cy="1304925"/>
+          </a:xfrm>
+          <a:prstGeom prst="rect">
+            <a:avLst/>
+          </a:prstGeom>
+        </p:spPr>
+      </p:pic>
+      <p:cxnSp>
+        <p:nvCxnSpPr>
+          <p:cNvPr id="16" name="Connector: Elbow 15">
+            <a:extLst>
+              <a:ext uri="{FF2B5EF4-FFF2-40B4-BE49-F238E27FC236}">
+                <a16:creationId xmlns:a16="http://schemas.microsoft.com/office/drawing/2014/main" id="{1308D23C-FCD5-74F6-DFF6-30405E9856F6}"/>
+              </a:ext>
+            </a:extLst>
+          </p:cNvPr>
+          <p:cNvCxnSpPr>
+            <a:cxnSpLocks/>
+            <a:endCxn id="14" idx="1"/>
+          </p:cNvCxnSpPr>
+          <p:nvPr/>
+        </p:nvCxnSpPr>
+        <p:spPr>
+          <a:xfrm rot="16200000" flipH="1">
+            <a:off x="6509861" y="5368195"/>
+            <a:ext cx="623126" cy="292608"/>
+          </a:xfrm>
+          <a:prstGeom prst="bentConnector2">
+            <a:avLst/>
+          </a:prstGeom>
+          <a:ln>
+            <a:tailEnd type="triangle"/>
+          </a:ln>
+        </p:spPr>
+        <p:style>
+          <a:lnRef idx="1">
+            <a:schemeClr val="accent1"/>
+          </a:lnRef>
+          <a:fillRef idx="0">
+            <a:schemeClr val="accent1"/>
+          </a:fillRef>
+          <a:effectRef idx="0">
+            <a:schemeClr val="accent1"/>
+          </a:effectRef>
+          <a:fontRef idx="minor">
+            <a:schemeClr val="tx1"/>
+          </a:fontRef>
+        </p:style>
+      </p:cxnSp>
+      <p:pic>
+        <p:nvPicPr>
+          <p:cNvPr id="20" name="Picture 4" descr="Docker for Developers: Understanding the Core Concepts – Code with Dan Blog">
+            <a:extLst>
+              <a:ext uri="{FF2B5EF4-FFF2-40B4-BE49-F238E27FC236}">
+                <a16:creationId xmlns:a16="http://schemas.microsoft.com/office/drawing/2014/main" id="{5C5FD608-C934-BAEE-9BC3-3C6D140C88C4}"/>
+              </a:ext>
+            </a:extLst>
+          </p:cNvPr>
+          <p:cNvPicPr>
+            <a:picLocks noChangeAspect="1" noChangeArrowheads="1"/>
+          </p:cNvPicPr>
+          <p:nvPr/>
+        </p:nvPicPr>
+        <p:blipFill>
+          <a:blip r:embed="rId6">
+            <a:extLst>
+              <a:ext uri="{28A0092B-C50C-407E-A947-70E740481C1C}">
+                <a14:useLocalDpi xmlns:a14="http://schemas.microsoft.com/office/drawing/2010/main" val="0"/>
+              </a:ext>
+            </a:extLst>
+          </a:blip>
+          <a:srcRect/>
+          <a:stretch>
+            <a:fillRect/>
+          </a:stretch>
+        </p:blipFill>
+        <p:spPr bwMode="auto">
+          <a:xfrm>
+            <a:off x="4719635" y="-42553"/>
+            <a:ext cx="889747" cy="585550"/>
+          </a:xfrm>
+          <a:prstGeom prst="rect">
+            <a:avLst/>
+          </a:prstGeom>
+          <a:noFill/>
+          <a:extLst>
+            <a:ext uri="{909E8E84-426E-40DD-AFC4-6F175D3DCCD1}">
+              <a14:hiddenFill xmlns:a14="http://schemas.microsoft.com/office/drawing/2010/main">
+                <a:solidFill>
+                  <a:srgbClr val="FFFFFF"/>
+                </a:solidFill>
+              </a14:hiddenFill>
+            </a:ext>
+          </a:extLst>
+        </p:spPr>
+      </p:pic>
+    </p:spTree>
+    <p:extLst>
+      <p:ext uri="{BB962C8B-B14F-4D97-AF65-F5344CB8AC3E}">
+        <p14:creationId xmlns:p14="http://schemas.microsoft.com/office/powerpoint/2010/main" val="1246518113"/>
+      </p:ext>
+    </p:extLst>
+  </p:cSld>
+  <p:clrMapOvr>
+    <a:masterClrMapping/>
+  </p:clrMapOvr>
+</p:sld>
+</file>
+
+<file path=ppt/slides/slide8.xml><?xml version="1.0" encoding="utf-8"?>
+<p:sld xmlns:a="http://schemas.openxmlformats.org/drawingml/2006/main" xmlns:r="http://schemas.openxmlformats.org/officeDocument/2006/relationships" xmlns:p="http://schemas.openxmlformats.org/presentationml/2006/main">
+  <p:cSld>
+    <p:spTree>
+      <p:nvGrpSpPr>
+        <p:cNvPr id="1" name=""/>
+        <p:cNvGrpSpPr/>
+        <p:nvPr/>
+      </p:nvGrpSpPr>
+      <p:grpSpPr>
+        <a:xfrm>
+          <a:off x="0" y="0"/>
+          <a:ext cx="0" cy="0"/>
+          <a:chOff x="0" y="0"/>
+          <a:chExt cx="0" cy="0"/>
+        </a:xfrm>
+      </p:grpSpPr>
+      <p:sp>
+        <p:nvSpPr>
+          <p:cNvPr id="3" name="TextBox 2">
+            <a:extLst>
+              <a:ext uri="{FF2B5EF4-FFF2-40B4-BE49-F238E27FC236}">
+                <a16:creationId xmlns:a16="http://schemas.microsoft.com/office/drawing/2014/main" id="{BF3ADDA4-2D04-9658-132E-D101E1AEA431}"/>
+              </a:ext>
+            </a:extLst>
+          </p:cNvPr>
+          <p:cNvSpPr txBox="1"/>
+          <p:nvPr/>
+        </p:nvSpPr>
+        <p:spPr>
+          <a:xfrm>
+            <a:off x="420624" y="749808"/>
+            <a:ext cx="6723059" cy="3539430"/>
+          </a:xfrm>
+          <a:prstGeom prst="rect">
+            <a:avLst/>
+          </a:prstGeom>
+          <a:noFill/>
+        </p:spPr>
+        <p:txBody>
+          <a:bodyPr wrap="none" rtlCol="0">
+            <a:spAutoFit/>
+          </a:bodyPr>
+          <a:lstStyle/>
+          <a:p>
+            <a:pPr marL="285750" indent="-285750">
+              <a:buFontTx/>
+              <a:buChar char="-"/>
+            </a:pPr>
+            <a:r>
+              <a:rPr lang="en-US" sz="1400" dirty="0"/>
+              <a:t>How to push the image we created previously to docker hub?</a:t>
+            </a:r>
+          </a:p>
+          <a:p>
+            <a:pPr marL="285750" indent="-285750">
+              <a:buFontTx/>
+              <a:buChar char="-"/>
+            </a:pPr>
+            <a:r>
+              <a:rPr lang="en-US" sz="1400" dirty="0"/>
+              <a:t>Docker is same as </a:t>
+            </a:r>
+            <a:r>
+              <a:rPr lang="en-US" sz="1400" dirty="0" err="1"/>
+              <a:t>github</a:t>
+            </a:r>
+            <a:r>
+              <a:rPr lang="en-US" sz="1400" dirty="0"/>
+              <a:t> where we push our repo</a:t>
+            </a:r>
+          </a:p>
+          <a:p>
+            <a:pPr marL="285750" indent="-285750">
+              <a:buFontTx/>
+              <a:buChar char="-"/>
+            </a:pPr>
+            <a:r>
+              <a:rPr lang="en-US" sz="1400" dirty="0"/>
+              <a:t>Login to docker inside terminal: “docker login”</a:t>
+            </a:r>
+          </a:p>
+          <a:p>
+            <a:pPr marL="285750" indent="-285750">
+              <a:buFontTx/>
+              <a:buChar char="-"/>
+            </a:pPr>
+            <a:r>
+              <a:rPr lang="en-US" sz="1400" dirty="0"/>
+              <a:t>Push the image: “docker tag </a:t>
+            </a:r>
+            <a:r>
+              <a:rPr lang="en-US" sz="1400" dirty="0" err="1"/>
+              <a:t>myhelloapp</a:t>
+            </a:r>
+            <a:r>
+              <a:rPr lang="en-US" sz="1400" dirty="0"/>
+              <a:t> iamprashantjain2601/</a:t>
+            </a:r>
+            <a:r>
+              <a:rPr lang="en-US" sz="1400" dirty="0" err="1"/>
+              <a:t>projecthelloappdemo</a:t>
+            </a:r>
+            <a:r>
+              <a:rPr lang="en-US" sz="1400" dirty="0"/>
+              <a:t>”</a:t>
+            </a:r>
+          </a:p>
+          <a:p>
+            <a:pPr marL="285750" indent="-285750">
+              <a:buFontTx/>
+              <a:buChar char="-"/>
+            </a:pPr>
+            <a:endParaRPr lang="en-US" sz="1400" dirty="0"/>
+          </a:p>
+          <a:p>
+            <a:pPr marL="285750" indent="-285750">
+              <a:buFontTx/>
+              <a:buChar char="-"/>
+            </a:pPr>
+            <a:endParaRPr lang="en-US" sz="1400" dirty="0"/>
+          </a:p>
+          <a:p>
+            <a:pPr marL="285750" indent="-285750">
+              <a:buFontTx/>
+              <a:buChar char="-"/>
+            </a:pPr>
+            <a:endParaRPr lang="en-US" sz="1400" dirty="0"/>
+          </a:p>
+          <a:p>
+            <a:pPr marL="285750" indent="-285750">
+              <a:buFontTx/>
+              <a:buChar char="-"/>
+            </a:pPr>
+            <a:endParaRPr lang="en-US" sz="1400" dirty="0"/>
+          </a:p>
+          <a:p>
+            <a:pPr marL="285750" indent="-285750">
+              <a:buFontTx/>
+              <a:buChar char="-"/>
+            </a:pPr>
+            <a:endParaRPr lang="en-US" sz="1400" dirty="0"/>
+          </a:p>
+          <a:p>
+            <a:pPr marL="285750" indent="-285750">
+              <a:buFontTx/>
+              <a:buChar char="-"/>
+            </a:pPr>
+            <a:endParaRPr lang="en-US" sz="1400" dirty="0"/>
+          </a:p>
+          <a:p>
+            <a:pPr marL="285750" indent="-285750">
+              <a:buFontTx/>
+              <a:buChar char="-"/>
+            </a:pPr>
+            <a:endParaRPr lang="en-US" sz="1400" dirty="0"/>
+          </a:p>
+          <a:p>
+            <a:pPr marL="285750" indent="-285750">
+              <a:buFontTx/>
+              <a:buChar char="-"/>
+            </a:pPr>
+            <a:endParaRPr lang="en-US" sz="1400" dirty="0"/>
+          </a:p>
+          <a:p>
+            <a:pPr marL="285750" indent="-285750">
+              <a:buFontTx/>
+              <a:buChar char="-"/>
+            </a:pPr>
+            <a:endParaRPr lang="en-US" sz="1400" dirty="0"/>
+          </a:p>
+          <a:p>
+            <a:pPr marL="285750" indent="-285750">
+              <a:buFontTx/>
+              <a:buChar char="-"/>
+            </a:pPr>
+            <a:endParaRPr lang="en-US" sz="1400" dirty="0"/>
+          </a:p>
+          <a:p>
+            <a:pPr marL="285750" indent="-285750">
+              <a:buFontTx/>
+              <a:buChar char="-"/>
+            </a:pPr>
+            <a:r>
+              <a:rPr lang="en-US" sz="1400" dirty="0"/>
+              <a:t>To push: “docker push &lt;username&gt;/&lt;</a:t>
+            </a:r>
+            <a:r>
+              <a:rPr lang="en-US" sz="1400" dirty="0" err="1"/>
+              <a:t>repo_name</a:t>
+            </a:r>
+            <a:r>
+              <a:rPr lang="en-US" sz="1400" dirty="0"/>
+              <a:t>&gt;”</a:t>
+            </a:r>
+          </a:p>
+          <a:p>
+            <a:pPr marL="285750" indent="-285750">
+              <a:buFontTx/>
+              <a:buChar char="-"/>
+            </a:pPr>
+            <a:endParaRPr lang="en-US" sz="1400" dirty="0"/>
+          </a:p>
+        </p:txBody>
+      </p:sp>
+      <p:pic>
+        <p:nvPicPr>
+          <p:cNvPr id="5" name="Picture 4">
+            <a:extLst>
+              <a:ext uri="{FF2B5EF4-FFF2-40B4-BE49-F238E27FC236}">
+                <a16:creationId xmlns:a16="http://schemas.microsoft.com/office/drawing/2014/main" id="{8873BB9F-4E30-8867-EE7B-9D4165173763}"/>
+              </a:ext>
+            </a:extLst>
+          </p:cNvPr>
+          <p:cNvPicPr>
+            <a:picLocks noChangeAspect="1"/>
+          </p:cNvPicPr>
+          <p:nvPr/>
+        </p:nvPicPr>
+        <p:blipFill>
+          <a:blip r:embed="rId2"/>
+          <a:stretch>
+            <a:fillRect/>
+          </a:stretch>
+        </p:blipFill>
+        <p:spPr>
+          <a:xfrm>
+            <a:off x="816102" y="1685734"/>
+            <a:ext cx="7048500" cy="1895475"/>
+          </a:xfrm>
+          <a:prstGeom prst="rect">
+            <a:avLst/>
+          </a:prstGeom>
+        </p:spPr>
+      </p:pic>
+      <p:pic>
+        <p:nvPicPr>
+          <p:cNvPr id="7" name="Picture 6">
+            <a:extLst>
+              <a:ext uri="{FF2B5EF4-FFF2-40B4-BE49-F238E27FC236}">
+                <a16:creationId xmlns:a16="http://schemas.microsoft.com/office/drawing/2014/main" id="{A5EED22F-EC51-B6F8-72AE-E1D1C9B303AC}"/>
+              </a:ext>
+            </a:extLst>
+          </p:cNvPr>
+          <p:cNvPicPr>
+            <a:picLocks noChangeAspect="1"/>
+          </p:cNvPicPr>
+          <p:nvPr/>
+        </p:nvPicPr>
+        <p:blipFill>
+          <a:blip r:embed="rId3"/>
+          <a:stretch>
+            <a:fillRect/>
+          </a:stretch>
+        </p:blipFill>
+        <p:spPr>
+          <a:xfrm>
+            <a:off x="816102" y="4043743"/>
+            <a:ext cx="9077325" cy="2754821"/>
+          </a:xfrm>
+          <a:prstGeom prst="rect">
+            <a:avLst/>
+          </a:prstGeom>
+        </p:spPr>
+      </p:pic>
+      <p:pic>
+        <p:nvPicPr>
+          <p:cNvPr id="8" name="Picture 4" descr="Docker for Developers: Understanding the Core Concepts – Code with Dan Blog">
+            <a:extLst>
+              <a:ext uri="{FF2B5EF4-FFF2-40B4-BE49-F238E27FC236}">
+                <a16:creationId xmlns:a16="http://schemas.microsoft.com/office/drawing/2014/main" id="{751EA208-EC8C-EE5E-F39E-D315B22084BA}"/>
+              </a:ext>
+            </a:extLst>
+          </p:cNvPr>
+          <p:cNvPicPr>
+            <a:picLocks noChangeAspect="1" noChangeArrowheads="1"/>
+          </p:cNvPicPr>
+          <p:nvPr/>
+        </p:nvPicPr>
+        <p:blipFill>
+          <a:blip r:embed="rId4">
+            <a:extLst>
+              <a:ext uri="{28A0092B-C50C-407E-A947-70E740481C1C}">
+                <a14:useLocalDpi xmlns:a14="http://schemas.microsoft.com/office/drawing/2010/main" val="0"/>
+              </a:ext>
+            </a:extLst>
+          </a:blip>
+          <a:srcRect/>
+          <a:stretch>
+            <a:fillRect/>
+          </a:stretch>
+        </p:blipFill>
+        <p:spPr bwMode="auto">
+          <a:xfrm>
+            <a:off x="4909890" y="-10930"/>
+            <a:ext cx="889747" cy="585550"/>
+          </a:xfrm>
+          <a:prstGeom prst="rect">
+            <a:avLst/>
+          </a:prstGeom>
+          <a:noFill/>
+          <a:extLst>
+            <a:ext uri="{909E8E84-426E-40DD-AFC4-6F175D3DCCD1}">
+              <a14:hiddenFill xmlns:a14="http://schemas.microsoft.com/office/drawing/2010/main">
+                <a:solidFill>
+                  <a:srgbClr val="FFFFFF"/>
+                </a:solidFill>
+              </a14:hiddenFill>
+            </a:ext>
+          </a:extLst>
+        </p:spPr>
+      </p:pic>
+    </p:spTree>
+    <p:extLst>
+      <p:ext uri="{BB962C8B-B14F-4D97-AF65-F5344CB8AC3E}">
+        <p14:creationId xmlns:p14="http://schemas.microsoft.com/office/powerpoint/2010/main" val="1402613706"/>
+      </p:ext>
+    </p:extLst>
+  </p:cSld>
+  <p:clrMapOvr>
+    <a:masterClrMapping/>
+  </p:clrMapOvr>
+</p:sld>
+</file>
+
+<file path=ppt/slides/slide9.xml><?xml version="1.0" encoding="utf-8"?>
+<p:sld xmlns:a="http://schemas.openxmlformats.org/drawingml/2006/main" xmlns:r="http://schemas.openxmlformats.org/officeDocument/2006/relationships" xmlns:p="http://schemas.openxmlformats.org/presentationml/2006/main">
+  <p:cSld>
+    <p:spTree>
+      <p:nvGrpSpPr>
+        <p:cNvPr id="1" name=""/>
+        <p:cNvGrpSpPr/>
+        <p:nvPr/>
+      </p:nvGrpSpPr>
+      <p:grpSpPr>
+        <a:xfrm>
+          <a:off x="0" y="0"/>
+          <a:ext cx="0" cy="0"/>
+          <a:chOff x="0" y="0"/>
+          <a:chExt cx="0" cy="0"/>
+        </a:xfrm>
+      </p:grpSpPr>
+      <p:sp>
+        <p:nvSpPr>
+          <p:cNvPr id="5" name="TextBox 4">
+            <a:extLst>
+              <a:ext uri="{FF2B5EF4-FFF2-40B4-BE49-F238E27FC236}">
+                <a16:creationId xmlns:a16="http://schemas.microsoft.com/office/drawing/2014/main" id="{8F8D8FE7-FE56-A402-6344-F244C2C0EBB2}"/>
+              </a:ext>
+            </a:extLst>
+          </p:cNvPr>
+          <p:cNvSpPr txBox="1"/>
+          <p:nvPr/>
+        </p:nvSpPr>
+        <p:spPr>
+          <a:xfrm>
+            <a:off x="740664" y="832104"/>
+            <a:ext cx="8107028" cy="5078313"/>
+          </a:xfrm>
+          <a:prstGeom prst="rect">
+            <a:avLst/>
+          </a:prstGeom>
+          <a:noFill/>
+        </p:spPr>
+        <p:txBody>
+          <a:bodyPr wrap="none" rtlCol="0">
+            <a:spAutoFit/>
+          </a:bodyPr>
+          <a:lstStyle/>
+          <a:p>
+            <a:pPr marL="285750" indent="-285750">
+              <a:buFontTx/>
+              <a:buChar char="-"/>
+            </a:pPr>
+            <a:r>
+              <a:rPr lang="en-US" sz="1200" dirty="0"/>
+              <a:t>After it pushed to docker hub, anyone can use it by pulling it same as we push &amp; pull in </a:t>
+            </a:r>
+            <a:r>
+              <a:rPr lang="en-US" sz="1200" dirty="0" err="1"/>
+              <a:t>github</a:t>
+            </a:r>
+            <a:endParaRPr lang="en-US" sz="1200" dirty="0"/>
+          </a:p>
+          <a:p>
+            <a:pPr marL="285750" indent="-285750">
+              <a:buFontTx/>
+              <a:buChar char="-"/>
+            </a:pPr>
+            <a:r>
+              <a:rPr lang="en-US" sz="1200" dirty="0"/>
+              <a:t>“docker pull iamprashantjain2601/</a:t>
+            </a:r>
+            <a:r>
+              <a:rPr lang="en-US" sz="1200" dirty="0" err="1"/>
+              <a:t>projecthelloappdemo</a:t>
+            </a:r>
+            <a:r>
+              <a:rPr lang="en-US" sz="1200" dirty="0"/>
+              <a:t>”</a:t>
+            </a:r>
+          </a:p>
+          <a:p>
+            <a:pPr marL="285750" indent="-285750">
+              <a:buFontTx/>
+              <a:buChar char="-"/>
+            </a:pPr>
+            <a:r>
+              <a:rPr lang="en-US" sz="1200" dirty="0"/>
+              <a:t>We have various ways to create docker images</a:t>
+            </a:r>
+          </a:p>
+          <a:p>
+            <a:r>
+              <a:rPr lang="en-US" sz="1200" dirty="0"/>
+              <a:t>	1. docker file</a:t>
+            </a:r>
+          </a:p>
+          <a:p>
+            <a:r>
+              <a:rPr lang="en-US" sz="1200" dirty="0"/>
+              <a:t>	2. pull image from docker hub &amp; run inside container</a:t>
+            </a:r>
+          </a:p>
+          <a:p>
+            <a:r>
+              <a:rPr lang="en-US" sz="1200" dirty="0"/>
+              <a:t>	3. create image from docker container</a:t>
+            </a:r>
+          </a:p>
+          <a:p>
+            <a:endParaRPr lang="en-US" sz="1200" dirty="0"/>
+          </a:p>
+          <a:p>
+            <a:r>
+              <a:rPr lang="en-US" sz="1200" dirty="0"/>
+              <a:t>-      </a:t>
+            </a:r>
+            <a:r>
+              <a:rPr lang="en-US" sz="1200" b="1" dirty="0">
+                <a:solidFill>
+                  <a:srgbClr val="FF0000"/>
+                </a:solidFill>
+              </a:rPr>
+              <a:t>How to pull the image and run inside container?</a:t>
+            </a:r>
+          </a:p>
+          <a:p>
+            <a:r>
+              <a:rPr lang="en-US" sz="1200" dirty="0"/>
+              <a:t>-      There is a component inside docker “docker engine”</a:t>
+            </a:r>
+          </a:p>
+          <a:p>
+            <a:pPr marL="285750" indent="-285750">
+              <a:buFontTx/>
+              <a:buChar char="-"/>
+            </a:pPr>
+            <a:r>
+              <a:rPr lang="en-US" sz="1200" dirty="0"/>
+              <a:t>If we run the image 1</a:t>
+            </a:r>
+            <a:r>
+              <a:rPr lang="en-US" sz="1200" baseline="30000" dirty="0"/>
+              <a:t>st</a:t>
+            </a:r>
+            <a:r>
+              <a:rPr lang="en-US" sz="1200" dirty="0"/>
+              <a:t> time, it will find that image in local system, if its not found then it will fetch from </a:t>
+            </a:r>
+            <a:r>
+              <a:rPr lang="en-US" sz="1200" dirty="0" err="1"/>
+              <a:t>dockerhub</a:t>
+            </a:r>
+            <a:endParaRPr lang="en-US" sz="1200" dirty="0"/>
+          </a:p>
+          <a:p>
+            <a:pPr marL="285750" indent="-285750">
+              <a:buFontTx/>
+              <a:buChar char="-"/>
+            </a:pPr>
+            <a:r>
+              <a:rPr lang="en-US" sz="1200" dirty="0"/>
+              <a:t>Pull: “docker pull </a:t>
+            </a:r>
+            <a:r>
+              <a:rPr lang="en-US" sz="1200" dirty="0" err="1"/>
+              <a:t>redis</a:t>
+            </a:r>
+            <a:r>
+              <a:rPr lang="en-US" sz="1200" dirty="0"/>
+              <a:t>”</a:t>
+            </a:r>
+          </a:p>
+          <a:p>
+            <a:pPr marL="285750" indent="-285750">
+              <a:buFontTx/>
+              <a:buChar char="-"/>
+            </a:pPr>
+            <a:r>
+              <a:rPr lang="en-US" sz="1200" dirty="0"/>
+              <a:t>Run: ”docker run –</a:t>
+            </a:r>
+            <a:r>
+              <a:rPr lang="en-US" sz="1200" dirty="0" err="1"/>
+              <a:t>i</a:t>
+            </a:r>
+            <a:r>
+              <a:rPr lang="en-US" sz="1200" dirty="0"/>
+              <a:t> –t ubuntu /bin/bash”</a:t>
+            </a:r>
+          </a:p>
+          <a:p>
+            <a:pPr marL="285750" indent="-285750">
+              <a:buFontTx/>
+              <a:buChar char="-"/>
+            </a:pPr>
+            <a:endParaRPr lang="en-US" sz="1200" dirty="0"/>
+          </a:p>
+          <a:p>
+            <a:pPr marL="285750" indent="-285750">
+              <a:buFontTx/>
+              <a:buChar char="-"/>
+            </a:pPr>
+            <a:endParaRPr lang="en-US" sz="1200" dirty="0"/>
+          </a:p>
+          <a:p>
+            <a:pPr marL="285750" indent="-285750">
+              <a:buFontTx/>
+              <a:buChar char="-"/>
+            </a:pPr>
+            <a:endParaRPr lang="en-US" sz="1200" dirty="0"/>
+          </a:p>
+          <a:p>
+            <a:pPr marL="285750" indent="-285750">
+              <a:buFontTx/>
+              <a:buChar char="-"/>
+            </a:pPr>
+            <a:endParaRPr lang="en-US" sz="1200" dirty="0"/>
+          </a:p>
+          <a:p>
+            <a:pPr marL="285750" indent="-285750">
+              <a:buFontTx/>
+              <a:buChar char="-"/>
+            </a:pPr>
+            <a:endParaRPr lang="en-US" sz="1200" dirty="0"/>
+          </a:p>
+          <a:p>
+            <a:pPr marL="285750" indent="-285750">
+              <a:buFontTx/>
+              <a:buChar char="-"/>
+            </a:pPr>
+            <a:endParaRPr lang="en-US" sz="1200" dirty="0"/>
+          </a:p>
+          <a:p>
+            <a:pPr marL="285750" indent="-285750">
+              <a:buFontTx/>
+              <a:buChar char="-"/>
+            </a:pPr>
+            <a:endParaRPr lang="en-US" sz="1200" dirty="0"/>
+          </a:p>
+          <a:p>
+            <a:pPr marL="285750" indent="-285750">
+              <a:buFontTx/>
+              <a:buChar char="-"/>
+            </a:pPr>
+            <a:endParaRPr lang="en-US" sz="1200" dirty="0"/>
+          </a:p>
+          <a:p>
+            <a:pPr marL="285750" indent="-285750">
+              <a:buFontTx/>
+              <a:buChar char="-"/>
+            </a:pPr>
+            <a:r>
+              <a:rPr lang="en-US" sz="1200" dirty="0"/>
+              <a:t>When we are pulling </a:t>
+            </a:r>
+            <a:r>
+              <a:rPr lang="en-US" sz="1200" dirty="0" err="1"/>
+              <a:t>os</a:t>
+            </a:r>
+            <a:r>
+              <a:rPr lang="en-US" sz="1200" dirty="0"/>
+              <a:t> like ubuntu, its not going to pull entire OS, only some utility files and rest will be used from host </a:t>
+            </a:r>
+            <a:r>
+              <a:rPr lang="en-US" sz="1200" dirty="0" err="1"/>
+              <a:t>os</a:t>
+            </a:r>
+            <a:endParaRPr lang="en-US" sz="1200" dirty="0"/>
+          </a:p>
+          <a:p>
+            <a:pPr marL="285750" indent="-285750">
+              <a:buFontTx/>
+              <a:buChar char="-"/>
+            </a:pPr>
+            <a:r>
+              <a:rPr lang="en-US" sz="1200" dirty="0">
+                <a:solidFill>
+                  <a:srgbClr val="FF0000"/>
+                </a:solidFill>
+              </a:rPr>
+              <a:t>How to Run any image directly inside the container?</a:t>
+            </a:r>
+          </a:p>
+          <a:p>
+            <a:pPr marL="285750" indent="-285750">
+              <a:buFontTx/>
+              <a:buChar char="-"/>
+            </a:pPr>
+            <a:r>
+              <a:rPr lang="en-US" sz="1200" dirty="0"/>
+              <a:t>docker run -it </a:t>
+            </a:r>
+            <a:r>
+              <a:rPr lang="en-US" sz="1200" dirty="0" err="1"/>
+              <a:t>kalilinux</a:t>
+            </a:r>
+            <a:r>
+              <a:rPr lang="en-US" sz="1200" dirty="0"/>
+              <a:t>/kali-rolling /bin/</a:t>
+            </a:r>
+            <a:r>
+              <a:rPr lang="en-US" sz="1200" dirty="0" err="1"/>
+              <a:t>sh</a:t>
+            </a:r>
+            <a:r>
+              <a:rPr lang="en-US" sz="1200" dirty="0"/>
+              <a:t> (“</a:t>
+            </a:r>
+            <a:r>
+              <a:rPr lang="en-US" sz="1200" dirty="0" err="1"/>
+              <a:t>kalilinux</a:t>
+            </a:r>
+            <a:r>
+              <a:rPr lang="en-US" sz="1200" dirty="0"/>
+              <a:t>/kali-rolling “ is the new image name)</a:t>
+            </a:r>
+          </a:p>
+          <a:p>
+            <a:pPr marL="285750" indent="-285750">
+              <a:buFontTx/>
+              <a:buChar char="-"/>
+            </a:pPr>
+            <a:endParaRPr lang="en-US" sz="1200" dirty="0"/>
+          </a:p>
+          <a:p>
+            <a:pPr marL="285750" indent="-285750">
+              <a:buFontTx/>
+              <a:buChar char="-"/>
+            </a:pPr>
+            <a:endParaRPr lang="en-US" sz="1200" dirty="0"/>
+          </a:p>
+          <a:p>
+            <a:r>
+              <a:rPr lang="en-US" sz="1200" dirty="0"/>
+              <a:t>      </a:t>
+            </a:r>
+          </a:p>
+        </p:txBody>
+      </p:sp>
+      <p:pic>
+        <p:nvPicPr>
+          <p:cNvPr id="7" name="Picture 6">
+            <a:extLst>
+              <a:ext uri="{FF2B5EF4-FFF2-40B4-BE49-F238E27FC236}">
+                <a16:creationId xmlns:a16="http://schemas.microsoft.com/office/drawing/2014/main" id="{BD889FF2-FA51-581B-829F-41AA10FBD89F}"/>
+              </a:ext>
+            </a:extLst>
+          </p:cNvPr>
+          <p:cNvPicPr>
+            <a:picLocks noChangeAspect="1"/>
+          </p:cNvPicPr>
+          <p:nvPr/>
+        </p:nvPicPr>
+        <p:blipFill>
+          <a:blip r:embed="rId2"/>
+          <a:stretch>
+            <a:fillRect/>
+          </a:stretch>
+        </p:blipFill>
+        <p:spPr>
+          <a:xfrm>
+            <a:off x="740664" y="3088767"/>
+            <a:ext cx="9496425" cy="1309497"/>
+          </a:xfrm>
+          <a:prstGeom prst="rect">
+            <a:avLst/>
+          </a:prstGeom>
+        </p:spPr>
+      </p:pic>
+      <p:pic>
+        <p:nvPicPr>
+          <p:cNvPr id="9" name="Picture 8">
+            <a:extLst>
+              <a:ext uri="{FF2B5EF4-FFF2-40B4-BE49-F238E27FC236}">
+                <a16:creationId xmlns:a16="http://schemas.microsoft.com/office/drawing/2014/main" id="{B42CB7B2-4774-954A-E04F-BC4AB18216B7}"/>
+              </a:ext>
+            </a:extLst>
+          </p:cNvPr>
+          <p:cNvPicPr>
+            <a:picLocks noChangeAspect="1"/>
+          </p:cNvPicPr>
+          <p:nvPr/>
+        </p:nvPicPr>
+        <p:blipFill>
+          <a:blip r:embed="rId3"/>
+          <a:stretch>
+            <a:fillRect/>
+          </a:stretch>
+        </p:blipFill>
+        <p:spPr>
+          <a:xfrm>
+            <a:off x="740663" y="5145840"/>
+            <a:ext cx="9496425" cy="1410408"/>
+          </a:xfrm>
+          <a:prstGeom prst="rect">
+            <a:avLst/>
+          </a:prstGeom>
+        </p:spPr>
+      </p:pic>
+      <p:pic>
+        <p:nvPicPr>
+          <p:cNvPr id="10" name="Picture 4" descr="Docker for Developers: Understanding the Core Concepts – Code with Dan Blog">
+            <a:extLst>
+              <a:ext uri="{FF2B5EF4-FFF2-40B4-BE49-F238E27FC236}">
+                <a16:creationId xmlns:a16="http://schemas.microsoft.com/office/drawing/2014/main" id="{18384F9D-C38A-F4FE-1275-6135A0D7624F}"/>
+              </a:ext>
+            </a:extLst>
+          </p:cNvPr>
+          <p:cNvPicPr>
+            <a:picLocks noChangeAspect="1" noChangeArrowheads="1"/>
+          </p:cNvPicPr>
+          <p:nvPr/>
+        </p:nvPicPr>
+        <p:blipFill>
+          <a:blip r:embed="rId4">
+            <a:extLst>
+              <a:ext uri="{28A0092B-C50C-407E-A947-70E740481C1C}">
+                <a14:useLocalDpi xmlns:a14="http://schemas.microsoft.com/office/drawing/2010/main" val="0"/>
+              </a:ext>
+            </a:extLst>
+          </a:blip>
+          <a:srcRect/>
+          <a:stretch>
+            <a:fillRect/>
+          </a:stretch>
+        </p:blipFill>
+        <p:spPr bwMode="auto">
+          <a:xfrm>
+            <a:off x="5271517" y="0"/>
+            <a:ext cx="889747" cy="585550"/>
+          </a:xfrm>
+          <a:prstGeom prst="rect">
+            <a:avLst/>
+          </a:prstGeom>
+          <a:noFill/>
+          <a:extLst>
+            <a:ext uri="{909E8E84-426E-40DD-AFC4-6F175D3DCCD1}">
+              <a14:hiddenFill xmlns:a14="http://schemas.microsoft.com/office/drawing/2010/main">
+                <a:solidFill>
+                  <a:srgbClr val="FFFFFF"/>
+                </a:solidFill>
+              </a14:hiddenFill>
+            </a:ext>
+          </a:extLst>
+        </p:spPr>
+      </p:pic>
+    </p:spTree>
+    <p:extLst>
+      <p:ext uri="{BB962C8B-B14F-4D97-AF65-F5344CB8AC3E}">
+        <p14:creationId xmlns:p14="http://schemas.microsoft.com/office/powerpoint/2010/main" val="3520430122"/>
       </p:ext>
     </p:extLst>
   </p:cSld>

--- a/MLOps1.pptx
+++ b/MLOps1.pptx
@@ -8,13 +8,14 @@
     <p:sldId id="256" r:id="rId2"/>
     <p:sldId id="257" r:id="rId3"/>
     <p:sldId id="258" r:id="rId4"/>
-    <p:sldId id="259" r:id="rId5"/>
-    <p:sldId id="260" r:id="rId6"/>
-    <p:sldId id="261" r:id="rId7"/>
-    <p:sldId id="262" r:id="rId8"/>
-    <p:sldId id="263" r:id="rId9"/>
-    <p:sldId id="264" r:id="rId10"/>
-    <p:sldId id="265" r:id="rId11"/>
+    <p:sldId id="266" r:id="rId5"/>
+    <p:sldId id="259" r:id="rId6"/>
+    <p:sldId id="260" r:id="rId7"/>
+    <p:sldId id="261" r:id="rId8"/>
+    <p:sldId id="262" r:id="rId9"/>
+    <p:sldId id="263" r:id="rId10"/>
+    <p:sldId id="264" r:id="rId11"/>
+    <p:sldId id="265" r:id="rId12"/>
   </p:sldIdLst>
   <p:sldSz cx="12192000" cy="6858000"/>
   <p:notesSz cx="6858000" cy="9144000"/>
@@ -268,7 +269,7 @@
           <a:p>
             <a:fld id="{8340E07E-EE19-4182-A636-F839E11FFF2A}" type="datetimeFigureOut">
               <a:rPr lang="en-US" smtClean="0"/>
-              <a:t>11/5/2024</a:t>
+              <a:t>11/6/2024</a:t>
             </a:fld>
             <a:endParaRPr lang="en-US"/>
           </a:p>
@@ -466,7 +467,7 @@
           <a:p>
             <a:fld id="{8340E07E-EE19-4182-A636-F839E11FFF2A}" type="datetimeFigureOut">
               <a:rPr lang="en-US" smtClean="0"/>
-              <a:t>11/5/2024</a:t>
+              <a:t>11/6/2024</a:t>
             </a:fld>
             <a:endParaRPr lang="en-US"/>
           </a:p>
@@ -674,7 +675,7 @@
           <a:p>
             <a:fld id="{8340E07E-EE19-4182-A636-F839E11FFF2A}" type="datetimeFigureOut">
               <a:rPr lang="en-US" smtClean="0"/>
-              <a:t>11/5/2024</a:t>
+              <a:t>11/6/2024</a:t>
             </a:fld>
             <a:endParaRPr lang="en-US"/>
           </a:p>
@@ -872,7 +873,7 @@
           <a:p>
             <a:fld id="{8340E07E-EE19-4182-A636-F839E11FFF2A}" type="datetimeFigureOut">
               <a:rPr lang="en-US" smtClean="0"/>
-              <a:t>11/5/2024</a:t>
+              <a:t>11/6/2024</a:t>
             </a:fld>
             <a:endParaRPr lang="en-US"/>
           </a:p>
@@ -1147,7 +1148,7 @@
           <a:p>
             <a:fld id="{8340E07E-EE19-4182-A636-F839E11FFF2A}" type="datetimeFigureOut">
               <a:rPr lang="en-US" smtClean="0"/>
-              <a:t>11/5/2024</a:t>
+              <a:t>11/6/2024</a:t>
             </a:fld>
             <a:endParaRPr lang="en-US"/>
           </a:p>
@@ -1412,7 +1413,7 @@
           <a:p>
             <a:fld id="{8340E07E-EE19-4182-A636-F839E11FFF2A}" type="datetimeFigureOut">
               <a:rPr lang="en-US" smtClean="0"/>
-              <a:t>11/5/2024</a:t>
+              <a:t>11/6/2024</a:t>
             </a:fld>
             <a:endParaRPr lang="en-US"/>
           </a:p>
@@ -1824,7 +1825,7 @@
           <a:p>
             <a:fld id="{8340E07E-EE19-4182-A636-F839E11FFF2A}" type="datetimeFigureOut">
               <a:rPr lang="en-US" smtClean="0"/>
-              <a:t>11/5/2024</a:t>
+              <a:t>11/6/2024</a:t>
             </a:fld>
             <a:endParaRPr lang="en-US"/>
           </a:p>
@@ -1965,7 +1966,7 @@
           <a:p>
             <a:fld id="{8340E07E-EE19-4182-A636-F839E11FFF2A}" type="datetimeFigureOut">
               <a:rPr lang="en-US" smtClean="0"/>
-              <a:t>11/5/2024</a:t>
+              <a:t>11/6/2024</a:t>
             </a:fld>
             <a:endParaRPr lang="en-US"/>
           </a:p>
@@ -2078,7 +2079,7 @@
           <a:p>
             <a:fld id="{8340E07E-EE19-4182-A636-F839E11FFF2A}" type="datetimeFigureOut">
               <a:rPr lang="en-US" smtClean="0"/>
-              <a:t>11/5/2024</a:t>
+              <a:t>11/6/2024</a:t>
             </a:fld>
             <a:endParaRPr lang="en-US"/>
           </a:p>
@@ -2389,7 +2390,7 @@
           <a:p>
             <a:fld id="{8340E07E-EE19-4182-A636-F839E11FFF2A}" type="datetimeFigureOut">
               <a:rPr lang="en-US" smtClean="0"/>
-              <a:t>11/5/2024</a:t>
+              <a:t>11/6/2024</a:t>
             </a:fld>
             <a:endParaRPr lang="en-US"/>
           </a:p>
@@ -2677,7 +2678,7 @@
           <a:p>
             <a:fld id="{8340E07E-EE19-4182-A636-F839E11FFF2A}" type="datetimeFigureOut">
               <a:rPr lang="en-US" smtClean="0"/>
-              <a:t>11/5/2024</a:t>
+              <a:t>11/6/2024</a:t>
             </a:fld>
             <a:endParaRPr lang="en-US"/>
           </a:p>
@@ -2918,7 +2919,7 @@
           <a:p>
             <a:fld id="{8340E07E-EE19-4182-A636-F839E11FFF2A}" type="datetimeFigureOut">
               <a:rPr lang="en-US" smtClean="0"/>
-              <a:t>11/5/2024</a:t>
+              <a:t>11/6/2024</a:t>
             </a:fld>
             <a:endParaRPr lang="en-US"/>
           </a:p>
@@ -4647,6 +4648,462 @@
       </p:grpSpPr>
       <p:sp>
         <p:nvSpPr>
+          <p:cNvPr id="5" name="TextBox 4">
+            <a:extLst>
+              <a:ext uri="{FF2B5EF4-FFF2-40B4-BE49-F238E27FC236}">
+                <a16:creationId xmlns:a16="http://schemas.microsoft.com/office/drawing/2014/main" id="{8F8D8FE7-FE56-A402-6344-F244C2C0EBB2}"/>
+              </a:ext>
+            </a:extLst>
+          </p:cNvPr>
+          <p:cNvSpPr txBox="1"/>
+          <p:nvPr/>
+        </p:nvSpPr>
+        <p:spPr>
+          <a:xfrm>
+            <a:off x="740664" y="832104"/>
+            <a:ext cx="8107028" cy="5078313"/>
+          </a:xfrm>
+          <a:prstGeom prst="rect">
+            <a:avLst/>
+          </a:prstGeom>
+          <a:noFill/>
+        </p:spPr>
+        <p:txBody>
+          <a:bodyPr wrap="none" rtlCol="0">
+            <a:spAutoFit/>
+          </a:bodyPr>
+          <a:lstStyle/>
+          <a:p>
+            <a:pPr marL="285750" indent="-285750">
+              <a:buFontTx/>
+              <a:buChar char="-"/>
+            </a:pPr>
+            <a:r>
+              <a:rPr lang="en-US" sz="1200" dirty="0"/>
+              <a:t>After it pushed to docker hub, anyone can use it by pulling it same as we push &amp; pull in </a:t>
+            </a:r>
+            <a:r>
+              <a:rPr lang="en-US" sz="1200" dirty="0" err="1"/>
+              <a:t>github</a:t>
+            </a:r>
+            <a:endParaRPr lang="en-US" sz="1200" dirty="0"/>
+          </a:p>
+          <a:p>
+            <a:pPr marL="285750" indent="-285750">
+              <a:buFontTx/>
+              <a:buChar char="-"/>
+            </a:pPr>
+            <a:r>
+              <a:rPr lang="en-US" sz="1200" dirty="0"/>
+              <a:t>“docker pull iamprashantjain2601/</a:t>
+            </a:r>
+            <a:r>
+              <a:rPr lang="en-US" sz="1200" dirty="0" err="1"/>
+              <a:t>projecthelloappdemo</a:t>
+            </a:r>
+            <a:r>
+              <a:rPr lang="en-US" sz="1200" dirty="0"/>
+              <a:t>”</a:t>
+            </a:r>
+          </a:p>
+          <a:p>
+            <a:pPr marL="285750" indent="-285750">
+              <a:buFontTx/>
+              <a:buChar char="-"/>
+            </a:pPr>
+            <a:r>
+              <a:rPr lang="en-US" sz="1200" dirty="0"/>
+              <a:t>We have various ways to create docker images</a:t>
+            </a:r>
+          </a:p>
+          <a:p>
+            <a:r>
+              <a:rPr lang="en-US" sz="1200" dirty="0"/>
+              <a:t>	1. docker file</a:t>
+            </a:r>
+          </a:p>
+          <a:p>
+            <a:r>
+              <a:rPr lang="en-US" sz="1200" dirty="0"/>
+              <a:t>	2. pull image from docker hub &amp; run inside container</a:t>
+            </a:r>
+          </a:p>
+          <a:p>
+            <a:r>
+              <a:rPr lang="en-US" sz="1200" dirty="0"/>
+              <a:t>	3. create image from docker container</a:t>
+            </a:r>
+          </a:p>
+          <a:p>
+            <a:endParaRPr lang="en-US" sz="1200" dirty="0"/>
+          </a:p>
+          <a:p>
+            <a:r>
+              <a:rPr lang="en-US" sz="1200" dirty="0"/>
+              <a:t>-      </a:t>
+            </a:r>
+            <a:r>
+              <a:rPr lang="en-US" sz="1200" b="1" dirty="0">
+                <a:solidFill>
+                  <a:srgbClr val="FF0000"/>
+                </a:solidFill>
+              </a:rPr>
+              <a:t>How to pull the image and run inside container?</a:t>
+            </a:r>
+          </a:p>
+          <a:p>
+            <a:r>
+              <a:rPr lang="en-US" sz="1200" dirty="0"/>
+              <a:t>-      There is a component inside docker “docker engine”</a:t>
+            </a:r>
+          </a:p>
+          <a:p>
+            <a:pPr marL="285750" indent="-285750">
+              <a:buFontTx/>
+              <a:buChar char="-"/>
+            </a:pPr>
+            <a:r>
+              <a:rPr lang="en-US" sz="1200" dirty="0"/>
+              <a:t>If we run the image 1</a:t>
+            </a:r>
+            <a:r>
+              <a:rPr lang="en-US" sz="1200" baseline="30000" dirty="0"/>
+              <a:t>st</a:t>
+            </a:r>
+            <a:r>
+              <a:rPr lang="en-US" sz="1200" dirty="0"/>
+              <a:t> time, it will find that image in local system, if its not found then it will fetch from </a:t>
+            </a:r>
+            <a:r>
+              <a:rPr lang="en-US" sz="1200" dirty="0" err="1"/>
+              <a:t>dockerhub</a:t>
+            </a:r>
+            <a:endParaRPr lang="en-US" sz="1200" dirty="0"/>
+          </a:p>
+          <a:p>
+            <a:pPr marL="285750" indent="-285750">
+              <a:buFontTx/>
+              <a:buChar char="-"/>
+            </a:pPr>
+            <a:r>
+              <a:rPr lang="en-US" sz="1200" dirty="0"/>
+              <a:t>Pull: “docker pull </a:t>
+            </a:r>
+            <a:r>
+              <a:rPr lang="en-US" sz="1200" dirty="0" err="1"/>
+              <a:t>redis</a:t>
+            </a:r>
+            <a:r>
+              <a:rPr lang="en-US" sz="1200" dirty="0"/>
+              <a:t>”</a:t>
+            </a:r>
+          </a:p>
+          <a:p>
+            <a:pPr marL="285750" indent="-285750">
+              <a:buFontTx/>
+              <a:buChar char="-"/>
+            </a:pPr>
+            <a:r>
+              <a:rPr lang="en-US" sz="1200" dirty="0"/>
+              <a:t>Run: ”docker run –</a:t>
+            </a:r>
+            <a:r>
+              <a:rPr lang="en-US" sz="1200" dirty="0" err="1"/>
+              <a:t>i</a:t>
+            </a:r>
+            <a:r>
+              <a:rPr lang="en-US" sz="1200" dirty="0"/>
+              <a:t> –t ubuntu /bin/bash”</a:t>
+            </a:r>
+          </a:p>
+          <a:p>
+            <a:pPr marL="285750" indent="-285750">
+              <a:buFontTx/>
+              <a:buChar char="-"/>
+            </a:pPr>
+            <a:endParaRPr lang="en-US" sz="1200" dirty="0"/>
+          </a:p>
+          <a:p>
+            <a:pPr marL="285750" indent="-285750">
+              <a:buFontTx/>
+              <a:buChar char="-"/>
+            </a:pPr>
+            <a:endParaRPr lang="en-US" sz="1200" dirty="0"/>
+          </a:p>
+          <a:p>
+            <a:pPr marL="285750" indent="-285750">
+              <a:buFontTx/>
+              <a:buChar char="-"/>
+            </a:pPr>
+            <a:endParaRPr lang="en-US" sz="1200" dirty="0"/>
+          </a:p>
+          <a:p>
+            <a:pPr marL="285750" indent="-285750">
+              <a:buFontTx/>
+              <a:buChar char="-"/>
+            </a:pPr>
+            <a:endParaRPr lang="en-US" sz="1200" dirty="0"/>
+          </a:p>
+          <a:p>
+            <a:pPr marL="285750" indent="-285750">
+              <a:buFontTx/>
+              <a:buChar char="-"/>
+            </a:pPr>
+            <a:endParaRPr lang="en-US" sz="1200" dirty="0"/>
+          </a:p>
+          <a:p>
+            <a:pPr marL="285750" indent="-285750">
+              <a:buFontTx/>
+              <a:buChar char="-"/>
+            </a:pPr>
+            <a:endParaRPr lang="en-US" sz="1200" dirty="0"/>
+          </a:p>
+          <a:p>
+            <a:pPr marL="285750" indent="-285750">
+              <a:buFontTx/>
+              <a:buChar char="-"/>
+            </a:pPr>
+            <a:endParaRPr lang="en-US" sz="1200" dirty="0"/>
+          </a:p>
+          <a:p>
+            <a:pPr marL="285750" indent="-285750">
+              <a:buFontTx/>
+              <a:buChar char="-"/>
+            </a:pPr>
+            <a:endParaRPr lang="en-US" sz="1200" dirty="0"/>
+          </a:p>
+          <a:p>
+            <a:pPr marL="285750" indent="-285750">
+              <a:buFontTx/>
+              <a:buChar char="-"/>
+            </a:pPr>
+            <a:r>
+              <a:rPr lang="en-US" sz="1200" dirty="0"/>
+              <a:t>When we are pulling </a:t>
+            </a:r>
+            <a:r>
+              <a:rPr lang="en-US" sz="1200" dirty="0" err="1"/>
+              <a:t>os</a:t>
+            </a:r>
+            <a:r>
+              <a:rPr lang="en-US" sz="1200" dirty="0"/>
+              <a:t> like ubuntu, its not going to pull entire OS, only some utility files and rest will be used from host </a:t>
+            </a:r>
+            <a:r>
+              <a:rPr lang="en-US" sz="1200" dirty="0" err="1"/>
+              <a:t>os</a:t>
+            </a:r>
+            <a:endParaRPr lang="en-US" sz="1200" dirty="0"/>
+          </a:p>
+          <a:p>
+            <a:pPr marL="285750" indent="-285750">
+              <a:buFontTx/>
+              <a:buChar char="-"/>
+            </a:pPr>
+            <a:r>
+              <a:rPr lang="en-US" sz="1200" dirty="0">
+                <a:solidFill>
+                  <a:srgbClr val="FF0000"/>
+                </a:solidFill>
+              </a:rPr>
+              <a:t>How to Run any image directly inside the container?</a:t>
+            </a:r>
+          </a:p>
+          <a:p>
+            <a:pPr marL="285750" indent="-285750">
+              <a:buFontTx/>
+              <a:buChar char="-"/>
+            </a:pPr>
+            <a:r>
+              <a:rPr lang="en-US" sz="1200" dirty="0"/>
+              <a:t>docker run -it </a:t>
+            </a:r>
+            <a:r>
+              <a:rPr lang="en-US" sz="1200" dirty="0" err="1"/>
+              <a:t>kalilinux</a:t>
+            </a:r>
+            <a:r>
+              <a:rPr lang="en-US" sz="1200" dirty="0"/>
+              <a:t>/kali-rolling /bin/</a:t>
+            </a:r>
+            <a:r>
+              <a:rPr lang="en-US" sz="1200" dirty="0" err="1"/>
+              <a:t>sh</a:t>
+            </a:r>
+            <a:r>
+              <a:rPr lang="en-US" sz="1200" dirty="0"/>
+              <a:t> (“</a:t>
+            </a:r>
+            <a:r>
+              <a:rPr lang="en-US" sz="1200" dirty="0" err="1"/>
+              <a:t>kalilinux</a:t>
+            </a:r>
+            <a:r>
+              <a:rPr lang="en-US" sz="1200" dirty="0"/>
+              <a:t>/kali-rolling “ is the new image name)</a:t>
+            </a:r>
+          </a:p>
+          <a:p>
+            <a:pPr marL="285750" indent="-285750">
+              <a:buFontTx/>
+              <a:buChar char="-"/>
+            </a:pPr>
+            <a:endParaRPr lang="en-US" sz="1200" dirty="0"/>
+          </a:p>
+          <a:p>
+            <a:pPr marL="285750" indent="-285750">
+              <a:buFontTx/>
+              <a:buChar char="-"/>
+            </a:pPr>
+            <a:endParaRPr lang="en-US" sz="1200" dirty="0"/>
+          </a:p>
+          <a:p>
+            <a:r>
+              <a:rPr lang="en-US" sz="1200" dirty="0"/>
+              <a:t>      </a:t>
+            </a:r>
+          </a:p>
+        </p:txBody>
+      </p:sp>
+      <p:pic>
+        <p:nvPicPr>
+          <p:cNvPr id="7" name="Picture 6">
+            <a:extLst>
+              <a:ext uri="{FF2B5EF4-FFF2-40B4-BE49-F238E27FC236}">
+                <a16:creationId xmlns:a16="http://schemas.microsoft.com/office/drawing/2014/main" id="{BD889FF2-FA51-581B-829F-41AA10FBD89F}"/>
+              </a:ext>
+            </a:extLst>
+          </p:cNvPr>
+          <p:cNvPicPr>
+            <a:picLocks noChangeAspect="1"/>
+          </p:cNvPicPr>
+          <p:nvPr/>
+        </p:nvPicPr>
+        <p:blipFill>
+          <a:blip r:embed="rId2"/>
+          <a:stretch>
+            <a:fillRect/>
+          </a:stretch>
+        </p:blipFill>
+        <p:spPr>
+          <a:xfrm>
+            <a:off x="740664" y="3088767"/>
+            <a:ext cx="9496425" cy="1309497"/>
+          </a:xfrm>
+          <a:prstGeom prst="rect">
+            <a:avLst/>
+          </a:prstGeom>
+        </p:spPr>
+      </p:pic>
+      <p:pic>
+        <p:nvPicPr>
+          <p:cNvPr id="9" name="Picture 8">
+            <a:extLst>
+              <a:ext uri="{FF2B5EF4-FFF2-40B4-BE49-F238E27FC236}">
+                <a16:creationId xmlns:a16="http://schemas.microsoft.com/office/drawing/2014/main" id="{B42CB7B2-4774-954A-E04F-BC4AB18216B7}"/>
+              </a:ext>
+            </a:extLst>
+          </p:cNvPr>
+          <p:cNvPicPr>
+            <a:picLocks noChangeAspect="1"/>
+          </p:cNvPicPr>
+          <p:nvPr/>
+        </p:nvPicPr>
+        <p:blipFill>
+          <a:blip r:embed="rId3"/>
+          <a:stretch>
+            <a:fillRect/>
+          </a:stretch>
+        </p:blipFill>
+        <p:spPr>
+          <a:xfrm>
+            <a:off x="740663" y="5145840"/>
+            <a:ext cx="9496425" cy="1410408"/>
+          </a:xfrm>
+          <a:prstGeom prst="rect">
+            <a:avLst/>
+          </a:prstGeom>
+        </p:spPr>
+      </p:pic>
+      <p:pic>
+        <p:nvPicPr>
+          <p:cNvPr id="10" name="Picture 4" descr="Docker for Developers: Understanding the Core Concepts – Code with Dan Blog">
+            <a:extLst>
+              <a:ext uri="{FF2B5EF4-FFF2-40B4-BE49-F238E27FC236}">
+                <a16:creationId xmlns:a16="http://schemas.microsoft.com/office/drawing/2014/main" id="{18384F9D-C38A-F4FE-1275-6135A0D7624F}"/>
+              </a:ext>
+            </a:extLst>
+          </p:cNvPr>
+          <p:cNvPicPr>
+            <a:picLocks noChangeAspect="1" noChangeArrowheads="1"/>
+          </p:cNvPicPr>
+          <p:nvPr/>
+        </p:nvPicPr>
+        <p:blipFill>
+          <a:blip r:embed="rId4">
+            <a:extLst>
+              <a:ext uri="{28A0092B-C50C-407E-A947-70E740481C1C}">
+                <a14:useLocalDpi xmlns:a14="http://schemas.microsoft.com/office/drawing/2010/main" val="0"/>
+              </a:ext>
+            </a:extLst>
+          </a:blip>
+          <a:srcRect/>
+          <a:stretch>
+            <a:fillRect/>
+          </a:stretch>
+        </p:blipFill>
+        <p:spPr bwMode="auto">
+          <a:xfrm>
+            <a:off x="5271517" y="0"/>
+            <a:ext cx="889747" cy="585550"/>
+          </a:xfrm>
+          <a:prstGeom prst="rect">
+            <a:avLst/>
+          </a:prstGeom>
+          <a:noFill/>
+          <a:extLst>
+            <a:ext uri="{909E8E84-426E-40DD-AFC4-6F175D3DCCD1}">
+              <a14:hiddenFill xmlns:a14="http://schemas.microsoft.com/office/drawing/2010/main">
+                <a:solidFill>
+                  <a:srgbClr val="FFFFFF"/>
+                </a:solidFill>
+              </a14:hiddenFill>
+            </a:ext>
+          </a:extLst>
+        </p:spPr>
+      </p:pic>
+    </p:spTree>
+    <p:extLst>
+      <p:ext uri="{BB962C8B-B14F-4D97-AF65-F5344CB8AC3E}">
+        <p14:creationId xmlns:p14="http://schemas.microsoft.com/office/powerpoint/2010/main" val="3520430122"/>
+      </p:ext>
+    </p:extLst>
+  </p:cSld>
+  <p:clrMapOvr>
+    <a:masterClrMapping/>
+  </p:clrMapOvr>
+</p:sld>
+</file>
+
+<file path=ppt/slides/slide11.xml><?xml version="1.0" encoding="utf-8"?>
+<p:sld xmlns:a="http://schemas.openxmlformats.org/drawingml/2006/main" xmlns:r="http://schemas.openxmlformats.org/officeDocument/2006/relationships" xmlns:p="http://schemas.openxmlformats.org/presentationml/2006/main">
+  <p:cSld>
+    <p:spTree>
+      <p:nvGrpSpPr>
+        <p:cNvPr id="1" name=""/>
+        <p:cNvGrpSpPr/>
+        <p:nvPr/>
+      </p:nvGrpSpPr>
+      <p:grpSpPr>
+        <a:xfrm>
+          <a:off x="0" y="0"/>
+          <a:ext cx="0" cy="0"/>
+          <a:chOff x="0" y="0"/>
+          <a:chExt cx="0" cy="0"/>
+        </a:xfrm>
+      </p:grpSpPr>
+      <p:sp>
+        <p:nvSpPr>
           <p:cNvPr id="3" name="TextBox 2">
             <a:extLst>
               <a:ext uri="{FF2B5EF4-FFF2-40B4-BE49-F238E27FC236}">
@@ -6421,10 +6878,10 @@
       </p:grpSpPr>
       <p:sp>
         <p:nvSpPr>
-          <p:cNvPr id="2" name="Rectangle: Rounded Corners 1">
-            <a:extLst>
-              <a:ext uri="{FF2B5EF4-FFF2-40B4-BE49-F238E27FC236}">
-                <a16:creationId xmlns:a16="http://schemas.microsoft.com/office/drawing/2014/main" id="{E4E09BE5-18AD-4BE9-2EBE-ECAD9B794C91}"/>
+          <p:cNvPr id="4" name="Rectangle 3">
+            <a:extLst>
+              <a:ext uri="{FF2B5EF4-FFF2-40B4-BE49-F238E27FC236}">
+                <a16:creationId xmlns:a16="http://schemas.microsoft.com/office/drawing/2014/main" id="{70DA0AC5-B2E1-778C-B445-A5D0265DDFAB}"/>
               </a:ext>
             </a:extLst>
           </p:cNvPr>
@@ -6433,312 +6890,1009 @@
         </p:nvSpPr>
         <p:spPr>
           <a:xfrm>
-            <a:off x="3553968" y="109728"/>
-            <a:ext cx="5084064" cy="493776"/>
-          </a:xfrm>
-          <a:prstGeom prst="roundRect">
-            <a:avLst/>
-          </a:prstGeom>
+            <a:off x="295656" y="1335024"/>
+            <a:ext cx="11600688" cy="5257800"/>
+          </a:xfrm>
+          <a:prstGeom prst="rect">
+            <a:avLst/>
+          </a:prstGeom>
+        </p:spPr>
+        <p:style>
+          <a:lnRef idx="2">
+            <a:schemeClr val="accent5">
+              <a:shade val="15000"/>
+            </a:schemeClr>
+          </a:lnRef>
+          <a:fillRef idx="1">
+            <a:schemeClr val="accent5"/>
+          </a:fillRef>
+          <a:effectRef idx="0">
+            <a:schemeClr val="accent5"/>
+          </a:effectRef>
+          <a:fontRef idx="minor">
+            <a:schemeClr val="lt1"/>
+          </a:fontRef>
+        </p:style>
+        <p:txBody>
+          <a:bodyPr rtlCol="0" anchor="t"/>
+          <a:lstStyle/>
+          <a:p>
+            <a:pPr marL="342900" indent="-342900">
+              <a:buAutoNum type="arabicPeriod"/>
+            </a:pPr>
+            <a:r>
+              <a:rPr lang="en-US" dirty="0"/>
+              <a:t>Create a GitHub repo &amp; Clone it in local system: git clone &lt;repo </a:t>
+            </a:r>
+            <a:r>
+              <a:rPr lang="en-US" dirty="0" err="1"/>
+              <a:t>url</a:t>
+            </a:r>
+            <a:r>
+              <a:rPr lang="en-US" dirty="0"/>
+              <a:t>&gt;</a:t>
+            </a:r>
+          </a:p>
+          <a:p>
+            <a:pPr marL="342900" indent="-342900">
+              <a:buAutoNum type="arabicPeriod"/>
+            </a:pPr>
+            <a:r>
+              <a:rPr lang="en-US" dirty="0"/>
+              <a:t>Create file and folder structure using template.py</a:t>
+            </a:r>
+          </a:p>
+          <a:p>
+            <a:pPr marL="342900" indent="-342900">
+              <a:buAutoNum type="arabicPeriod"/>
+            </a:pPr>
+            <a:r>
+              <a:rPr lang="en-US" dirty="0"/>
+              <a:t>Above can be done by creating a </a:t>
+            </a:r>
+            <a:r>
+              <a:rPr lang="en-US" dirty="0" err="1"/>
+              <a:t>github</a:t>
+            </a:r>
+            <a:r>
+              <a:rPr lang="en-US" dirty="0"/>
+              <a:t> repo using template repo in </a:t>
+            </a:r>
+            <a:r>
+              <a:rPr lang="en-US" dirty="0" err="1"/>
+              <a:t>github</a:t>
+            </a:r>
+            <a:endParaRPr lang="en-US" dirty="0"/>
+          </a:p>
+          <a:p>
+            <a:r>
+              <a:rPr lang="en-US" dirty="0"/>
+              <a:t>					</a:t>
+            </a:r>
+          </a:p>
+          <a:p>
+            <a:pPr marL="342900" indent="-342900">
+              <a:buAutoNum type="arabicPeriod"/>
+            </a:pPr>
+            <a:endParaRPr lang="en-US" dirty="0"/>
+          </a:p>
+          <a:p>
+            <a:pPr marL="342900" indent="-342900">
+              <a:buAutoNum type="arabicPeriod"/>
+            </a:pPr>
+            <a:endParaRPr lang="en-US" dirty="0"/>
+          </a:p>
+          <a:p>
+            <a:pPr marL="342900" indent="-342900">
+              <a:buAutoNum type="arabicPeriod"/>
+            </a:pPr>
+            <a:endParaRPr lang="en-US" dirty="0"/>
+          </a:p>
+          <a:p>
+            <a:pPr marL="342900" indent="-342900">
+              <a:buAutoNum type="arabicPeriod"/>
+            </a:pPr>
+            <a:endParaRPr lang="en-US" dirty="0"/>
+          </a:p>
+        </p:txBody>
+      </p:sp>
+      <p:pic>
+        <p:nvPicPr>
+          <p:cNvPr id="5" name="Picture 4">
+            <a:extLst>
+              <a:ext uri="{FF2B5EF4-FFF2-40B4-BE49-F238E27FC236}">
+                <a16:creationId xmlns:a16="http://schemas.microsoft.com/office/drawing/2014/main" id="{E7E0292E-235E-A248-2173-2C5C3F5ABAD4}"/>
+              </a:ext>
+            </a:extLst>
+          </p:cNvPr>
+          <p:cNvPicPr>
+            <a:picLocks noChangeAspect="1"/>
+          </p:cNvPicPr>
+          <p:nvPr/>
+        </p:nvPicPr>
+        <p:blipFill>
+          <a:blip r:embed="rId2"/>
+          <a:stretch>
+            <a:fillRect/>
+          </a:stretch>
+        </p:blipFill>
+        <p:spPr>
+          <a:xfrm>
+            <a:off x="684005" y="2267712"/>
+            <a:ext cx="4258597" cy="4261104"/>
+          </a:xfrm>
+          <a:prstGeom prst="rect">
+            <a:avLst/>
+          </a:prstGeom>
+        </p:spPr>
+      </p:pic>
+      <p:cxnSp>
+        <p:nvCxnSpPr>
+          <p:cNvPr id="9" name="Straight Arrow Connector 8">
+            <a:extLst>
+              <a:ext uri="{FF2B5EF4-FFF2-40B4-BE49-F238E27FC236}">
+                <a16:creationId xmlns:a16="http://schemas.microsoft.com/office/drawing/2014/main" id="{EF91BFDF-D2F0-C66D-BA95-6F2A2B6C522C}"/>
+              </a:ext>
+            </a:extLst>
+          </p:cNvPr>
+          <p:cNvCxnSpPr/>
+          <p:nvPr/>
+        </p:nvCxnSpPr>
+        <p:spPr>
+          <a:xfrm>
+            <a:off x="2258568" y="2395728"/>
+            <a:ext cx="3063240" cy="0"/>
+          </a:xfrm>
+          <a:prstGeom prst="straightConnector1">
+            <a:avLst/>
+          </a:prstGeom>
+          <a:ln>
+            <a:tailEnd type="triangle"/>
+          </a:ln>
         </p:spPr>
         <p:style>
           <a:lnRef idx="1">
-            <a:schemeClr val="dk1"/>
+            <a:schemeClr val="accent2"/>
           </a:lnRef>
-          <a:fillRef idx="2">
-            <a:schemeClr val="dk1"/>
+          <a:fillRef idx="0">
+            <a:schemeClr val="accent2"/>
           </a:fillRef>
-          <a:effectRef idx="1">
-            <a:schemeClr val="dk1"/>
+          <a:effectRef idx="0">
+            <a:schemeClr val="accent2"/>
           </a:effectRef>
           <a:fontRef idx="minor">
-            <a:schemeClr val="dk1"/>
+            <a:schemeClr val="tx1"/>
           </a:fontRef>
         </p:style>
+      </p:cxnSp>
+      <p:sp>
+        <p:nvSpPr>
+          <p:cNvPr id="10" name="Rectangle 9">
+            <a:extLst>
+              <a:ext uri="{FF2B5EF4-FFF2-40B4-BE49-F238E27FC236}">
+                <a16:creationId xmlns:a16="http://schemas.microsoft.com/office/drawing/2014/main" id="{B4EBBF33-3FD3-3BF9-54E1-0933AE221120}"/>
+              </a:ext>
+            </a:extLst>
+          </p:cNvPr>
+          <p:cNvSpPr/>
+          <p:nvPr/>
+        </p:nvSpPr>
+        <p:spPr>
+          <a:xfrm>
+            <a:off x="5405899" y="2290571"/>
+            <a:ext cx="1843502" cy="269703"/>
+          </a:xfrm>
+          <a:prstGeom prst="rect">
+            <a:avLst/>
+          </a:prstGeom>
+        </p:spPr>
+        <p:style>
+          <a:lnRef idx="2">
+            <a:schemeClr val="accent1">
+              <a:shade val="15000"/>
+            </a:schemeClr>
+          </a:lnRef>
+          <a:fillRef idx="1">
+            <a:schemeClr val="accent1"/>
+          </a:fillRef>
+          <a:effectRef idx="0">
+            <a:schemeClr val="accent1"/>
+          </a:effectRef>
+          <a:fontRef idx="minor">
+            <a:schemeClr val="lt1"/>
+          </a:fontRef>
+        </p:style>
         <p:txBody>
           <a:bodyPr rtlCol="0" anchor="ctr"/>
           <a:lstStyle/>
           <a:p>
             <a:pPr algn="ctr"/>
             <a:r>
-              <a:rPr lang="en-US" dirty="0"/>
-              <a:t>Micro Project: Deploy Python Package (CI Concepts)</a:t>
-            </a:r>
-          </a:p>
-        </p:txBody>
-      </p:sp>
-      <p:sp>
-        <p:nvSpPr>
-          <p:cNvPr id="4" name="TextBox 3">
-            <a:extLst>
-              <a:ext uri="{FF2B5EF4-FFF2-40B4-BE49-F238E27FC236}">
-                <a16:creationId xmlns:a16="http://schemas.microsoft.com/office/drawing/2014/main" id="{A670C0AA-8C3C-838D-F7E2-9E0B57F6F1F1}"/>
-              </a:ext>
-            </a:extLst>
-          </p:cNvPr>
-          <p:cNvSpPr txBox="1"/>
-          <p:nvPr/>
-        </p:nvSpPr>
-        <p:spPr>
-          <a:xfrm>
-            <a:off x="429768" y="1380744"/>
-            <a:ext cx="11223778" cy="5355312"/>
+              <a:rPr lang="en-US" sz="1600" dirty="0"/>
+              <a:t>CI/CD Configuration</a:t>
+            </a:r>
+          </a:p>
+        </p:txBody>
+      </p:sp>
+      <p:cxnSp>
+        <p:nvCxnSpPr>
+          <p:cNvPr id="11" name="Straight Arrow Connector 10">
+            <a:extLst>
+              <a:ext uri="{FF2B5EF4-FFF2-40B4-BE49-F238E27FC236}">
+                <a16:creationId xmlns:a16="http://schemas.microsoft.com/office/drawing/2014/main" id="{4BB40FD1-6075-F14A-56E5-569F85B8B5A6}"/>
+              </a:ext>
+            </a:extLst>
+          </p:cNvPr>
+          <p:cNvCxnSpPr>
+            <a:cxnSpLocks/>
+          </p:cNvCxnSpPr>
+          <p:nvPr/>
+        </p:nvCxnSpPr>
+        <p:spPr>
+          <a:xfrm flipV="1">
+            <a:off x="2258568" y="2787369"/>
+            <a:ext cx="3063240" cy="108231"/>
+          </a:xfrm>
+          <a:prstGeom prst="straightConnector1">
+            <a:avLst/>
+          </a:prstGeom>
+          <a:ln>
+            <a:tailEnd type="triangle"/>
+          </a:ln>
+        </p:spPr>
+        <p:style>
+          <a:lnRef idx="1">
+            <a:schemeClr val="accent2"/>
+          </a:lnRef>
+          <a:fillRef idx="0">
+            <a:schemeClr val="accent2"/>
+          </a:fillRef>
+          <a:effectRef idx="0">
+            <a:schemeClr val="accent2"/>
+          </a:effectRef>
+          <a:fontRef idx="minor">
+            <a:schemeClr val="tx1"/>
+          </a:fontRef>
+        </p:style>
+      </p:cxnSp>
+      <p:sp>
+        <p:nvSpPr>
+          <p:cNvPr id="12" name="Rectangle 11">
+            <a:extLst>
+              <a:ext uri="{FF2B5EF4-FFF2-40B4-BE49-F238E27FC236}">
+                <a16:creationId xmlns:a16="http://schemas.microsoft.com/office/drawing/2014/main" id="{5046D1C1-C3FD-DFEE-DB9C-6A26014BE618}"/>
+              </a:ext>
+            </a:extLst>
+          </p:cNvPr>
+          <p:cNvSpPr/>
+          <p:nvPr/>
+        </p:nvSpPr>
+        <p:spPr>
+          <a:xfrm>
+            <a:off x="5405897" y="2652518"/>
+            <a:ext cx="2750551" cy="269703"/>
           </a:xfrm>
           <a:prstGeom prst="rect">
             <a:avLst/>
           </a:prstGeom>
+        </p:spPr>
+        <p:style>
+          <a:lnRef idx="2">
+            <a:schemeClr val="accent1">
+              <a:shade val="15000"/>
+            </a:schemeClr>
+          </a:lnRef>
+          <a:fillRef idx="1">
+            <a:schemeClr val="accent1"/>
+          </a:fillRef>
+          <a:effectRef idx="0">
+            <a:schemeClr val="accent1"/>
+          </a:effectRef>
+          <a:fontRef idx="minor">
+            <a:schemeClr val="lt1"/>
+          </a:fontRef>
+        </p:style>
+        <p:txBody>
+          <a:bodyPr rtlCol="0" anchor="ctr"/>
+          <a:lstStyle/>
+          <a:p>
+            <a:pPr algn="ctr"/>
+            <a:r>
+              <a:rPr lang="en-US" sz="1600" dirty="0"/>
+              <a:t>ML Development/experiments</a:t>
+            </a:r>
+          </a:p>
+        </p:txBody>
+      </p:sp>
+      <p:cxnSp>
+        <p:nvCxnSpPr>
+          <p:cNvPr id="13" name="Straight Arrow Connector 12">
+            <a:extLst>
+              <a:ext uri="{FF2B5EF4-FFF2-40B4-BE49-F238E27FC236}">
+                <a16:creationId xmlns:a16="http://schemas.microsoft.com/office/drawing/2014/main" id="{C1FDF61D-73A9-BBC9-2729-A0C7B593C1DE}"/>
+              </a:ext>
+            </a:extLst>
+          </p:cNvPr>
+          <p:cNvCxnSpPr>
+            <a:cxnSpLocks/>
+          </p:cNvCxnSpPr>
+          <p:nvPr/>
+        </p:nvCxnSpPr>
+        <p:spPr>
+          <a:xfrm flipV="1">
+            <a:off x="1999488" y="3157721"/>
+            <a:ext cx="3331463" cy="91447"/>
+          </a:xfrm>
+          <a:prstGeom prst="straightConnector1">
+            <a:avLst/>
+          </a:prstGeom>
+          <a:ln>
+            <a:tailEnd type="triangle"/>
+          </a:ln>
+        </p:spPr>
+        <p:style>
+          <a:lnRef idx="1">
+            <a:schemeClr val="accent2"/>
+          </a:lnRef>
+          <a:fillRef idx="0">
+            <a:schemeClr val="accent2"/>
+          </a:fillRef>
+          <a:effectRef idx="0">
+            <a:schemeClr val="accent2"/>
+          </a:effectRef>
+          <a:fontRef idx="minor">
+            <a:schemeClr val="tx1"/>
+          </a:fontRef>
+        </p:style>
+      </p:cxnSp>
+      <p:sp>
+        <p:nvSpPr>
+          <p:cNvPr id="15" name="Rectangle 14">
+            <a:extLst>
+              <a:ext uri="{FF2B5EF4-FFF2-40B4-BE49-F238E27FC236}">
+                <a16:creationId xmlns:a16="http://schemas.microsoft.com/office/drawing/2014/main" id="{21E98646-8D5B-660C-B7BB-429684A9473A}"/>
+              </a:ext>
+            </a:extLst>
+          </p:cNvPr>
+          <p:cNvSpPr/>
+          <p:nvPr/>
+        </p:nvSpPr>
+        <p:spPr>
+          <a:xfrm>
+            <a:off x="5405897" y="3022872"/>
+            <a:ext cx="5420599" cy="269698"/>
+          </a:xfrm>
+          <a:prstGeom prst="rect">
+            <a:avLst/>
+          </a:prstGeom>
+        </p:spPr>
+        <p:style>
+          <a:lnRef idx="2">
+            <a:schemeClr val="accent1">
+              <a:shade val="15000"/>
+            </a:schemeClr>
+          </a:lnRef>
+          <a:fillRef idx="1">
+            <a:schemeClr val="accent1"/>
+          </a:fillRef>
+          <a:effectRef idx="0">
+            <a:schemeClr val="accent1"/>
+          </a:effectRef>
+          <a:fontRef idx="minor">
+            <a:schemeClr val="lt1"/>
+          </a:fontRef>
+        </p:style>
+        <p:txBody>
+          <a:bodyPr rtlCol="0" anchor="ctr"/>
+          <a:lstStyle/>
+          <a:p>
+            <a:pPr algn="ctr"/>
+            <a:r>
+              <a:rPr lang="en-US" sz="1600" dirty="0"/>
+              <a:t>data ingestion, transformation, model trainer, model evaluation</a:t>
+            </a:r>
+          </a:p>
+        </p:txBody>
+      </p:sp>
+      <p:cxnSp>
+        <p:nvCxnSpPr>
+          <p:cNvPr id="16" name="Straight Arrow Connector 15">
+            <a:extLst>
+              <a:ext uri="{FF2B5EF4-FFF2-40B4-BE49-F238E27FC236}">
+                <a16:creationId xmlns:a16="http://schemas.microsoft.com/office/drawing/2014/main" id="{2BD192A3-4B59-16BA-7018-1CDB03910390}"/>
+              </a:ext>
+            </a:extLst>
+          </p:cNvPr>
+          <p:cNvCxnSpPr>
+            <a:cxnSpLocks/>
+          </p:cNvCxnSpPr>
+          <p:nvPr/>
+        </p:nvCxnSpPr>
+        <p:spPr>
+          <a:xfrm>
+            <a:off x="1828800" y="3395472"/>
+            <a:ext cx="3502151" cy="132598"/>
+          </a:xfrm>
+          <a:prstGeom prst="straightConnector1">
+            <a:avLst/>
+          </a:prstGeom>
+          <a:ln>
+            <a:tailEnd type="triangle"/>
+          </a:ln>
+        </p:spPr>
+        <p:style>
+          <a:lnRef idx="1">
+            <a:schemeClr val="accent2"/>
+          </a:lnRef>
+          <a:fillRef idx="0">
+            <a:schemeClr val="accent2"/>
+          </a:fillRef>
+          <a:effectRef idx="0">
+            <a:schemeClr val="accent2"/>
+          </a:effectRef>
+          <a:fontRef idx="minor">
+            <a:schemeClr val="tx1"/>
+          </a:fontRef>
+        </p:style>
+      </p:cxnSp>
+      <p:sp>
+        <p:nvSpPr>
+          <p:cNvPr id="21" name="Rectangle 20">
+            <a:extLst>
+              <a:ext uri="{FF2B5EF4-FFF2-40B4-BE49-F238E27FC236}">
+                <a16:creationId xmlns:a16="http://schemas.microsoft.com/office/drawing/2014/main" id="{C38E738A-D1F0-9127-E3E4-36B7782FB5A7}"/>
+              </a:ext>
+            </a:extLst>
+          </p:cNvPr>
+          <p:cNvSpPr/>
+          <p:nvPr/>
+        </p:nvSpPr>
+        <p:spPr>
+          <a:xfrm>
+            <a:off x="5405897" y="3393221"/>
+            <a:ext cx="1689847" cy="248411"/>
+          </a:xfrm>
+          <a:prstGeom prst="rect">
+            <a:avLst/>
+          </a:prstGeom>
+        </p:spPr>
+        <p:style>
+          <a:lnRef idx="2">
+            <a:schemeClr val="accent1">
+              <a:shade val="15000"/>
+            </a:schemeClr>
+          </a:lnRef>
+          <a:fillRef idx="1">
+            <a:schemeClr val="accent1"/>
+          </a:fillRef>
+          <a:effectRef idx="0">
+            <a:schemeClr val="accent1"/>
+          </a:effectRef>
+          <a:fontRef idx="minor">
+            <a:schemeClr val="lt1"/>
+          </a:fontRef>
+        </p:style>
+        <p:txBody>
+          <a:bodyPr rtlCol="0" anchor="ctr"/>
+          <a:lstStyle/>
+          <a:p>
+            <a:pPr algn="ctr"/>
+            <a:r>
+              <a:rPr lang="en-US" sz="1600" dirty="0"/>
+              <a:t>Custom exception</a:t>
+            </a:r>
+          </a:p>
+        </p:txBody>
+      </p:sp>
+      <p:cxnSp>
+        <p:nvCxnSpPr>
+          <p:cNvPr id="22" name="Straight Arrow Connector 21">
+            <a:extLst>
+              <a:ext uri="{FF2B5EF4-FFF2-40B4-BE49-F238E27FC236}">
+                <a16:creationId xmlns:a16="http://schemas.microsoft.com/office/drawing/2014/main" id="{D8C0FB63-58C4-C39F-8C3A-A149702624DD}"/>
+              </a:ext>
+            </a:extLst>
+          </p:cNvPr>
+          <p:cNvCxnSpPr>
+            <a:cxnSpLocks/>
+          </p:cNvCxnSpPr>
+          <p:nvPr/>
+        </p:nvCxnSpPr>
+        <p:spPr>
+          <a:xfrm>
+            <a:off x="1676670" y="3555489"/>
+            <a:ext cx="3691754" cy="248411"/>
+          </a:xfrm>
+          <a:prstGeom prst="straightConnector1">
+            <a:avLst/>
+          </a:prstGeom>
+          <a:ln>
+            <a:tailEnd type="triangle"/>
+          </a:ln>
+        </p:spPr>
+        <p:style>
+          <a:lnRef idx="1">
+            <a:schemeClr val="accent2"/>
+          </a:lnRef>
+          <a:fillRef idx="0">
+            <a:schemeClr val="accent2"/>
+          </a:fillRef>
+          <a:effectRef idx="0">
+            <a:schemeClr val="accent2"/>
+          </a:effectRef>
+          <a:fontRef idx="minor">
+            <a:schemeClr val="tx1"/>
+          </a:fontRef>
+        </p:style>
+      </p:cxnSp>
+      <p:sp>
+        <p:nvSpPr>
+          <p:cNvPr id="29" name="Rectangle 28">
+            <a:extLst>
+              <a:ext uri="{FF2B5EF4-FFF2-40B4-BE49-F238E27FC236}">
+                <a16:creationId xmlns:a16="http://schemas.microsoft.com/office/drawing/2014/main" id="{1F1817BC-FAF1-8B44-5124-E6525E40022D}"/>
+              </a:ext>
+            </a:extLst>
+          </p:cNvPr>
+          <p:cNvSpPr/>
+          <p:nvPr/>
+        </p:nvSpPr>
+        <p:spPr>
+          <a:xfrm>
+            <a:off x="5405897" y="3680428"/>
+            <a:ext cx="882309" cy="248411"/>
+          </a:xfrm>
+          <a:prstGeom prst="rect">
+            <a:avLst/>
+          </a:prstGeom>
+        </p:spPr>
+        <p:style>
+          <a:lnRef idx="2">
+            <a:schemeClr val="accent1">
+              <a:shade val="15000"/>
+            </a:schemeClr>
+          </a:lnRef>
+          <a:fillRef idx="1">
+            <a:schemeClr val="accent1"/>
+          </a:fillRef>
+          <a:effectRef idx="0">
+            <a:schemeClr val="accent1"/>
+          </a:effectRef>
+          <a:fontRef idx="minor">
+            <a:schemeClr val="lt1"/>
+          </a:fontRef>
+        </p:style>
+        <p:txBody>
+          <a:bodyPr rtlCol="0" anchor="ctr"/>
+          <a:lstStyle/>
+          <a:p>
+            <a:pPr algn="ctr"/>
+            <a:r>
+              <a:rPr lang="en-US" sz="1600" dirty="0"/>
+              <a:t>logging</a:t>
+            </a:r>
+          </a:p>
+        </p:txBody>
+      </p:sp>
+      <p:cxnSp>
+        <p:nvCxnSpPr>
+          <p:cNvPr id="30" name="Straight Arrow Connector 29">
+            <a:extLst>
+              <a:ext uri="{FF2B5EF4-FFF2-40B4-BE49-F238E27FC236}">
+                <a16:creationId xmlns:a16="http://schemas.microsoft.com/office/drawing/2014/main" id="{FFF0F1ED-FABE-0099-B4A7-8691266A9EA5}"/>
+              </a:ext>
+            </a:extLst>
+          </p:cNvPr>
+          <p:cNvCxnSpPr>
+            <a:cxnSpLocks/>
+          </p:cNvCxnSpPr>
+          <p:nvPr/>
+        </p:nvCxnSpPr>
+        <p:spPr>
+          <a:xfrm>
+            <a:off x="1733998" y="3744670"/>
+            <a:ext cx="3634426" cy="358717"/>
+          </a:xfrm>
+          <a:prstGeom prst="straightConnector1">
+            <a:avLst/>
+          </a:prstGeom>
+          <a:ln>
+            <a:tailEnd type="triangle"/>
+          </a:ln>
+        </p:spPr>
+        <p:style>
+          <a:lnRef idx="1">
+            <a:schemeClr val="accent2"/>
+          </a:lnRef>
+          <a:fillRef idx="0">
+            <a:schemeClr val="accent2"/>
+          </a:fillRef>
+          <a:effectRef idx="0">
+            <a:schemeClr val="accent2"/>
+          </a:effectRef>
+          <a:fontRef idx="minor">
+            <a:schemeClr val="tx1"/>
+          </a:fontRef>
+        </p:style>
+      </p:cxnSp>
+      <p:sp>
+        <p:nvSpPr>
+          <p:cNvPr id="32" name="Rectangle 31">
+            <a:extLst>
+              <a:ext uri="{FF2B5EF4-FFF2-40B4-BE49-F238E27FC236}">
+                <a16:creationId xmlns:a16="http://schemas.microsoft.com/office/drawing/2014/main" id="{4D0FDF2F-3666-0C0B-64BF-C45D89C763B3}"/>
+              </a:ext>
+            </a:extLst>
+          </p:cNvPr>
+          <p:cNvSpPr/>
+          <p:nvPr/>
+        </p:nvSpPr>
+        <p:spPr>
+          <a:xfrm>
+            <a:off x="5405896" y="4042315"/>
+            <a:ext cx="2329928" cy="248411"/>
+          </a:xfrm>
+          <a:prstGeom prst="rect">
+            <a:avLst/>
+          </a:prstGeom>
+        </p:spPr>
+        <p:style>
+          <a:lnRef idx="2">
+            <a:schemeClr val="accent1">
+              <a:shade val="15000"/>
+            </a:schemeClr>
+          </a:lnRef>
+          <a:fillRef idx="1">
+            <a:schemeClr val="accent1"/>
+          </a:fillRef>
+          <a:effectRef idx="0">
+            <a:schemeClr val="accent1"/>
+          </a:effectRef>
+          <a:fontRef idx="minor">
+            <a:schemeClr val="lt1"/>
+          </a:fontRef>
+        </p:style>
+        <p:txBody>
+          <a:bodyPr rtlCol="0" anchor="ctr"/>
+          <a:lstStyle/>
+          <a:p>
+            <a:pPr algn="ctr"/>
+            <a:r>
+              <a:rPr lang="en-US" sz="1400" dirty="0"/>
+              <a:t>Training &amp; prediction pipeline</a:t>
+            </a:r>
+          </a:p>
+        </p:txBody>
+      </p:sp>
+      <p:cxnSp>
+        <p:nvCxnSpPr>
+          <p:cNvPr id="33" name="Straight Arrow Connector 32">
+            <a:extLst>
+              <a:ext uri="{FF2B5EF4-FFF2-40B4-BE49-F238E27FC236}">
+                <a16:creationId xmlns:a16="http://schemas.microsoft.com/office/drawing/2014/main" id="{D13B0BB5-2A87-F254-3031-E8981163A32A}"/>
+              </a:ext>
+            </a:extLst>
+          </p:cNvPr>
+          <p:cNvCxnSpPr>
+            <a:cxnSpLocks/>
+          </p:cNvCxnSpPr>
+          <p:nvPr/>
+        </p:nvCxnSpPr>
+        <p:spPr>
+          <a:xfrm>
+            <a:off x="1521087" y="3924028"/>
+            <a:ext cx="3847337" cy="508239"/>
+          </a:xfrm>
+          <a:prstGeom prst="straightConnector1">
+            <a:avLst/>
+          </a:prstGeom>
+          <a:ln>
+            <a:tailEnd type="triangle"/>
+          </a:ln>
+        </p:spPr>
+        <p:style>
+          <a:lnRef idx="1">
+            <a:schemeClr val="accent2"/>
+          </a:lnRef>
+          <a:fillRef idx="0">
+            <a:schemeClr val="accent2"/>
+          </a:fillRef>
+          <a:effectRef idx="0">
+            <a:schemeClr val="accent2"/>
+          </a:effectRef>
+          <a:fontRef idx="minor">
+            <a:schemeClr val="tx1"/>
+          </a:fontRef>
+        </p:style>
+      </p:cxnSp>
+      <p:sp>
+        <p:nvSpPr>
+          <p:cNvPr id="35" name="Rectangle 34">
+            <a:extLst>
+              <a:ext uri="{FF2B5EF4-FFF2-40B4-BE49-F238E27FC236}">
+                <a16:creationId xmlns:a16="http://schemas.microsoft.com/office/drawing/2014/main" id="{EEDA2328-18CB-3F8F-DFAB-2DA064B1AED7}"/>
+              </a:ext>
+            </a:extLst>
+          </p:cNvPr>
+          <p:cNvSpPr/>
+          <p:nvPr/>
+        </p:nvSpPr>
+        <p:spPr>
+          <a:xfrm>
+            <a:off x="5401952" y="4359085"/>
+            <a:ext cx="2329928" cy="248411"/>
+          </a:xfrm>
+          <a:prstGeom prst="rect">
+            <a:avLst/>
+          </a:prstGeom>
+        </p:spPr>
+        <p:style>
+          <a:lnRef idx="2">
+            <a:schemeClr val="accent1">
+              <a:shade val="15000"/>
+            </a:schemeClr>
+          </a:lnRef>
+          <a:fillRef idx="1">
+            <a:schemeClr val="accent1"/>
+          </a:fillRef>
+          <a:effectRef idx="0">
+            <a:schemeClr val="accent1"/>
+          </a:effectRef>
+          <a:fontRef idx="minor">
+            <a:schemeClr val="lt1"/>
+          </a:fontRef>
+        </p:style>
+        <p:txBody>
+          <a:bodyPr rtlCol="0" anchor="ctr"/>
+          <a:lstStyle/>
+          <a:p>
+            <a:pPr algn="ctr"/>
+            <a:r>
+              <a:rPr lang="en-US" sz="1400" dirty="0"/>
+              <a:t>Common utility functions</a:t>
+            </a:r>
+          </a:p>
+        </p:txBody>
+      </p:sp>
+      <p:cxnSp>
+        <p:nvCxnSpPr>
+          <p:cNvPr id="36" name="Straight Arrow Connector 35">
+            <a:extLst>
+              <a:ext uri="{FF2B5EF4-FFF2-40B4-BE49-F238E27FC236}">
+                <a16:creationId xmlns:a16="http://schemas.microsoft.com/office/drawing/2014/main" id="{CF9EBF16-9910-C364-27C5-F45D9EE303B7}"/>
+              </a:ext>
+            </a:extLst>
+          </p:cNvPr>
+          <p:cNvCxnSpPr>
+            <a:cxnSpLocks/>
+          </p:cNvCxnSpPr>
+          <p:nvPr/>
+        </p:nvCxnSpPr>
+        <p:spPr>
+          <a:xfrm>
+            <a:off x="1483614" y="4229170"/>
+            <a:ext cx="3884810" cy="586677"/>
+          </a:xfrm>
+          <a:prstGeom prst="straightConnector1">
+            <a:avLst/>
+          </a:prstGeom>
+          <a:ln>
+            <a:tailEnd type="triangle"/>
+          </a:ln>
+        </p:spPr>
+        <p:style>
+          <a:lnRef idx="1">
+            <a:schemeClr val="accent2"/>
+          </a:lnRef>
+          <a:fillRef idx="0">
+            <a:schemeClr val="accent2"/>
+          </a:fillRef>
+          <a:effectRef idx="0">
+            <a:schemeClr val="accent2"/>
+          </a:effectRef>
+          <a:fontRef idx="minor">
+            <a:schemeClr val="tx1"/>
+          </a:fontRef>
+        </p:style>
+      </p:cxnSp>
+      <p:sp>
+        <p:nvSpPr>
+          <p:cNvPr id="38" name="Rectangle 37">
+            <a:extLst>
+              <a:ext uri="{FF2B5EF4-FFF2-40B4-BE49-F238E27FC236}">
+                <a16:creationId xmlns:a16="http://schemas.microsoft.com/office/drawing/2014/main" id="{178EB214-E734-2BFC-2536-18DBD318181B}"/>
+              </a:ext>
+            </a:extLst>
+          </p:cNvPr>
+          <p:cNvSpPr/>
+          <p:nvPr/>
+        </p:nvSpPr>
+        <p:spPr>
+          <a:xfrm>
+            <a:off x="5400518" y="4713271"/>
+            <a:ext cx="2329928" cy="248411"/>
+          </a:xfrm>
+          <a:prstGeom prst="rect">
+            <a:avLst/>
+          </a:prstGeom>
+        </p:spPr>
+        <p:style>
+          <a:lnRef idx="2">
+            <a:schemeClr val="accent1">
+              <a:shade val="15000"/>
+            </a:schemeClr>
+          </a:lnRef>
+          <a:fillRef idx="1">
+            <a:schemeClr val="accent1"/>
+          </a:fillRef>
+          <a:effectRef idx="0">
+            <a:schemeClr val="accent1"/>
+          </a:effectRef>
+          <a:fontRef idx="minor">
+            <a:schemeClr val="lt1"/>
+          </a:fontRef>
+        </p:style>
+        <p:txBody>
+          <a:bodyPr rtlCol="0" anchor="ctr"/>
+          <a:lstStyle/>
+          <a:p>
+            <a:pPr algn="ctr"/>
+            <a:r>
+              <a:rPr lang="en-US" sz="1400" dirty="0"/>
+              <a:t>Unit/Integration testing</a:t>
+            </a:r>
+          </a:p>
+        </p:txBody>
+      </p:sp>
+      <p:cxnSp>
+        <p:nvCxnSpPr>
+          <p:cNvPr id="39" name="Straight Arrow Connector 38">
+            <a:extLst>
+              <a:ext uri="{FF2B5EF4-FFF2-40B4-BE49-F238E27FC236}">
+                <a16:creationId xmlns:a16="http://schemas.microsoft.com/office/drawing/2014/main" id="{75024EF5-4347-9584-7623-204E9F06E445}"/>
+              </a:ext>
+            </a:extLst>
+          </p:cNvPr>
+          <p:cNvCxnSpPr>
+            <a:cxnSpLocks/>
+          </p:cNvCxnSpPr>
+          <p:nvPr/>
+        </p:nvCxnSpPr>
+        <p:spPr>
+          <a:xfrm>
+            <a:off x="1733998" y="4408529"/>
+            <a:ext cx="3596953" cy="711031"/>
+          </a:xfrm>
+          <a:prstGeom prst="straightConnector1">
+            <a:avLst/>
+          </a:prstGeom>
+          <a:ln>
+            <a:tailEnd type="triangle"/>
+          </a:ln>
+        </p:spPr>
+        <p:style>
+          <a:lnRef idx="1">
+            <a:schemeClr val="accent2"/>
+          </a:lnRef>
+          <a:fillRef idx="0">
+            <a:schemeClr val="accent2"/>
+          </a:fillRef>
+          <a:effectRef idx="0">
+            <a:schemeClr val="accent2"/>
+          </a:effectRef>
+          <a:fontRef idx="minor">
+            <a:schemeClr val="tx1"/>
+          </a:fontRef>
+        </p:style>
+      </p:cxnSp>
+      <p:sp>
+        <p:nvSpPr>
+          <p:cNvPr id="41" name="Rectangle 40">
+            <a:extLst>
+              <a:ext uri="{FF2B5EF4-FFF2-40B4-BE49-F238E27FC236}">
+                <a16:creationId xmlns:a16="http://schemas.microsoft.com/office/drawing/2014/main" id="{3A665DB7-008B-DDDA-A8FD-512617813189}"/>
+              </a:ext>
+            </a:extLst>
+          </p:cNvPr>
+          <p:cNvSpPr/>
+          <p:nvPr/>
+        </p:nvSpPr>
+        <p:spPr>
+          <a:xfrm>
+            <a:off x="5400518" y="5026853"/>
+            <a:ext cx="3652042" cy="248411"/>
+          </a:xfrm>
+          <a:prstGeom prst="rect">
+            <a:avLst/>
+          </a:prstGeom>
+        </p:spPr>
+        <p:style>
+          <a:lnRef idx="2">
+            <a:schemeClr val="accent1">
+              <a:shade val="15000"/>
+            </a:schemeClr>
+          </a:lnRef>
+          <a:fillRef idx="1">
+            <a:schemeClr val="accent1"/>
+          </a:fillRef>
+          <a:effectRef idx="0">
+            <a:schemeClr val="accent1"/>
+          </a:effectRef>
+          <a:fontRef idx="minor">
+            <a:schemeClr val="lt1"/>
+          </a:fontRef>
+        </p:style>
+        <p:txBody>
+          <a:bodyPr rtlCol="0" anchor="ctr"/>
+          <a:lstStyle/>
+          <a:p>
+            <a:pPr algn="ctr"/>
+            <a:r>
+              <a:rPr lang="en-US" sz="1400" dirty="0"/>
+              <a:t>Ignore files/folders to be pushed in </a:t>
+            </a:r>
+            <a:r>
+              <a:rPr lang="en-US" sz="1400" dirty="0" err="1"/>
+              <a:t>github</a:t>
+            </a:r>
+            <a:r>
+              <a:rPr lang="en-US" sz="1400" dirty="0"/>
+              <a:t> repo</a:t>
+            </a:r>
+          </a:p>
+        </p:txBody>
+      </p:sp>
+      <p:pic>
+        <p:nvPicPr>
+          <p:cNvPr id="3" name="Picture 2" descr="Git and Github basics served right. | by Sameer Kashyap | Medium">
+            <a:extLst>
+              <a:ext uri="{FF2B5EF4-FFF2-40B4-BE49-F238E27FC236}">
+                <a16:creationId xmlns:a16="http://schemas.microsoft.com/office/drawing/2014/main" id="{348BB69B-4881-1226-BD5D-73937C151F27}"/>
+              </a:ext>
+            </a:extLst>
+          </p:cNvPr>
+          <p:cNvPicPr>
+            <a:picLocks noChangeAspect="1" noChangeArrowheads="1"/>
+          </p:cNvPicPr>
+          <p:nvPr/>
+        </p:nvPicPr>
+        <p:blipFill>
+          <a:blip r:embed="rId3">
+            <a:extLst>
+              <a:ext uri="{28A0092B-C50C-407E-A947-70E740481C1C}">
+                <a14:useLocalDpi xmlns:a14="http://schemas.microsoft.com/office/drawing/2010/main" val="0"/>
+              </a:ext>
+            </a:extLst>
+          </a:blip>
+          <a:srcRect/>
+          <a:stretch>
+            <a:fillRect/>
+          </a:stretch>
+        </p:blipFill>
+        <p:spPr bwMode="auto">
+          <a:xfrm>
+            <a:off x="5408253" y="10218"/>
+            <a:ext cx="1375494" cy="591229"/>
+          </a:xfrm>
+          <a:prstGeom prst="rect">
+            <a:avLst/>
+          </a:prstGeom>
           <a:noFill/>
-        </p:spPr>
-        <p:txBody>
-          <a:bodyPr wrap="none" rtlCol="0">
-            <a:spAutoFit/>
-          </a:bodyPr>
-          <a:lstStyle/>
-          <a:p>
-            <a:pPr marL="285750" indent="-285750">
-              <a:buFontTx/>
-              <a:buChar char="-"/>
-            </a:pPr>
-            <a:r>
-              <a:rPr lang="en-US" dirty="0"/>
-              <a:t>We will create a unified python package to perform CRUD operations which will be hosted on </a:t>
-            </a:r>
-            <a:r>
-              <a:rPr lang="en-US" dirty="0" err="1"/>
-              <a:t>github</a:t>
-            </a:r>
-            <a:r>
-              <a:rPr lang="en-US" dirty="0"/>
-              <a:t> &amp; released on</a:t>
-            </a:r>
-          </a:p>
-          <a:p>
-            <a:r>
-              <a:rPr lang="en-US" dirty="0"/>
-              <a:t>      </a:t>
-            </a:r>
-            <a:r>
-              <a:rPr lang="en-US" dirty="0" err="1"/>
-              <a:t>pypi</a:t>
-            </a:r>
-            <a:r>
-              <a:rPr lang="en-US" dirty="0"/>
-              <a:t> repo so that people can pip install and use it in their code</a:t>
-            </a:r>
-          </a:p>
-          <a:p>
-            <a:endParaRPr lang="en-US" dirty="0"/>
-          </a:p>
-          <a:p>
-            <a:pPr marL="285750" indent="-285750">
-              <a:buFontTx/>
-              <a:buChar char="-"/>
-            </a:pPr>
-            <a:r>
-              <a:rPr lang="en-US" dirty="0" err="1"/>
-              <a:t>Mongodb</a:t>
-            </a:r>
-            <a:r>
-              <a:rPr lang="en-US" dirty="0"/>
-              <a:t> is a </a:t>
-            </a:r>
-            <a:r>
-              <a:rPr lang="en-US" dirty="0" err="1"/>
-              <a:t>nosql</a:t>
-            </a:r>
-            <a:r>
-              <a:rPr lang="en-US" dirty="0"/>
-              <a:t> </a:t>
-            </a:r>
-            <a:r>
-              <a:rPr lang="en-US" dirty="0" err="1"/>
-              <a:t>dbs</a:t>
-            </a:r>
-            <a:r>
-              <a:rPr lang="en-US" dirty="0"/>
-              <a:t> where we save data in dictionary format, we will also include </a:t>
-            </a:r>
-            <a:r>
-              <a:rPr lang="en-US" dirty="0" err="1"/>
-              <a:t>cassandra</a:t>
-            </a:r>
-            <a:r>
-              <a:rPr lang="en-US" dirty="0"/>
-              <a:t>, </a:t>
-            </a:r>
-            <a:r>
-              <a:rPr lang="en-US" dirty="0" err="1"/>
-              <a:t>mysql</a:t>
-            </a:r>
-            <a:r>
-              <a:rPr lang="en-US" dirty="0"/>
-              <a:t> </a:t>
-            </a:r>
-            <a:r>
-              <a:rPr lang="en-US" dirty="0" err="1"/>
-              <a:t>etc</a:t>
-            </a:r>
-            <a:endParaRPr lang="en-US" dirty="0"/>
-          </a:p>
-          <a:p>
-            <a:pPr marL="285750" indent="-285750">
-              <a:buFontTx/>
-              <a:buChar char="-"/>
-            </a:pPr>
-            <a:endParaRPr lang="en-US" dirty="0"/>
-          </a:p>
-          <a:p>
-            <a:pPr marL="285750" indent="-285750">
-              <a:buFontTx/>
-              <a:buChar char="-"/>
-            </a:pPr>
-            <a:r>
-              <a:rPr lang="en-US" dirty="0"/>
-              <a:t>This package will be able to perform crud operations &amp; connecter for all major </a:t>
-            </a:r>
-            <a:r>
-              <a:rPr lang="en-US" dirty="0" err="1"/>
-              <a:t>dbs</a:t>
-            </a:r>
-            <a:endParaRPr lang="en-US" dirty="0"/>
-          </a:p>
-          <a:p>
-            <a:pPr marL="285750" indent="-285750">
-              <a:buFontTx/>
-              <a:buChar char="-"/>
-            </a:pPr>
-            <a:endParaRPr lang="en-US" dirty="0"/>
-          </a:p>
-          <a:p>
-            <a:pPr marL="285750" indent="-285750">
-              <a:buFontTx/>
-              <a:buChar char="-"/>
-            </a:pPr>
-            <a:r>
-              <a:rPr lang="en-US" dirty="0"/>
-              <a:t>Create folder structure using template.py</a:t>
-            </a:r>
-          </a:p>
-          <a:p>
-            <a:pPr marL="285750" indent="-285750">
-              <a:buFontTx/>
-              <a:buChar char="-"/>
-            </a:pPr>
-            <a:endParaRPr lang="en-US" dirty="0"/>
-          </a:p>
-          <a:p>
-            <a:pPr marL="285750" indent="-285750">
-              <a:buFontTx/>
-              <a:buChar char="-"/>
-            </a:pPr>
-            <a:r>
-              <a:rPr lang="en-US" dirty="0"/>
-              <a:t>Create </a:t>
-            </a:r>
-            <a:r>
-              <a:rPr lang="en-US" dirty="0" err="1"/>
-              <a:t>ci.yaml</a:t>
-            </a:r>
-            <a:r>
-              <a:rPr lang="en-US" dirty="0"/>
-              <a:t> &amp; python-</a:t>
-            </a:r>
-            <a:r>
-              <a:rPr lang="en-US" dirty="0" err="1"/>
-              <a:t>publish.yaml</a:t>
-            </a:r>
-            <a:endParaRPr lang="en-US" dirty="0"/>
-          </a:p>
-          <a:p>
-            <a:pPr marL="285750" indent="-285750">
-              <a:buFontTx/>
-              <a:buChar char="-"/>
-            </a:pPr>
-            <a:endParaRPr lang="en-US" dirty="0"/>
-          </a:p>
-          <a:p>
-            <a:pPr marL="285750" indent="-285750">
-              <a:buFontTx/>
-              <a:buChar char="-"/>
-            </a:pPr>
-            <a:r>
-              <a:rPr lang="en-US" dirty="0"/>
-              <a:t>Generate </a:t>
-            </a:r>
-            <a:r>
-              <a:rPr lang="en-US" dirty="0" err="1"/>
-              <a:t>pypi</a:t>
-            </a:r>
-            <a:r>
-              <a:rPr lang="en-US" dirty="0"/>
-              <a:t> </a:t>
-            </a:r>
-            <a:r>
-              <a:rPr lang="en-US" dirty="0" err="1"/>
-              <a:t>api</a:t>
-            </a:r>
-            <a:r>
-              <a:rPr lang="en-US" dirty="0"/>
-              <a:t> token &amp; add in </a:t>
-            </a:r>
-            <a:r>
-              <a:rPr lang="en-US" dirty="0" err="1"/>
-              <a:t>github</a:t>
-            </a:r>
-            <a:r>
-              <a:rPr lang="en-US" dirty="0"/>
-              <a:t> under setting &gt; security &gt; actions &gt; new repository secret and save</a:t>
-            </a:r>
-          </a:p>
-          <a:p>
-            <a:r>
-              <a:rPr lang="en-US" dirty="0"/>
-              <a:t>      it inside </a:t>
-            </a:r>
-            <a:r>
-              <a:rPr lang="en-US" dirty="0" err="1"/>
-              <a:t>github</a:t>
-            </a:r>
-            <a:r>
-              <a:rPr lang="en-US" dirty="0"/>
-              <a:t> secret variables</a:t>
-            </a:r>
-          </a:p>
-          <a:p>
-            <a:endParaRPr lang="en-US" dirty="0"/>
-          </a:p>
-          <a:p>
-            <a:r>
-              <a:rPr lang="en-US" b="1" dirty="0"/>
-              <a:t>“Continuous Integration (CI) is a software development practice where developers frequently integrate their</a:t>
-            </a:r>
-          </a:p>
-          <a:p>
-            <a:r>
-              <a:rPr lang="en-US" b="1" dirty="0"/>
-              <a:t>code into a shared repository multiple times a day. Each integration (or "commit") is automatically tested to detect</a:t>
-            </a:r>
-          </a:p>
-          <a:p>
-            <a:r>
-              <a:rPr lang="en-US" b="1" dirty="0"/>
-              <a:t>issues early, enabling teams to identify and address bugs as soon as they arise. The goal of CI is to improve software</a:t>
-            </a:r>
-          </a:p>
-          <a:p>
-            <a:r>
-              <a:rPr lang="en-US" b="1" dirty="0"/>
-              <a:t>quality and reduce the time it takes to deliver updates”</a:t>
-            </a:r>
-          </a:p>
-          <a:p>
-            <a:endParaRPr lang="en-US" dirty="0"/>
-          </a:p>
-        </p:txBody>
-      </p:sp>
+          <a:extLst>
+            <a:ext uri="{909E8E84-426E-40DD-AFC4-6F175D3DCCD1}">
+              <a14:hiddenFill xmlns:a14="http://schemas.microsoft.com/office/drawing/2010/main">
+                <a:solidFill>
+                  <a:srgbClr val="FFFFFF"/>
+                </a:solidFill>
+              </a14:hiddenFill>
+            </a:ext>
+          </a:extLst>
+        </p:spPr>
+      </p:pic>
     </p:spTree>
     <p:extLst>
       <p:ext uri="{BB962C8B-B14F-4D97-AF65-F5344CB8AC3E}">
-        <p14:creationId xmlns:p14="http://schemas.microsoft.com/office/powerpoint/2010/main" val="1625477926"/>
+        <p14:creationId xmlns:p14="http://schemas.microsoft.com/office/powerpoint/2010/main" val="4188027757"/>
       </p:ext>
     </p:extLst>
   </p:cSld>
@@ -6767,10 +7921,57 @@
       </p:grpSpPr>
       <p:sp>
         <p:nvSpPr>
-          <p:cNvPr id="3" name="TextBox 2">
-            <a:extLst>
-              <a:ext uri="{FF2B5EF4-FFF2-40B4-BE49-F238E27FC236}">
-                <a16:creationId xmlns:a16="http://schemas.microsoft.com/office/drawing/2014/main" id="{EA6C6BAB-A0DC-9A3F-0BBD-AFC7A693BB01}"/>
+          <p:cNvPr id="2" name="Rectangle: Rounded Corners 1">
+            <a:extLst>
+              <a:ext uri="{FF2B5EF4-FFF2-40B4-BE49-F238E27FC236}">
+                <a16:creationId xmlns:a16="http://schemas.microsoft.com/office/drawing/2014/main" id="{E4E09BE5-18AD-4BE9-2EBE-ECAD9B794C91}"/>
+              </a:ext>
+            </a:extLst>
+          </p:cNvPr>
+          <p:cNvSpPr/>
+          <p:nvPr/>
+        </p:nvSpPr>
+        <p:spPr>
+          <a:xfrm>
+            <a:off x="3553968" y="109728"/>
+            <a:ext cx="5084064" cy="493776"/>
+          </a:xfrm>
+          <a:prstGeom prst="roundRect">
+            <a:avLst/>
+          </a:prstGeom>
+        </p:spPr>
+        <p:style>
+          <a:lnRef idx="1">
+            <a:schemeClr val="dk1"/>
+          </a:lnRef>
+          <a:fillRef idx="2">
+            <a:schemeClr val="dk1"/>
+          </a:fillRef>
+          <a:effectRef idx="1">
+            <a:schemeClr val="dk1"/>
+          </a:effectRef>
+          <a:fontRef idx="minor">
+            <a:schemeClr val="dk1"/>
+          </a:fontRef>
+        </p:style>
+        <p:txBody>
+          <a:bodyPr rtlCol="0" anchor="ctr"/>
+          <a:lstStyle/>
+          <a:p>
+            <a:pPr algn="ctr"/>
+            <a:r>
+              <a:rPr lang="en-US" dirty="0"/>
+              <a:t>Micro Project: Deploy Python Package (CI Concepts)</a:t>
+            </a:r>
+          </a:p>
+        </p:txBody>
+      </p:sp>
+      <p:sp>
+        <p:nvSpPr>
+          <p:cNvPr id="4" name="TextBox 3">
+            <a:extLst>
+              <a:ext uri="{FF2B5EF4-FFF2-40B4-BE49-F238E27FC236}">
+                <a16:creationId xmlns:a16="http://schemas.microsoft.com/office/drawing/2014/main" id="{A670C0AA-8C3C-838D-F7E2-9E0B57F6F1F1}"/>
               </a:ext>
             </a:extLst>
           </p:cNvPr>
@@ -6779,8 +7980,8 @@
         </p:nvSpPr>
         <p:spPr>
           <a:xfrm>
-            <a:off x="576072" y="1353312"/>
-            <a:ext cx="7565982" cy="3416320"/>
+            <a:off x="429768" y="1380744"/>
+            <a:ext cx="11223778" cy="5355312"/>
           </a:xfrm>
           <a:prstGeom prst="rect">
             <a:avLst/>
@@ -6799,8 +8000,33 @@
             </a:pPr>
             <a:r>
               <a:rPr lang="en-US" dirty="0"/>
-              <a:t>GIT is a Source Code Management Tool. What is SCM and Version Control?</a:t>
-            </a:r>
+              <a:t>We will create a unified python package to perform CRUD operations which will be hosted on </a:t>
+            </a:r>
+            <a:r>
+              <a:rPr lang="en-US" dirty="0" err="1"/>
+              <a:t>github</a:t>
+            </a:r>
+            <a:r>
+              <a:rPr lang="en-US" dirty="0"/>
+              <a:t> &amp; released on</a:t>
+            </a:r>
+          </a:p>
+          <a:p>
+            <a:r>
+              <a:rPr lang="en-US" dirty="0"/>
+              <a:t>      </a:t>
+            </a:r>
+            <a:r>
+              <a:rPr lang="en-US" dirty="0" err="1"/>
+              <a:t>pypi</a:t>
+            </a:r>
+            <a:r>
+              <a:rPr lang="en-US" dirty="0"/>
+              <a:t> repo so that people can pip install and use it in their code</a:t>
+            </a:r>
+          </a:p>
+          <a:p>
+            <a:endParaRPr lang="en-US" dirty="0"/>
           </a:p>
           <a:p>
             <a:pPr marL="285750" indent="-285750">
@@ -6808,96 +8034,173 @@
               <a:buChar char="-"/>
             </a:pPr>
             <a:r>
+              <a:rPr lang="en-US" dirty="0" err="1"/>
+              <a:t>Mongodb</a:t>
+            </a:r>
+            <a:r>
               <a:rPr lang="en-US" dirty="0"/>
-              <a:t>Source code is the code that we write for any program</a:t>
-            </a:r>
+              <a:t> is a </a:t>
+            </a:r>
+            <a:r>
+              <a:rPr lang="en-US" dirty="0" err="1"/>
+              <a:t>nosql</a:t>
+            </a:r>
+            <a:r>
+              <a:rPr lang="en-US" dirty="0"/>
+              <a:t> </a:t>
+            </a:r>
+            <a:r>
+              <a:rPr lang="en-US" dirty="0" err="1"/>
+              <a:t>dbs</a:t>
+            </a:r>
+            <a:r>
+              <a:rPr lang="en-US" dirty="0"/>
+              <a:t> where we save data in dictionary format, we will also include </a:t>
+            </a:r>
+            <a:r>
+              <a:rPr lang="en-US" dirty="0" err="1"/>
+              <a:t>cassandra</a:t>
+            </a:r>
+            <a:r>
+              <a:rPr lang="en-US" dirty="0"/>
+              <a:t>, </a:t>
+            </a:r>
+            <a:r>
+              <a:rPr lang="en-US" dirty="0" err="1"/>
+              <a:t>mysql</a:t>
+            </a:r>
+            <a:r>
+              <a:rPr lang="en-US" dirty="0"/>
+              <a:t> </a:t>
+            </a:r>
+            <a:r>
+              <a:rPr lang="en-US" dirty="0" err="1"/>
+              <a:t>etc</a:t>
+            </a:r>
+            <a:endParaRPr lang="en-US" dirty="0"/>
           </a:p>
           <a:p>
             <a:pPr marL="285750" indent="-285750">
               <a:buFontTx/>
               <a:buChar char="-"/>
             </a:pPr>
+            <a:endParaRPr lang="en-US" dirty="0"/>
+          </a:p>
+          <a:p>
+            <a:pPr marL="285750" indent="-285750">
+              <a:buFontTx/>
+              <a:buChar char="-"/>
+            </a:pPr>
             <a:r>
               <a:rPr lang="en-US" dirty="0"/>
-              <a:t>Lets say we write some code on day1 &amp; write more code</a:t>
-            </a:r>
-          </a:p>
-          <a:p>
+              <a:t>This package will be able to perform crud operations &amp; connecter for all major </a:t>
+            </a:r>
+            <a:r>
+              <a:rPr lang="en-US" dirty="0" err="1"/>
+              <a:t>dbs</a:t>
+            </a:r>
+            <a:endParaRPr lang="en-US" dirty="0"/>
+          </a:p>
+          <a:p>
+            <a:pPr marL="285750" indent="-285750">
+              <a:buFontTx/>
+              <a:buChar char="-"/>
+            </a:pPr>
+            <a:endParaRPr lang="en-US" dirty="0"/>
+          </a:p>
+          <a:p>
+            <a:pPr marL="285750" indent="-285750">
+              <a:buFontTx/>
+              <a:buChar char="-"/>
+            </a:pPr>
             <a:r>
               <a:rPr lang="en-US" dirty="0"/>
-              <a:t>On day 2, so day 1 file is v1 &amp; day 2 file is v2, even though </a:t>
-            </a:r>
-          </a:p>
-          <a:p>
+              <a:t>Create folder structure using template.py</a:t>
+            </a:r>
+          </a:p>
+          <a:p>
+            <a:pPr marL="285750" indent="-285750">
+              <a:buFontTx/>
+              <a:buChar char="-"/>
+            </a:pPr>
+            <a:endParaRPr lang="en-US" dirty="0"/>
+          </a:p>
+          <a:p>
+            <a:pPr marL="285750" indent="-285750">
+              <a:buFontTx/>
+              <a:buChar char="-"/>
+            </a:pPr>
             <a:r>
               <a:rPr lang="en-US" dirty="0"/>
-              <a:t>It’s the same file, but it has 2 versions</a:t>
-            </a:r>
+              <a:t>Create </a:t>
+            </a:r>
+            <a:r>
+              <a:rPr lang="en-US" dirty="0" err="1"/>
+              <a:t>ci.yaml</a:t>
+            </a:r>
+            <a:r>
+              <a:rPr lang="en-US" dirty="0"/>
+              <a:t> &amp; python-</a:t>
+            </a:r>
+            <a:r>
+              <a:rPr lang="en-US" dirty="0" err="1"/>
+              <a:t>publish.yaml</a:t>
+            </a:r>
+            <a:endParaRPr lang="en-US" dirty="0"/>
           </a:p>
           <a:p>
             <a:pPr marL="285750" indent="-285750">
               <a:buFontTx/>
               <a:buChar char="-"/>
             </a:pPr>
+            <a:endParaRPr lang="en-US" dirty="0"/>
+          </a:p>
+          <a:p>
+            <a:pPr marL="285750" indent="-285750">
+              <a:buFontTx/>
+              <a:buChar char="-"/>
+            </a:pPr>
             <a:r>
               <a:rPr lang="en-US" dirty="0"/>
-              <a:t>By using “git” we can manage different versions of the code, It’s a SCM tool.</a:t>
-            </a:r>
-          </a:p>
-          <a:p>
-            <a:pPr marL="285750" indent="-285750">
-              <a:buFontTx/>
-              <a:buChar char="-"/>
-            </a:pPr>
+              <a:t>Generate </a:t>
+            </a:r>
+            <a:r>
+              <a:rPr lang="en-US" dirty="0" err="1"/>
+              <a:t>pypi</a:t>
+            </a:r>
             <a:r>
               <a:rPr lang="en-US" dirty="0"/>
-              <a:t>Git is a Open Source tool</a:t>
-            </a:r>
-          </a:p>
-          <a:p>
-            <a:pPr marL="285750" indent="-285750">
-              <a:buFontTx/>
-              <a:buChar char="-"/>
-            </a:pPr>
+              <a:t> </a:t>
+            </a:r>
+            <a:r>
+              <a:rPr lang="en-US" dirty="0" err="1"/>
+              <a:t>api</a:t>
+            </a:r>
             <a:r>
               <a:rPr lang="en-US" dirty="0"/>
-              <a:t>“git </a:t>
+              <a:t> token &amp; add in </a:t>
             </a:r>
             <a:r>
               <a:rPr lang="en-US" dirty="0" err="1"/>
-              <a:t>init</a:t>
+              <a:t>github</a:t>
             </a:r>
             <a:r>
               <a:rPr lang="en-US" dirty="0"/>
-              <a:t>” in local folder to local repo, git add &lt;</a:t>
+              <a:t> under setting &gt; security &gt; actions &gt; new repository secret and save</a:t>
+            </a:r>
+          </a:p>
+          <a:p>
+            <a:r>
+              <a:rPr lang="en-US" dirty="0"/>
+              <a:t>      it inside </a:t>
             </a:r>
             <a:r>
               <a:rPr lang="en-US" dirty="0" err="1"/>
-              <a:t>file_name</a:t>
+              <a:t>github</a:t>
             </a:r>
             <a:r>
               <a:rPr lang="en-US" dirty="0"/>
-              <a:t>&gt; to add the file in</a:t>
-            </a:r>
-          </a:p>
-          <a:p>
-            <a:r>
-              <a:rPr lang="en-US" dirty="0"/>
-              <a:t>Staging area &amp; finally we can commit to take a snapshot of the code</a:t>
-            </a:r>
-          </a:p>
-          <a:p>
-            <a:r>
-              <a:rPr lang="en-US" dirty="0"/>
-              <a:t>git </a:t>
-            </a:r>
-            <a:r>
-              <a:rPr lang="en-US" dirty="0" err="1"/>
-              <a:t>cimmit</a:t>
-            </a:r>
-            <a:r>
-              <a:rPr lang="en-US" dirty="0"/>
-              <a:t> –m “&lt;comment&gt;”</a:t>
+              <a:t> secret variables</a:t>
             </a:r>
           </a:p>
           <a:p>
@@ -6905,127 +8208,37 @@
           </a:p>
           <a:p>
             <a:r>
-              <a:rPr lang="en-US" dirty="0"/>
-              <a:t>- </a:t>
-            </a:r>
-            <a:r>
               <a:rPr lang="en-US" b="1" dirty="0"/>
-              <a:t>&lt;skipped&gt;</a:t>
-            </a:r>
-          </a:p>
-        </p:txBody>
-      </p:sp>
-      <p:pic>
-        <p:nvPicPr>
-          <p:cNvPr id="5" name="Picture 4">
-            <a:extLst>
-              <a:ext uri="{FF2B5EF4-FFF2-40B4-BE49-F238E27FC236}">
-                <a16:creationId xmlns:a16="http://schemas.microsoft.com/office/drawing/2014/main" id="{956EBAF2-3070-D4FC-CBAE-BCD02754AC11}"/>
-              </a:ext>
-            </a:extLst>
-          </p:cNvPr>
-          <p:cNvPicPr>
-            <a:picLocks noChangeAspect="1"/>
-          </p:cNvPicPr>
-          <p:nvPr/>
-        </p:nvPicPr>
-        <p:blipFill>
-          <a:blip r:embed="rId2"/>
-          <a:stretch>
-            <a:fillRect/>
-          </a:stretch>
-        </p:blipFill>
-        <p:spPr>
-          <a:xfrm>
-            <a:off x="8142054" y="68258"/>
-            <a:ext cx="4008316" cy="3196150"/>
-          </a:xfrm>
-          <a:prstGeom prst="rect">
-            <a:avLst/>
-          </a:prstGeom>
-        </p:spPr>
-      </p:pic>
-      <p:pic>
-        <p:nvPicPr>
-          <p:cNvPr id="7" name="Picture 6">
-            <a:extLst>
-              <a:ext uri="{FF2B5EF4-FFF2-40B4-BE49-F238E27FC236}">
-                <a16:creationId xmlns:a16="http://schemas.microsoft.com/office/drawing/2014/main" id="{7CD1F3C7-5650-73AB-731F-79AB0B49B4EA}"/>
-              </a:ext>
-            </a:extLst>
-          </p:cNvPr>
-          <p:cNvPicPr>
-            <a:picLocks noChangeAspect="1"/>
-          </p:cNvPicPr>
-          <p:nvPr/>
-        </p:nvPicPr>
-        <p:blipFill>
-          <a:blip r:embed="rId3"/>
-          <a:stretch>
-            <a:fillRect/>
-          </a:stretch>
-        </p:blipFill>
-        <p:spPr>
-          <a:xfrm>
-            <a:off x="8142055" y="3364992"/>
-            <a:ext cx="4008316" cy="3322623"/>
-          </a:xfrm>
-          <a:prstGeom prst="rect">
-            <a:avLst/>
-          </a:prstGeom>
-        </p:spPr>
-      </p:pic>
-      <p:pic>
-        <p:nvPicPr>
-          <p:cNvPr id="2050" name="Picture 2" descr="Git and Github basics served right. | by Sameer Kashyap | Medium">
-            <a:extLst>
-              <a:ext uri="{FF2B5EF4-FFF2-40B4-BE49-F238E27FC236}">
-                <a16:creationId xmlns:a16="http://schemas.microsoft.com/office/drawing/2014/main" id="{3A025A47-27DA-30A1-C245-8094B7AF2585}"/>
-              </a:ext>
-            </a:extLst>
-          </p:cNvPr>
-          <p:cNvPicPr>
-            <a:picLocks noChangeAspect="1" noChangeArrowheads="1"/>
-          </p:cNvPicPr>
-          <p:nvPr/>
-        </p:nvPicPr>
-        <p:blipFill>
-          <a:blip r:embed="rId4">
-            <a:extLst>
-              <a:ext uri="{28A0092B-C50C-407E-A947-70E740481C1C}">
-                <a14:useLocalDpi xmlns:a14="http://schemas.microsoft.com/office/drawing/2010/main" val="0"/>
-              </a:ext>
-            </a:extLst>
-          </a:blip>
-          <a:srcRect/>
-          <a:stretch>
-            <a:fillRect/>
-          </a:stretch>
-        </p:blipFill>
-        <p:spPr bwMode="auto">
-          <a:xfrm>
-            <a:off x="4359063" y="0"/>
-            <a:ext cx="1375494" cy="591229"/>
-          </a:xfrm>
-          <a:prstGeom prst="rect">
-            <a:avLst/>
-          </a:prstGeom>
-          <a:noFill/>
-          <a:extLst>
-            <a:ext uri="{909E8E84-426E-40DD-AFC4-6F175D3DCCD1}">
-              <a14:hiddenFill xmlns:a14="http://schemas.microsoft.com/office/drawing/2010/main">
-                <a:solidFill>
-                  <a:srgbClr val="FFFFFF"/>
-                </a:solidFill>
-              </a14:hiddenFill>
-            </a:ext>
-          </a:extLst>
-        </p:spPr>
-      </p:pic>
+              <a:t>“Continuous Integration (CI) is a software development practice where developers frequently integrate their</a:t>
+            </a:r>
+          </a:p>
+          <a:p>
+            <a:r>
+              <a:rPr lang="en-US" b="1" dirty="0"/>
+              <a:t>code into a shared repository multiple times a day. Each integration (or "commit") is automatically tested to detect</a:t>
+            </a:r>
+          </a:p>
+          <a:p>
+            <a:r>
+              <a:rPr lang="en-US" b="1" dirty="0"/>
+              <a:t>issues early, enabling teams to identify and address bugs as soon as they arise. The goal of CI is to improve software</a:t>
+            </a:r>
+          </a:p>
+          <a:p>
+            <a:r>
+              <a:rPr lang="en-US" b="1" dirty="0"/>
+              <a:t>quality and reduce the time it takes to deliver updates”</a:t>
+            </a:r>
+          </a:p>
+          <a:p>
+            <a:endParaRPr lang="en-US" dirty="0"/>
+          </a:p>
+        </p:txBody>
+      </p:sp>
     </p:spTree>
     <p:extLst>
       <p:ext uri="{BB962C8B-B14F-4D97-AF65-F5344CB8AC3E}">
-        <p14:creationId xmlns:p14="http://schemas.microsoft.com/office/powerpoint/2010/main" val="1075447266"/>
+        <p14:creationId xmlns:p14="http://schemas.microsoft.com/office/powerpoint/2010/main" val="1625477926"/>
       </p:ext>
     </p:extLst>
   </p:cSld>
@@ -7054,10 +8267,10 @@
       </p:grpSpPr>
       <p:sp>
         <p:nvSpPr>
-          <p:cNvPr id="4" name="TextBox 3">
-            <a:extLst>
-              <a:ext uri="{FF2B5EF4-FFF2-40B4-BE49-F238E27FC236}">
-                <a16:creationId xmlns:a16="http://schemas.microsoft.com/office/drawing/2014/main" id="{658FC4DD-64E6-31A2-0173-4A37668BA387}"/>
+          <p:cNvPr id="3" name="TextBox 2">
+            <a:extLst>
+              <a:ext uri="{FF2B5EF4-FFF2-40B4-BE49-F238E27FC236}">
+                <a16:creationId xmlns:a16="http://schemas.microsoft.com/office/drawing/2014/main" id="{EA6C6BAB-A0DC-9A3F-0BBD-AFC7A693BB01}"/>
               </a:ext>
             </a:extLst>
           </p:cNvPr>
@@ -7066,8 +8279,8 @@
         </p:nvSpPr>
         <p:spPr>
           <a:xfrm>
-            <a:off x="234615" y="219456"/>
-            <a:ext cx="10722359" cy="5755422"/>
+            <a:off x="576072" y="1353312"/>
+            <a:ext cx="7565982" cy="3416320"/>
           </a:xfrm>
           <a:prstGeom prst="rect">
             <a:avLst/>
@@ -7085,8 +8298,8 @@
               <a:buChar char="-"/>
             </a:pPr>
             <a:r>
-              <a:rPr lang="en-US" sz="1600" dirty="0"/>
-              <a:t>What is docker?</a:t>
+              <a:rPr lang="en-US" dirty="0"/>
+              <a:t>GIT is a Source Code Management Tool. What is SCM and Version Control?</a:t>
             </a:r>
           </a:p>
           <a:p>
@@ -7095,8 +8308,8 @@
               <a:buChar char="-"/>
             </a:pPr>
             <a:r>
-              <a:rPr lang="en-US" sz="1600" dirty="0"/>
-              <a:t>Docker was developed in 2013 developed by Solomon Hikes. It’s open-source tool.</a:t>
+              <a:rPr lang="en-US" dirty="0"/>
+              <a:t>Source code is the code that we write for any program</a:t>
             </a:r>
           </a:p>
           <a:p>
@@ -7105,8 +8318,20 @@
               <a:buChar char="-"/>
             </a:pPr>
             <a:r>
-              <a:rPr lang="en-US" sz="1600" dirty="0"/>
-              <a:t>Actual virtualization is done by “docker engine”</a:t>
+              <a:rPr lang="en-US" dirty="0"/>
+              <a:t>Lets say we write some code on day1 &amp; write more code</a:t>
+            </a:r>
+          </a:p>
+          <a:p>
+            <a:r>
+              <a:rPr lang="en-US" dirty="0"/>
+              <a:t>On day 2, so day 1 file is v1 &amp; day 2 file is v2, even though </a:t>
+            </a:r>
+          </a:p>
+          <a:p>
+            <a:r>
+              <a:rPr lang="en-US" dirty="0"/>
+              <a:t>It’s the same file, but it has 2 versions</a:t>
             </a:r>
           </a:p>
           <a:p>
@@ -7115,8 +8340,8 @@
               <a:buChar char="-"/>
             </a:pPr>
             <a:r>
-              <a:rPr lang="en-US" sz="1600" dirty="0"/>
-              <a:t>Written using “Go” language of google.</a:t>
+              <a:rPr lang="en-US" dirty="0"/>
+              <a:t>By using “git” we can manage different versions of the code, It’s a SCM tool.</a:t>
             </a:r>
           </a:p>
           <a:p>
@@ -7125,8 +8350,8 @@
               <a:buChar char="-"/>
             </a:pPr>
             <a:r>
-              <a:rPr lang="en-US" sz="1600" dirty="0"/>
-              <a:t>There are 3 services: IAAS, PAAS, SAAS. Docker is a PAAS since its providing a platform to run application</a:t>
+              <a:rPr lang="en-US" dirty="0"/>
+              <a:t>Git is a Open Source tool</a:t>
             </a:r>
           </a:p>
           <a:p>
@@ -7135,162 +8360,67 @@
               <a:buChar char="-"/>
             </a:pPr>
             <a:r>
-              <a:rPr lang="en-US" sz="1600" dirty="0"/>
-              <a:t>We can build, run &amp; deploy application using docker</a:t>
-            </a:r>
-          </a:p>
-          <a:p>
-            <a:pPr marL="285750" indent="-285750">
-              <a:buFontTx/>
-              <a:buChar char="-"/>
-            </a:pPr>
-            <a:endParaRPr lang="en-US" sz="1600" dirty="0"/>
-          </a:p>
-          <a:p>
-            <a:pPr marL="285750" indent="-285750">
-              <a:buFontTx/>
-              <a:buChar char="-"/>
-            </a:pPr>
-            <a:r>
-              <a:rPr lang="en-US" sz="1600" dirty="0"/>
-              <a:t>What was the problem before?</a:t>
-            </a:r>
-          </a:p>
-          <a:p>
-            <a:pPr marL="285750" indent="-285750">
-              <a:buFontTx/>
-              <a:buChar char="-"/>
-            </a:pPr>
-            <a:r>
-              <a:rPr lang="en-US" sz="1600" dirty="0"/>
-              <a:t>Lets say we have a development, testing and deployment team. When development team creates a program and send it to </a:t>
-            </a:r>
-          </a:p>
-          <a:p>
-            <a:r>
-              <a:rPr lang="en-US" sz="1600" dirty="0"/>
-              <a:t>Testing team to test, Its doesn’t work on their system due to development environment or dependencies not available.</a:t>
-            </a:r>
-          </a:p>
-          <a:p>
-            <a:pPr marL="285750" indent="-285750">
-              <a:buFontTx/>
-              <a:buChar char="-"/>
-            </a:pPr>
-            <a:r>
-              <a:rPr lang="en-US" sz="1600" dirty="0"/>
-              <a:t>Or when we write code in our local system, It works flawlessly but when we deploy it on </a:t>
-            </a:r>
-            <a:r>
-              <a:rPr lang="en-US" sz="1600" dirty="0" err="1"/>
-              <a:t>aws</a:t>
-            </a:r>
-            <a:r>
-              <a:rPr lang="en-US" sz="1600" dirty="0"/>
-              <a:t> or cloud then it fails, it gives</a:t>
-            </a:r>
-          </a:p>
-          <a:p>
-            <a:r>
-              <a:rPr lang="en-US" sz="1600" dirty="0"/>
-              <a:t>“internal server error”</a:t>
-            </a:r>
-          </a:p>
-          <a:p>
-            <a:pPr marL="285750" indent="-285750">
-              <a:buFontTx/>
-              <a:buChar char="-"/>
-            </a:pPr>
-            <a:r>
-              <a:rPr lang="en-US" sz="1600" dirty="0"/>
-              <a:t>Solution was “Virtualization” and actual program which is responsible for virtualization called</a:t>
-            </a:r>
-          </a:p>
-          <a:p>
-            <a:r>
-              <a:rPr lang="en-US" sz="1600" dirty="0"/>
-              <a:t>“hypervisor”</a:t>
-            </a:r>
-          </a:p>
-          <a:p>
-            <a:pPr marL="285750" indent="-285750">
-              <a:buFontTx/>
-              <a:buChar char="-"/>
-            </a:pPr>
-            <a:r>
-              <a:rPr lang="en-US" sz="1600" dirty="0"/>
-              <a:t>We can create multiple VMs by sharing resources using hypervisor and we can create a template</a:t>
-            </a:r>
-          </a:p>
-          <a:p>
-            <a:r>
-              <a:rPr lang="en-US" sz="1600" dirty="0"/>
-              <a:t>Of it and share that template to Testing team and it will work on their system also but the issue</a:t>
-            </a:r>
-          </a:p>
-          <a:p>
-            <a:r>
-              <a:rPr lang="en-US" sz="1600" dirty="0"/>
-              <a:t>with this is that we cant create unlimited VMs since its sharing the resources of the host pc since </a:t>
-            </a:r>
-          </a:p>
-          <a:p>
-            <a:r>
-              <a:rPr lang="en-US" sz="1600" dirty="0"/>
-              <a:t>Resources are fixed and will not be free until VM are shut down.</a:t>
-            </a:r>
-          </a:p>
-          <a:p>
-            <a:pPr marL="285750" indent="-285750">
-              <a:buFontTx/>
-              <a:buChar char="-"/>
-            </a:pPr>
-            <a:r>
-              <a:rPr lang="en-US" sz="1600" dirty="0"/>
-              <a:t>We are installing separate OS in virtualization which takes more memory. Solution to this is</a:t>
-            </a:r>
-          </a:p>
-          <a:p>
-            <a:r>
-              <a:rPr lang="en-US" sz="1600" dirty="0"/>
-              <a:t>“Containerization”, we can use Docker Engine for containerization. In containerization we share </a:t>
-            </a:r>
-          </a:p>
-          <a:p>
-            <a:r>
-              <a:rPr lang="en-US" sz="1600" dirty="0"/>
-              <a:t>Host OS &amp; resources and they are not fixed. Its not directly interacting with hardware.</a:t>
-            </a:r>
-          </a:p>
-          <a:p>
-            <a:pPr marL="285750" indent="-285750">
-              <a:buFontTx/>
-              <a:buChar char="-"/>
-            </a:pPr>
-            <a:r>
-              <a:rPr lang="en-US" sz="1600" dirty="0"/>
-              <a:t>Port Mapping: Lets say we’re running flask on docker which uses 5000 port but we cant access it on host </a:t>
-            </a:r>
-            <a:r>
-              <a:rPr lang="en-US" sz="1600" dirty="0" err="1"/>
-              <a:t>os</a:t>
-            </a:r>
-            <a:endParaRPr lang="en-US" sz="1600" dirty="0"/>
-          </a:p>
-          <a:p>
-            <a:r>
-              <a:rPr lang="en-US" sz="1600" dirty="0"/>
-              <a:t>unless its mapped, 5000(host port): 5000(container app port)</a:t>
+              <a:rPr lang="en-US" dirty="0"/>
+              <a:t>“git </a:t>
+            </a:r>
+            <a:r>
+              <a:rPr lang="en-US" dirty="0" err="1"/>
+              <a:t>init</a:t>
+            </a:r>
+            <a:r>
+              <a:rPr lang="en-US" dirty="0"/>
+              <a:t>” in local folder to local repo, git add &lt;</a:t>
+            </a:r>
+            <a:r>
+              <a:rPr lang="en-US" dirty="0" err="1"/>
+              <a:t>file_name</a:t>
+            </a:r>
+            <a:r>
+              <a:rPr lang="en-US" dirty="0"/>
+              <a:t>&gt; to add the file in</a:t>
+            </a:r>
+          </a:p>
+          <a:p>
+            <a:r>
+              <a:rPr lang="en-US" dirty="0"/>
+              <a:t>Staging area &amp; finally we can commit to take a snapshot of the code</a:t>
+            </a:r>
+          </a:p>
+          <a:p>
+            <a:r>
+              <a:rPr lang="en-US" dirty="0"/>
+              <a:t>git </a:t>
+            </a:r>
+            <a:r>
+              <a:rPr lang="en-US" dirty="0" err="1"/>
+              <a:t>cimmit</a:t>
+            </a:r>
+            <a:r>
+              <a:rPr lang="en-US" dirty="0"/>
+              <a:t> –m “&lt;comment&gt;”</a:t>
+            </a:r>
+          </a:p>
+          <a:p>
+            <a:endParaRPr lang="en-US" dirty="0"/>
+          </a:p>
+          <a:p>
+            <a:r>
+              <a:rPr lang="en-US" dirty="0"/>
+              <a:t>- </a:t>
+            </a:r>
+            <a:r>
+              <a:rPr lang="en-US" b="1" dirty="0"/>
+              <a:t>&lt;skipped&gt;</a:t>
             </a:r>
           </a:p>
         </p:txBody>
       </p:sp>
       <p:pic>
         <p:nvPicPr>
-          <p:cNvPr id="8" name="Picture 7">
-            <a:extLst>
-              <a:ext uri="{FF2B5EF4-FFF2-40B4-BE49-F238E27FC236}">
-                <a16:creationId xmlns:a16="http://schemas.microsoft.com/office/drawing/2014/main" id="{545888E4-0E68-F522-2766-07FB990A2885}"/>
+          <p:cNvPr id="5" name="Picture 4">
+            <a:extLst>
+              <a:ext uri="{FF2B5EF4-FFF2-40B4-BE49-F238E27FC236}">
+                <a16:creationId xmlns:a16="http://schemas.microsoft.com/office/drawing/2014/main" id="{956EBAF2-3070-D4FC-CBAE-BCD02754AC11}"/>
               </a:ext>
             </a:extLst>
           </p:cNvPr>
@@ -7307,8 +8437,8 @@
         </p:blipFill>
         <p:spPr>
           <a:xfrm>
-            <a:off x="9627945" y="3339840"/>
-            <a:ext cx="2448312" cy="2448312"/>
+            <a:off x="8142054" y="68258"/>
+            <a:ext cx="4008316" cy="3196150"/>
           </a:xfrm>
           <a:prstGeom prst="rect">
             <a:avLst/>
@@ -7317,10 +8447,40 @@
       </p:pic>
       <p:pic>
         <p:nvPicPr>
-          <p:cNvPr id="9" name="Picture 4" descr="Docker for Developers: Understanding the Core Concepts – Code with Dan Blog">
-            <a:extLst>
-              <a:ext uri="{FF2B5EF4-FFF2-40B4-BE49-F238E27FC236}">
-                <a16:creationId xmlns:a16="http://schemas.microsoft.com/office/drawing/2014/main" id="{D96A6FB8-47E6-EF09-B392-C4BD24A7FA75}"/>
+          <p:cNvPr id="7" name="Picture 6">
+            <a:extLst>
+              <a:ext uri="{FF2B5EF4-FFF2-40B4-BE49-F238E27FC236}">
+                <a16:creationId xmlns:a16="http://schemas.microsoft.com/office/drawing/2014/main" id="{7CD1F3C7-5650-73AB-731F-79AB0B49B4EA}"/>
+              </a:ext>
+            </a:extLst>
+          </p:cNvPr>
+          <p:cNvPicPr>
+            <a:picLocks noChangeAspect="1"/>
+          </p:cNvPicPr>
+          <p:nvPr/>
+        </p:nvPicPr>
+        <p:blipFill>
+          <a:blip r:embed="rId3"/>
+          <a:stretch>
+            <a:fillRect/>
+          </a:stretch>
+        </p:blipFill>
+        <p:spPr>
+          <a:xfrm>
+            <a:off x="8142055" y="3364992"/>
+            <a:ext cx="4008316" cy="3322623"/>
+          </a:xfrm>
+          <a:prstGeom prst="rect">
+            <a:avLst/>
+          </a:prstGeom>
+        </p:spPr>
+      </p:pic>
+      <p:pic>
+        <p:nvPicPr>
+          <p:cNvPr id="2050" name="Picture 2" descr="Git and Github basics served right. | by Sameer Kashyap | Medium">
+            <a:extLst>
+              <a:ext uri="{FF2B5EF4-FFF2-40B4-BE49-F238E27FC236}">
+                <a16:creationId xmlns:a16="http://schemas.microsoft.com/office/drawing/2014/main" id="{3A025A47-27DA-30A1-C245-8094B7AF2585}"/>
               </a:ext>
             </a:extLst>
           </p:cNvPr>
@@ -7330,7 +8490,7 @@
           <p:nvPr/>
         </p:nvPicPr>
         <p:blipFill>
-          <a:blip r:embed="rId3">
+          <a:blip r:embed="rId4">
             <a:extLst>
               <a:ext uri="{28A0092B-C50C-407E-A947-70E740481C1C}">
                 <a14:useLocalDpi xmlns:a14="http://schemas.microsoft.com/office/drawing/2010/main" val="0"/>
@@ -7344,8 +8504,8 @@
         </p:blipFill>
         <p:spPr bwMode="auto">
           <a:xfrm>
-            <a:off x="5206253" y="-73319"/>
-            <a:ext cx="889747" cy="585550"/>
+            <a:off x="4359063" y="0"/>
+            <a:ext cx="1375494" cy="591229"/>
           </a:xfrm>
           <a:prstGeom prst="rect">
             <a:avLst/>
@@ -7365,7 +8525,7 @@
     </p:spTree>
     <p:extLst>
       <p:ext uri="{BB962C8B-B14F-4D97-AF65-F5344CB8AC3E}">
-        <p14:creationId xmlns:p14="http://schemas.microsoft.com/office/powerpoint/2010/main" val="698163394"/>
+        <p14:creationId xmlns:p14="http://schemas.microsoft.com/office/powerpoint/2010/main" val="1075447266"/>
       </p:ext>
     </p:extLst>
   </p:cSld>
@@ -7397,7 +8557,7 @@
           <p:cNvPr id="4" name="TextBox 3">
             <a:extLst>
               <a:ext uri="{FF2B5EF4-FFF2-40B4-BE49-F238E27FC236}">
-                <a16:creationId xmlns:a16="http://schemas.microsoft.com/office/drawing/2014/main" id="{4E0E8D03-CF9D-DE5B-CDCF-8AE33D679EE1}"/>
+                <a16:creationId xmlns:a16="http://schemas.microsoft.com/office/drawing/2014/main" id="{658FC4DD-64E6-31A2-0173-4A37668BA387}"/>
               </a:ext>
             </a:extLst>
           </p:cNvPr>
@@ -7406,8 +8566,8 @@
         </p:nvSpPr>
         <p:spPr>
           <a:xfrm>
-            <a:off x="365760" y="379476"/>
-            <a:ext cx="9597499" cy="5847755"/>
+            <a:off x="234615" y="219456"/>
+            <a:ext cx="10722359" cy="5755422"/>
           </a:xfrm>
           <a:prstGeom prst="rect">
             <a:avLst/>
@@ -7425,13 +8585,9 @@
               <a:buChar char="-"/>
             </a:pPr>
             <a:r>
-              <a:rPr lang="en-US" sz="1100" b="1" dirty="0"/>
-              <a:t>TASK: Create flask app and run it on docker container inside docker image</a:t>
-            </a:r>
-            <a:br>
-              <a:rPr lang="en-US" sz="1100" b="1" dirty="0"/>
-            </a:br>
-            <a:endParaRPr lang="en-US" sz="1100" b="1" dirty="0"/>
+              <a:rPr lang="en-US" sz="1600" dirty="0"/>
+              <a:t>What is docker?</a:t>
+            </a:r>
           </a:p>
           <a:p>
             <a:pPr marL="285750" indent="-285750">
@@ -7439,378 +8595,202 @@
               <a:buChar char="-"/>
             </a:pPr>
             <a:r>
-              <a:rPr lang="en-US" sz="1100" b="1" dirty="0"/>
-              <a:t>Inside docker hub there are images of almost all technologies like </a:t>
-            </a:r>
-            <a:r>
-              <a:rPr lang="en-US" sz="1100" b="1" dirty="0" err="1"/>
+              <a:rPr lang="en-US" sz="1600" dirty="0"/>
+              <a:t>Docker was developed in 2013 developed by Solomon Hikes. It’s open-source tool.</a:t>
+            </a:r>
+          </a:p>
+          <a:p>
+            <a:pPr marL="285750" indent="-285750">
+              <a:buFontTx/>
+              <a:buChar char="-"/>
+            </a:pPr>
+            <a:r>
+              <a:rPr lang="en-US" sz="1600" dirty="0"/>
+              <a:t>Actual virtualization is done by “docker engine”</a:t>
+            </a:r>
+          </a:p>
+          <a:p>
+            <a:pPr marL="285750" indent="-285750">
+              <a:buFontTx/>
+              <a:buChar char="-"/>
+            </a:pPr>
+            <a:r>
+              <a:rPr lang="en-US" sz="1600" dirty="0"/>
+              <a:t>Written using “Go” language of google.</a:t>
+            </a:r>
+          </a:p>
+          <a:p>
+            <a:pPr marL="285750" indent="-285750">
+              <a:buFontTx/>
+              <a:buChar char="-"/>
+            </a:pPr>
+            <a:r>
+              <a:rPr lang="en-US" sz="1600" dirty="0"/>
+              <a:t>There are 3 services: IAAS, PAAS, SAAS. Docker is a PAAS since its providing a platform to run application</a:t>
+            </a:r>
+          </a:p>
+          <a:p>
+            <a:pPr marL="285750" indent="-285750">
+              <a:buFontTx/>
+              <a:buChar char="-"/>
+            </a:pPr>
+            <a:r>
+              <a:rPr lang="en-US" sz="1600" dirty="0"/>
+              <a:t>We can build, run &amp; deploy application using docker</a:t>
+            </a:r>
+          </a:p>
+          <a:p>
+            <a:pPr marL="285750" indent="-285750">
+              <a:buFontTx/>
+              <a:buChar char="-"/>
+            </a:pPr>
+            <a:endParaRPr lang="en-US" sz="1600" dirty="0"/>
+          </a:p>
+          <a:p>
+            <a:pPr marL="285750" indent="-285750">
+              <a:buFontTx/>
+              <a:buChar char="-"/>
+            </a:pPr>
+            <a:r>
+              <a:rPr lang="en-US" sz="1600" dirty="0"/>
+              <a:t>What was the problem before?</a:t>
+            </a:r>
+          </a:p>
+          <a:p>
+            <a:pPr marL="285750" indent="-285750">
+              <a:buFontTx/>
+              <a:buChar char="-"/>
+            </a:pPr>
+            <a:r>
+              <a:rPr lang="en-US" sz="1600" dirty="0"/>
+              <a:t>Lets say we have a development, testing and deployment team. When development team creates a program and send it to </a:t>
+            </a:r>
+          </a:p>
+          <a:p>
+            <a:r>
+              <a:rPr lang="en-US" sz="1600" dirty="0"/>
+              <a:t>Testing team to test, Its doesn’t work on their system due to development environment or dependencies not available.</a:t>
+            </a:r>
+          </a:p>
+          <a:p>
+            <a:pPr marL="285750" indent="-285750">
+              <a:buFontTx/>
+              <a:buChar char="-"/>
+            </a:pPr>
+            <a:r>
+              <a:rPr lang="en-US" sz="1600" dirty="0"/>
+              <a:t>Or when we write code in our local system, It works flawlessly but when we deploy it on </a:t>
+            </a:r>
+            <a:r>
+              <a:rPr lang="en-US" sz="1600" dirty="0" err="1"/>
+              <a:t>aws</a:t>
+            </a:r>
+            <a:r>
+              <a:rPr lang="en-US" sz="1600" dirty="0"/>
+              <a:t> or cloud then it fails, it gives</a:t>
+            </a:r>
+          </a:p>
+          <a:p>
+            <a:r>
+              <a:rPr lang="en-US" sz="1600" dirty="0"/>
+              <a:t>“internal server error”</a:t>
+            </a:r>
+          </a:p>
+          <a:p>
+            <a:pPr marL="285750" indent="-285750">
+              <a:buFontTx/>
+              <a:buChar char="-"/>
+            </a:pPr>
+            <a:r>
+              <a:rPr lang="en-US" sz="1600" dirty="0"/>
+              <a:t>Solution was “Virtualization” and actual program which is responsible for virtualization called</a:t>
+            </a:r>
+          </a:p>
+          <a:p>
+            <a:r>
+              <a:rPr lang="en-US" sz="1600" dirty="0"/>
+              <a:t>“hypervisor”</a:t>
+            </a:r>
+          </a:p>
+          <a:p>
+            <a:pPr marL="285750" indent="-285750">
+              <a:buFontTx/>
+              <a:buChar char="-"/>
+            </a:pPr>
+            <a:r>
+              <a:rPr lang="en-US" sz="1600" dirty="0"/>
+              <a:t>We can create multiple VMs by sharing resources using hypervisor and we can create a template</a:t>
+            </a:r>
+          </a:p>
+          <a:p>
+            <a:r>
+              <a:rPr lang="en-US" sz="1600" dirty="0"/>
+              <a:t>Of it and share that template to Testing team and it will work on their system also but the issue</a:t>
+            </a:r>
+          </a:p>
+          <a:p>
+            <a:r>
+              <a:rPr lang="en-US" sz="1600" dirty="0"/>
+              <a:t>with this is that we cant create unlimited VMs since its sharing the resources of the host pc since </a:t>
+            </a:r>
+          </a:p>
+          <a:p>
+            <a:r>
+              <a:rPr lang="en-US" sz="1600" dirty="0"/>
+              <a:t>Resources are fixed and will not be free until VM are shut down.</a:t>
+            </a:r>
+          </a:p>
+          <a:p>
+            <a:pPr marL="285750" indent="-285750">
+              <a:buFontTx/>
+              <a:buChar char="-"/>
+            </a:pPr>
+            <a:r>
+              <a:rPr lang="en-US" sz="1600" dirty="0"/>
+              <a:t>We are installing separate OS in virtualization which takes more memory. Solution to this is</a:t>
+            </a:r>
+          </a:p>
+          <a:p>
+            <a:r>
+              <a:rPr lang="en-US" sz="1600" dirty="0"/>
+              <a:t>“Containerization”, we can use Docker Engine for containerization. In containerization we share </a:t>
+            </a:r>
+          </a:p>
+          <a:p>
+            <a:r>
+              <a:rPr lang="en-US" sz="1600" dirty="0"/>
+              <a:t>Host OS &amp; resources and they are not fixed. Its not directly interacting with hardware.</a:t>
+            </a:r>
+          </a:p>
+          <a:p>
+            <a:pPr marL="285750" indent="-285750">
+              <a:buFontTx/>
+              <a:buChar char="-"/>
+            </a:pPr>
+            <a:r>
+              <a:rPr lang="en-US" sz="1600" dirty="0"/>
+              <a:t>Port Mapping: Lets say we’re running flask on docker which uses 5000 port but we cant access it on host </a:t>
+            </a:r>
+            <a:r>
+              <a:rPr lang="en-US" sz="1600" dirty="0" err="1"/>
               <a:t>os</a:t>
             </a:r>
-            <a:r>
-              <a:rPr lang="en-US" sz="1100" b="1" dirty="0"/>
-              <a:t>, web servers like nginx, </a:t>
-            </a:r>
-            <a:r>
-              <a:rPr lang="en-US" sz="1100" b="1" dirty="0" err="1"/>
-              <a:t>dbs</a:t>
-            </a:r>
-            <a:r>
-              <a:rPr lang="en-US" sz="1100" b="1" dirty="0"/>
-              <a:t> like </a:t>
-            </a:r>
-            <a:r>
-              <a:rPr lang="en-US" sz="1100" b="1" dirty="0" err="1"/>
-              <a:t>sql</a:t>
-            </a:r>
-            <a:r>
-              <a:rPr lang="en-US" sz="1100" b="1" dirty="0"/>
-              <a:t> </a:t>
-            </a:r>
-            <a:r>
-              <a:rPr lang="en-US" sz="1100" b="1" dirty="0" err="1"/>
-              <a:t>etc</a:t>
-            </a:r>
-            <a:endParaRPr lang="en-US" sz="1100" b="1" dirty="0"/>
-          </a:p>
-          <a:p>
-            <a:pPr marL="285750" indent="-285750">
-              <a:buFontTx/>
-              <a:buChar char="-"/>
-            </a:pPr>
-            <a:r>
-              <a:rPr lang="en-US" sz="1100" b="1" dirty="0"/>
-              <a:t>There are 3 ways to  create a image:</a:t>
-            </a:r>
-          </a:p>
-          <a:p>
-            <a:pPr marL="800100" lvl="1" indent="-342900">
-              <a:buAutoNum type="arabicPeriod"/>
-            </a:pPr>
-            <a:r>
-              <a:rPr lang="en-US" sz="1100" b="1" dirty="0"/>
-              <a:t>We can write a docker file and create image</a:t>
-            </a:r>
-          </a:p>
-          <a:p>
-            <a:pPr marL="800100" lvl="1" indent="-342900">
-              <a:buAutoNum type="arabicPeriod"/>
-            </a:pPr>
-            <a:r>
-              <a:rPr lang="en-US" sz="1100" b="1" dirty="0"/>
-              <a:t>We can create image directly from container</a:t>
-            </a:r>
-          </a:p>
-          <a:p>
-            <a:pPr marL="285750" indent="-285750">
-              <a:buFontTx/>
-              <a:buChar char="-"/>
-            </a:pPr>
-            <a:r>
-              <a:rPr lang="en-US" sz="1100" b="1" dirty="0"/>
-              <a:t>Run “docker images” to check all images</a:t>
-            </a:r>
-          </a:p>
-          <a:p>
-            <a:pPr marL="285750" indent="-285750">
-              <a:buFontTx/>
-              <a:buChar char="-"/>
-            </a:pPr>
-            <a:r>
-              <a:rPr lang="en-US" sz="1100" b="1" dirty="0"/>
-              <a:t>Run “docker </a:t>
-            </a:r>
-            <a:r>
-              <a:rPr lang="en-US" sz="1100" b="1" dirty="0" err="1"/>
-              <a:t>ps</a:t>
-            </a:r>
-            <a:r>
-              <a:rPr lang="en-US" sz="1100" b="1" dirty="0"/>
-              <a:t>” to check all running containers</a:t>
-            </a:r>
-          </a:p>
-          <a:p>
-            <a:pPr marL="285750" indent="-285750">
-              <a:buFontTx/>
-              <a:buChar char="-"/>
-            </a:pPr>
-            <a:endParaRPr lang="en-US" sz="1100" b="1" dirty="0"/>
-          </a:p>
-          <a:p>
-            <a:pPr marL="285750" indent="-285750">
-              <a:buFontTx/>
-              <a:buChar char="-"/>
-            </a:pPr>
-            <a:r>
-              <a:rPr lang="en-US" sz="1100" b="1" dirty="0"/>
-              <a:t>Create app.py file for flask and run it on local system</a:t>
-            </a:r>
-          </a:p>
-          <a:p>
-            <a:pPr marL="285750" indent="-285750">
-              <a:buFontTx/>
-              <a:buChar char="-"/>
-            </a:pPr>
-            <a:r>
-              <a:rPr lang="en-US" sz="1100" b="1" dirty="0"/>
-              <a:t>Now we can containerize this app, there 3 ways to create a image</a:t>
-            </a:r>
-          </a:p>
-          <a:p>
-            <a:pPr marL="742950" lvl="1" indent="-285750">
-              <a:buFontTx/>
-              <a:buChar char="-"/>
-            </a:pPr>
-            <a:r>
-              <a:rPr lang="en-US" sz="1100" b="1" dirty="0"/>
-              <a:t>Write a docker file for this app and create a docker image</a:t>
-            </a:r>
-          </a:p>
-          <a:p>
-            <a:pPr marL="742950" lvl="1" indent="-285750">
-              <a:buFontTx/>
-              <a:buChar char="-"/>
-            </a:pPr>
-            <a:r>
-              <a:rPr lang="en-US" sz="1100" b="1" dirty="0"/>
-              <a:t>Run this docker image inside container</a:t>
-            </a:r>
-          </a:p>
-          <a:p>
-            <a:pPr marL="742950" lvl="1" indent="-285750">
-              <a:buFontTx/>
-              <a:buChar char="-"/>
-            </a:pPr>
-            <a:r>
-              <a:rPr lang="en-US" sz="1100" b="1" dirty="0"/>
-              <a:t>By default, Flask runs on 5000 port</a:t>
-            </a:r>
-          </a:p>
-          <a:p>
-            <a:pPr marL="742950" lvl="1" indent="-285750">
-              <a:buFontTx/>
-              <a:buChar char="-"/>
-            </a:pPr>
-            <a:r>
-              <a:rPr lang="en-US" sz="1100" b="1" dirty="0"/>
-              <a:t>To access the flask app on local system which is running inside the container we need to perform port mapping</a:t>
-            </a:r>
-          </a:p>
-          <a:p>
-            <a:pPr lvl="1"/>
-            <a:r>
-              <a:rPr lang="en-US" sz="1100" b="1" dirty="0"/>
-              <a:t>“host port : container port”</a:t>
-            </a:r>
-          </a:p>
-          <a:p>
-            <a:pPr lvl="1"/>
-            <a:endParaRPr lang="en-US" sz="1100" b="1" dirty="0"/>
-          </a:p>
-          <a:p>
-            <a:pPr marL="285750" indent="-285750">
-              <a:buFontTx/>
-              <a:buChar char="-"/>
-            </a:pPr>
-            <a:r>
-              <a:rPr lang="en-US" sz="1100" b="1" dirty="0"/>
-              <a:t>In summary, we need to create a docker file to create a docker image of flask app &amp; run that image inside docker</a:t>
-            </a:r>
-          </a:p>
-          <a:p>
-            <a:r>
-              <a:rPr lang="en-US" sz="1100" b="1" dirty="0"/>
-              <a:t>Container, to access the flask app in local system, we need to perform port mapping</a:t>
-            </a:r>
-          </a:p>
-          <a:p>
-            <a:endParaRPr lang="en-US" sz="1100" b="1" dirty="0"/>
-          </a:p>
-          <a:p>
-            <a:pPr marL="285750" indent="-285750">
-              <a:buFontTx/>
-              <a:buChar char="-"/>
-            </a:pPr>
-            <a:r>
-              <a:rPr lang="en-US" sz="1100" b="1" dirty="0"/>
-              <a:t>In order to create image we have 2 ways:</a:t>
-            </a:r>
-          </a:p>
-          <a:p>
-            <a:r>
-              <a:rPr lang="en-US" sz="1100" b="1" dirty="0"/>
-              <a:t>	1. Create a docker file which contains instructions</a:t>
-            </a:r>
-          </a:p>
-          <a:p>
-            <a:r>
-              <a:rPr lang="en-US" sz="1100" b="1" dirty="0"/>
-              <a:t>	2. Create an image directly using docker commands</a:t>
-            </a:r>
-          </a:p>
-          <a:p>
-            <a:endParaRPr lang="en-US" sz="1100" b="1" dirty="0"/>
-          </a:p>
-          <a:p>
-            <a:pPr marL="171450" indent="-171450">
-              <a:buFontTx/>
-              <a:buChar char="-"/>
-            </a:pPr>
-            <a:r>
-              <a:rPr lang="en-US" sz="1100" b="1" dirty="0"/>
-              <a:t>Write docker file : FROM, COPY, WORKDIR, RUN, CMD</a:t>
-            </a:r>
-          </a:p>
-          <a:p>
-            <a:pPr marL="171450" indent="-171450">
-              <a:buFontTx/>
-              <a:buChar char="-"/>
-            </a:pPr>
-            <a:r>
-              <a:rPr lang="en-US" sz="1100" b="1" dirty="0"/>
-              <a:t>Create docker image using this docker file: “docker build  -t &lt;image name&gt; &lt;.&gt;”</a:t>
-            </a:r>
-          </a:p>
-          <a:p>
-            <a:pPr marL="171450" indent="-171450">
-              <a:buFontTx/>
-              <a:buChar char="-"/>
-            </a:pPr>
-            <a:r>
-              <a:rPr lang="en-US" sz="1100" b="1" dirty="0"/>
-              <a:t>Image name = image name we want to keep &amp; “.” means file is available in the same folder</a:t>
-            </a:r>
-          </a:p>
-          <a:p>
-            <a:pPr marL="171450" indent="-171450">
-              <a:buFontTx/>
-              <a:buChar char="-"/>
-            </a:pPr>
-            <a:r>
-              <a:rPr lang="en-US" sz="1100" b="1" dirty="0"/>
-              <a:t>Once image is created, check it : “docker images” (This is the 1</a:t>
-            </a:r>
-            <a:r>
-              <a:rPr lang="en-US" sz="1100" b="1" baseline="30000" dirty="0"/>
-              <a:t>st</a:t>
-            </a:r>
-            <a:r>
-              <a:rPr lang="en-US" sz="1100" b="1" dirty="0"/>
-              <a:t> way to create an image, 2</a:t>
-            </a:r>
-            <a:r>
-              <a:rPr lang="en-US" sz="1100" b="1" baseline="30000" dirty="0"/>
-              <a:t>nd</a:t>
-            </a:r>
-            <a:r>
-              <a:rPr lang="en-US" sz="1100" b="1" dirty="0"/>
-              <a:t> way is we can convert container to image &amp; share it to next team)</a:t>
-            </a:r>
-          </a:p>
-          <a:p>
-            <a:pPr marL="171450" indent="-171450">
-              <a:buFontTx/>
-              <a:buChar char="-"/>
-            </a:pPr>
-            <a:r>
-              <a:rPr lang="en-US" sz="1100" b="1" dirty="0"/>
-              <a:t>Now we can run this image in container: docker run -d -p &lt;</a:t>
-            </a:r>
-            <a:r>
-              <a:rPr lang="en-US" sz="1100" b="1" dirty="0" err="1"/>
-              <a:t>host_port</a:t>
-            </a:r>
-            <a:r>
-              <a:rPr lang="en-US" sz="1100" b="1" dirty="0"/>
-              <a:t>&gt;:&lt;</a:t>
-            </a:r>
-            <a:r>
-              <a:rPr lang="en-US" sz="1100" b="1" dirty="0" err="1"/>
-              <a:t>container_port</a:t>
-            </a:r>
-            <a:r>
-              <a:rPr lang="en-US" sz="1100" b="1" dirty="0"/>
-              <a:t>&gt; &lt;</a:t>
-            </a:r>
-            <a:r>
-              <a:rPr lang="en-US" sz="1100" b="1" dirty="0" err="1"/>
-              <a:t>image_name</a:t>
-            </a:r>
-            <a:r>
-              <a:rPr lang="en-US" sz="1100" b="1" dirty="0"/>
-              <a:t>&gt;</a:t>
-            </a:r>
-          </a:p>
-          <a:p>
-            <a:pPr marL="171450" indent="-171450">
-              <a:buFontTx/>
-              <a:buChar char="-"/>
-            </a:pPr>
-            <a:r>
-              <a:rPr lang="en-US" sz="1100" b="1" dirty="0"/>
-              <a:t>docker run –d –p 5000:5000 </a:t>
-            </a:r>
-            <a:r>
-              <a:rPr lang="en-US" sz="1100" b="1" dirty="0" err="1"/>
-              <a:t>myhelloapp</a:t>
-            </a:r>
-            <a:endParaRPr lang="en-US" sz="1100" b="1" dirty="0"/>
-          </a:p>
-          <a:p>
-            <a:pPr marL="171450" indent="-171450">
-              <a:buFontTx/>
-              <a:buChar char="-"/>
-            </a:pPr>
-            <a:r>
-              <a:rPr lang="en-US" sz="1100" b="1" dirty="0"/>
-              <a:t>Now check in local browser: </a:t>
-            </a:r>
-            <a:r>
-              <a:rPr lang="en-US" sz="1100" b="1" dirty="0">
-                <a:hlinkClick r:id="rId2"/>
-              </a:rPr>
-              <a:t>http://localhost:5000/</a:t>
-            </a:r>
-            <a:r>
-              <a:rPr lang="en-US" sz="1100" b="1" dirty="0"/>
-              <a:t> this app is running from container</a:t>
-            </a:r>
-          </a:p>
-          <a:p>
-            <a:pPr marL="171450" indent="-171450">
-              <a:buFontTx/>
-              <a:buChar char="-"/>
-            </a:pPr>
-            <a:r>
-              <a:rPr lang="en-US" sz="1100" b="1" dirty="0"/>
-              <a:t>To stop this container and free resources: docker stop &lt;</a:t>
-            </a:r>
-            <a:r>
-              <a:rPr lang="en-US" sz="1100" b="1" dirty="0" err="1"/>
-              <a:t>containerid</a:t>
-            </a:r>
-            <a:r>
-              <a:rPr lang="en-US" sz="1100" b="1" dirty="0"/>
-              <a:t>&gt;</a:t>
-            </a:r>
-          </a:p>
-          <a:p>
-            <a:pPr marL="171450" indent="-171450">
-              <a:buFontTx/>
-              <a:buChar char="-"/>
-            </a:pPr>
-            <a:r>
-              <a:rPr lang="en-US" sz="1100" b="1" dirty="0"/>
-              <a:t>Container is an isolated process</a:t>
+            <a:endParaRPr lang="en-US" sz="1600" dirty="0"/>
+          </a:p>
+          <a:p>
+            <a:r>
+              <a:rPr lang="en-US" sz="1600" dirty="0"/>
+              <a:t>unless its mapped, 5000(host port): 5000(container app port)</a:t>
             </a:r>
           </a:p>
         </p:txBody>
       </p:sp>
       <p:pic>
         <p:nvPicPr>
-          <p:cNvPr id="6" name="Picture 5">
-            <a:extLst>
-              <a:ext uri="{FF2B5EF4-FFF2-40B4-BE49-F238E27FC236}">
-                <a16:creationId xmlns:a16="http://schemas.microsoft.com/office/drawing/2014/main" id="{8F64A991-5A3E-7970-CC55-D8FF54904789}"/>
+          <p:cNvPr id="8" name="Picture 7">
+            <a:extLst>
+              <a:ext uri="{FF2B5EF4-FFF2-40B4-BE49-F238E27FC236}">
+                <a16:creationId xmlns:a16="http://schemas.microsoft.com/office/drawing/2014/main" id="{545888E4-0E68-F522-2766-07FB990A2885}"/>
               </a:ext>
             </a:extLst>
           </p:cNvPr>
@@ -7820,207 +8800,27 @@
           <p:nvPr/>
         </p:nvPicPr>
         <p:blipFill>
-          <a:blip r:embed="rId3"/>
+          <a:blip r:embed="rId2"/>
           <a:stretch>
             <a:fillRect/>
           </a:stretch>
         </p:blipFill>
         <p:spPr>
           <a:xfrm>
-            <a:off x="7348727" y="130111"/>
-            <a:ext cx="4752976" cy="2347913"/>
+            <a:off x="9627945" y="3339840"/>
+            <a:ext cx="2448312" cy="2448312"/>
           </a:xfrm>
           <a:prstGeom prst="rect">
             <a:avLst/>
           </a:prstGeom>
         </p:spPr>
       </p:pic>
-      <p:cxnSp>
-        <p:nvCxnSpPr>
-          <p:cNvPr id="8" name="Straight Arrow Connector 7">
-            <a:extLst>
-              <a:ext uri="{FF2B5EF4-FFF2-40B4-BE49-F238E27FC236}">
-                <a16:creationId xmlns:a16="http://schemas.microsoft.com/office/drawing/2014/main" id="{7239C7E7-365D-70C0-189F-62F08077D83D}"/>
-              </a:ext>
-            </a:extLst>
-          </p:cNvPr>
-          <p:cNvCxnSpPr/>
-          <p:nvPr/>
-        </p:nvCxnSpPr>
-        <p:spPr>
-          <a:xfrm flipV="1">
-            <a:off x="5184648" y="1773936"/>
-            <a:ext cx="2084832" cy="2889504"/>
-          </a:xfrm>
-          <a:prstGeom prst="straightConnector1">
-            <a:avLst/>
-          </a:prstGeom>
-          <a:ln>
-            <a:tailEnd type="triangle"/>
-          </a:ln>
-        </p:spPr>
-        <p:style>
-          <a:lnRef idx="1">
-            <a:schemeClr val="accent1"/>
-          </a:lnRef>
-          <a:fillRef idx="0">
-            <a:schemeClr val="accent1"/>
-          </a:fillRef>
-          <a:effectRef idx="0">
-            <a:schemeClr val="accent1"/>
-          </a:effectRef>
-          <a:fontRef idx="minor">
-            <a:schemeClr val="tx1"/>
-          </a:fontRef>
-        </p:style>
-      </p:cxnSp>
       <p:pic>
         <p:nvPicPr>
-          <p:cNvPr id="10" name="Picture 9">
-            <a:extLst>
-              <a:ext uri="{FF2B5EF4-FFF2-40B4-BE49-F238E27FC236}">
-                <a16:creationId xmlns:a16="http://schemas.microsoft.com/office/drawing/2014/main" id="{8BF727A4-7DBB-AAC7-8C54-4A13D4F35BF0}"/>
-              </a:ext>
-            </a:extLst>
-          </p:cNvPr>
-          <p:cNvPicPr>
-            <a:picLocks noChangeAspect="1"/>
-          </p:cNvPicPr>
-          <p:nvPr/>
-        </p:nvPicPr>
-        <p:blipFill>
-          <a:blip r:embed="rId4"/>
-          <a:stretch>
-            <a:fillRect/>
-          </a:stretch>
-        </p:blipFill>
-        <p:spPr>
-          <a:xfrm>
-            <a:off x="7310613" y="3509773"/>
-            <a:ext cx="4777755" cy="870204"/>
-          </a:xfrm>
-          <a:prstGeom prst="rect">
-            <a:avLst/>
-          </a:prstGeom>
-        </p:spPr>
-      </p:pic>
-      <p:cxnSp>
-        <p:nvCxnSpPr>
-          <p:cNvPr id="12" name="Straight Arrow Connector 11">
-            <a:extLst>
-              <a:ext uri="{FF2B5EF4-FFF2-40B4-BE49-F238E27FC236}">
-                <a16:creationId xmlns:a16="http://schemas.microsoft.com/office/drawing/2014/main" id="{E10D6CAE-4963-3805-FE75-65ABDC7BB991}"/>
-              </a:ext>
-            </a:extLst>
-          </p:cNvPr>
-          <p:cNvCxnSpPr/>
-          <p:nvPr/>
-        </p:nvCxnSpPr>
-        <p:spPr>
-          <a:xfrm flipV="1">
-            <a:off x="3502152" y="4187952"/>
-            <a:ext cx="3767328" cy="868680"/>
-          </a:xfrm>
-          <a:prstGeom prst="straightConnector1">
-            <a:avLst/>
-          </a:prstGeom>
-          <a:ln>
-            <a:tailEnd type="triangle"/>
-          </a:ln>
-        </p:spPr>
-        <p:style>
-          <a:lnRef idx="1">
-            <a:schemeClr val="accent1"/>
-          </a:lnRef>
-          <a:fillRef idx="0">
-            <a:schemeClr val="accent1"/>
-          </a:fillRef>
-          <a:effectRef idx="0">
-            <a:schemeClr val="accent1"/>
-          </a:effectRef>
-          <a:fontRef idx="minor">
-            <a:schemeClr val="tx1"/>
-          </a:fontRef>
-        </p:style>
-      </p:cxnSp>
-      <p:pic>
-        <p:nvPicPr>
-          <p:cNvPr id="14" name="Picture 13">
-            <a:extLst>
-              <a:ext uri="{FF2B5EF4-FFF2-40B4-BE49-F238E27FC236}">
-                <a16:creationId xmlns:a16="http://schemas.microsoft.com/office/drawing/2014/main" id="{B9CCE167-FDDC-AF8E-C676-F476EE30297B}"/>
-              </a:ext>
-            </a:extLst>
-          </p:cNvPr>
-          <p:cNvPicPr>
-            <a:picLocks noChangeAspect="1"/>
-          </p:cNvPicPr>
-          <p:nvPr/>
-        </p:nvPicPr>
-        <p:blipFill>
-          <a:blip r:embed="rId5"/>
-          <a:stretch>
-            <a:fillRect/>
-          </a:stretch>
-        </p:blipFill>
-        <p:spPr>
-          <a:xfrm>
-            <a:off x="6967728" y="5173599"/>
-            <a:ext cx="5079508" cy="1304925"/>
-          </a:xfrm>
-          <a:prstGeom prst="rect">
-            <a:avLst/>
-          </a:prstGeom>
-        </p:spPr>
-      </p:pic>
-      <p:cxnSp>
-        <p:nvCxnSpPr>
-          <p:cNvPr id="16" name="Connector: Elbow 15">
-            <a:extLst>
-              <a:ext uri="{FF2B5EF4-FFF2-40B4-BE49-F238E27FC236}">
-                <a16:creationId xmlns:a16="http://schemas.microsoft.com/office/drawing/2014/main" id="{1308D23C-FCD5-74F6-DFF6-30405E9856F6}"/>
-              </a:ext>
-            </a:extLst>
-          </p:cNvPr>
-          <p:cNvCxnSpPr>
-            <a:cxnSpLocks/>
-            <a:endCxn id="14" idx="1"/>
-          </p:cNvCxnSpPr>
-          <p:nvPr/>
-        </p:nvCxnSpPr>
-        <p:spPr>
-          <a:xfrm rot="16200000" flipH="1">
-            <a:off x="6509861" y="5368195"/>
-            <a:ext cx="623126" cy="292608"/>
-          </a:xfrm>
-          <a:prstGeom prst="bentConnector2">
-            <a:avLst/>
-          </a:prstGeom>
-          <a:ln>
-            <a:tailEnd type="triangle"/>
-          </a:ln>
-        </p:spPr>
-        <p:style>
-          <a:lnRef idx="1">
-            <a:schemeClr val="accent1"/>
-          </a:lnRef>
-          <a:fillRef idx="0">
-            <a:schemeClr val="accent1"/>
-          </a:fillRef>
-          <a:effectRef idx="0">
-            <a:schemeClr val="accent1"/>
-          </a:effectRef>
-          <a:fontRef idx="minor">
-            <a:schemeClr val="tx1"/>
-          </a:fontRef>
-        </p:style>
-      </p:cxnSp>
-      <p:pic>
-        <p:nvPicPr>
-          <p:cNvPr id="20" name="Picture 4" descr="Docker for Developers: Understanding the Core Concepts – Code with Dan Blog">
-            <a:extLst>
-              <a:ext uri="{FF2B5EF4-FFF2-40B4-BE49-F238E27FC236}">
-                <a16:creationId xmlns:a16="http://schemas.microsoft.com/office/drawing/2014/main" id="{5C5FD608-C934-BAEE-9BC3-3C6D140C88C4}"/>
+          <p:cNvPr id="9" name="Picture 4" descr="Docker for Developers: Understanding the Core Concepts – Code with Dan Blog">
+            <a:extLst>
+              <a:ext uri="{FF2B5EF4-FFF2-40B4-BE49-F238E27FC236}">
+                <a16:creationId xmlns:a16="http://schemas.microsoft.com/office/drawing/2014/main" id="{D96A6FB8-47E6-EF09-B392-C4BD24A7FA75}"/>
               </a:ext>
             </a:extLst>
           </p:cNvPr>
@@ -8030,7 +8830,7 @@
           <p:nvPr/>
         </p:nvPicPr>
         <p:blipFill>
-          <a:blip r:embed="rId6">
+          <a:blip r:embed="rId3">
             <a:extLst>
               <a:ext uri="{28A0092B-C50C-407E-A947-70E740481C1C}">
                 <a14:useLocalDpi xmlns:a14="http://schemas.microsoft.com/office/drawing/2010/main" val="0"/>
@@ -8044,7 +8844,7 @@
         </p:blipFill>
         <p:spPr bwMode="auto">
           <a:xfrm>
-            <a:off x="4719635" y="-42553"/>
+            <a:off x="5206253" y="-73319"/>
             <a:ext cx="889747" cy="585550"/>
           </a:xfrm>
           <a:prstGeom prst="rect">
@@ -8065,7 +8865,7 @@
     </p:spTree>
     <p:extLst>
       <p:ext uri="{BB962C8B-B14F-4D97-AF65-F5344CB8AC3E}">
-        <p14:creationId xmlns:p14="http://schemas.microsoft.com/office/powerpoint/2010/main" val="1246518113"/>
+        <p14:creationId xmlns:p14="http://schemas.microsoft.com/office/powerpoint/2010/main" val="698163394"/>
       </p:ext>
     </p:extLst>
   </p:cSld>
@@ -8094,10 +8894,10 @@
       </p:grpSpPr>
       <p:sp>
         <p:nvSpPr>
-          <p:cNvPr id="3" name="TextBox 2">
-            <a:extLst>
-              <a:ext uri="{FF2B5EF4-FFF2-40B4-BE49-F238E27FC236}">
-                <a16:creationId xmlns:a16="http://schemas.microsoft.com/office/drawing/2014/main" id="{BF3ADDA4-2D04-9658-132E-D101E1AEA431}"/>
+          <p:cNvPr id="4" name="TextBox 3">
+            <a:extLst>
+              <a:ext uri="{FF2B5EF4-FFF2-40B4-BE49-F238E27FC236}">
+                <a16:creationId xmlns:a16="http://schemas.microsoft.com/office/drawing/2014/main" id="{4E0E8D03-CF9D-DE5B-CDCF-8AE33D679EE1}"/>
               </a:ext>
             </a:extLst>
           </p:cNvPr>
@@ -8106,8 +8906,8 @@
         </p:nvSpPr>
         <p:spPr>
           <a:xfrm>
-            <a:off x="420624" y="749808"/>
-            <a:ext cx="6723059" cy="3539430"/>
+            <a:off x="365760" y="379476"/>
+            <a:ext cx="9597499" cy="5847755"/>
           </a:xfrm>
           <a:prstGeom prst="rect">
             <a:avLst/>
@@ -8125,9 +8925,13 @@
               <a:buChar char="-"/>
             </a:pPr>
             <a:r>
-              <a:rPr lang="en-US" sz="1400" dirty="0"/>
-              <a:t>How to push the image we created previously to docker hub?</a:t>
-            </a:r>
+              <a:rPr lang="en-US" sz="1100" b="1" dirty="0"/>
+              <a:t>TASK: Create flask app and run it on docker container inside docker image</a:t>
+            </a:r>
+            <a:br>
+              <a:rPr lang="en-US" sz="1100" b="1" dirty="0"/>
+            </a:br>
+            <a:endParaRPr lang="en-US" sz="1100" b="1" dirty="0"/>
           </a:p>
           <a:p>
             <a:pPr marL="285750" indent="-285750">
@@ -8135,17 +8939,38 @@
               <a:buChar char="-"/>
             </a:pPr>
             <a:r>
-              <a:rPr lang="en-US" sz="1400" dirty="0"/>
-              <a:t>Docker is same as </a:t>
-            </a:r>
-            <a:r>
-              <a:rPr lang="en-US" sz="1400" dirty="0" err="1"/>
-              <a:t>github</a:t>
-            </a:r>
-            <a:r>
-              <a:rPr lang="en-US" sz="1400" dirty="0"/>
-              <a:t> where we push our repo</a:t>
-            </a:r>
+              <a:rPr lang="en-US" sz="1100" b="1" dirty="0"/>
+              <a:t>Inside docker hub there are images of almost all technologies like </a:t>
+            </a:r>
+            <a:r>
+              <a:rPr lang="en-US" sz="1100" b="1" dirty="0" err="1"/>
+              <a:t>os</a:t>
+            </a:r>
+            <a:r>
+              <a:rPr lang="en-US" sz="1100" b="1" dirty="0"/>
+              <a:t>, web servers like nginx, </a:t>
+            </a:r>
+            <a:r>
+              <a:rPr lang="en-US" sz="1100" b="1" dirty="0" err="1"/>
+              <a:t>dbs</a:t>
+            </a:r>
+            <a:r>
+              <a:rPr lang="en-US" sz="1100" b="1" dirty="0"/>
+              <a:t> like </a:t>
+            </a:r>
+            <a:r>
+              <a:rPr lang="en-US" sz="1100" b="1" dirty="0" err="1"/>
+              <a:t>sql</a:t>
+            </a:r>
+            <a:r>
+              <a:rPr lang="en-US" sz="1100" b="1" dirty="0"/>
+              <a:t> </a:t>
+            </a:r>
+            <a:r>
+              <a:rPr lang="en-US" sz="1100" b="1" dirty="0" err="1"/>
+              <a:t>etc</a:t>
+            </a:r>
+            <a:endParaRPr lang="en-US" sz="1100" b="1" dirty="0"/>
           </a:p>
           <a:p>
             <a:pPr marL="285750" indent="-285750">
@@ -8153,8 +8978,26 @@
               <a:buChar char="-"/>
             </a:pPr>
             <a:r>
-              <a:rPr lang="en-US" sz="1400" dirty="0"/>
-              <a:t>Login to docker inside terminal: “docker login”</a:t>
+              <a:rPr lang="en-US" sz="1100" b="1" dirty="0"/>
+              <a:t>There are 3 ways to  create a image:</a:t>
+            </a:r>
+          </a:p>
+          <a:p>
+            <a:pPr marL="800100" lvl="1" indent="-342900">
+              <a:buAutoNum type="arabicPeriod"/>
+            </a:pPr>
+            <a:r>
+              <a:rPr lang="en-US" sz="1100" b="1" dirty="0"/>
+              <a:t>We can write a docker file and create image</a:t>
+            </a:r>
+          </a:p>
+          <a:p>
+            <a:pPr marL="800100" lvl="1" indent="-342900">
+              <a:buAutoNum type="arabicPeriod"/>
+            </a:pPr>
+            <a:r>
+              <a:rPr lang="en-US" sz="1100" b="1" dirty="0"/>
+              <a:t>We can create image directly from container</a:t>
             </a:r>
           </a:p>
           <a:p>
@@ -8163,159 +9006,311 @@
               <a:buChar char="-"/>
             </a:pPr>
             <a:r>
-              <a:rPr lang="en-US" sz="1400" dirty="0"/>
-              <a:t>Push the image: “docker tag </a:t>
-            </a:r>
-            <a:r>
-              <a:rPr lang="en-US" sz="1400" dirty="0" err="1"/>
+              <a:rPr lang="en-US" sz="1100" b="1" dirty="0"/>
+              <a:t>Run “docker images” to check all images</a:t>
+            </a:r>
+          </a:p>
+          <a:p>
+            <a:pPr marL="285750" indent="-285750">
+              <a:buFontTx/>
+              <a:buChar char="-"/>
+            </a:pPr>
+            <a:r>
+              <a:rPr lang="en-US" sz="1100" b="1" dirty="0"/>
+              <a:t>Run “docker </a:t>
+            </a:r>
+            <a:r>
+              <a:rPr lang="en-US" sz="1100" b="1" dirty="0" err="1"/>
+              <a:t>ps</a:t>
+            </a:r>
+            <a:r>
+              <a:rPr lang="en-US" sz="1100" b="1" dirty="0"/>
+              <a:t>” to check all running containers</a:t>
+            </a:r>
+          </a:p>
+          <a:p>
+            <a:pPr marL="285750" indent="-285750">
+              <a:buFontTx/>
+              <a:buChar char="-"/>
+            </a:pPr>
+            <a:endParaRPr lang="en-US" sz="1100" b="1" dirty="0"/>
+          </a:p>
+          <a:p>
+            <a:pPr marL="285750" indent="-285750">
+              <a:buFontTx/>
+              <a:buChar char="-"/>
+            </a:pPr>
+            <a:r>
+              <a:rPr lang="en-US" sz="1100" b="1" dirty="0"/>
+              <a:t>Create app.py file for flask and run it on local system</a:t>
+            </a:r>
+          </a:p>
+          <a:p>
+            <a:pPr marL="285750" indent="-285750">
+              <a:buFontTx/>
+              <a:buChar char="-"/>
+            </a:pPr>
+            <a:r>
+              <a:rPr lang="en-US" sz="1100" b="1" dirty="0"/>
+              <a:t>Now we can containerize this app, there 3 ways to create a image</a:t>
+            </a:r>
+          </a:p>
+          <a:p>
+            <a:pPr marL="742950" lvl="1" indent="-285750">
+              <a:buFontTx/>
+              <a:buChar char="-"/>
+            </a:pPr>
+            <a:r>
+              <a:rPr lang="en-US" sz="1100" b="1" dirty="0"/>
+              <a:t>Write a docker file for this app and create a docker image</a:t>
+            </a:r>
+          </a:p>
+          <a:p>
+            <a:pPr marL="742950" lvl="1" indent="-285750">
+              <a:buFontTx/>
+              <a:buChar char="-"/>
+            </a:pPr>
+            <a:r>
+              <a:rPr lang="en-US" sz="1100" b="1" dirty="0"/>
+              <a:t>Run this docker image inside container</a:t>
+            </a:r>
+          </a:p>
+          <a:p>
+            <a:pPr marL="742950" lvl="1" indent="-285750">
+              <a:buFontTx/>
+              <a:buChar char="-"/>
+            </a:pPr>
+            <a:r>
+              <a:rPr lang="en-US" sz="1100" b="1" dirty="0"/>
+              <a:t>By default, Flask runs on 5000 port</a:t>
+            </a:r>
+          </a:p>
+          <a:p>
+            <a:pPr marL="742950" lvl="1" indent="-285750">
+              <a:buFontTx/>
+              <a:buChar char="-"/>
+            </a:pPr>
+            <a:r>
+              <a:rPr lang="en-US" sz="1100" b="1" dirty="0"/>
+              <a:t>To access the flask app on local system which is running inside the container we need to perform port mapping</a:t>
+            </a:r>
+          </a:p>
+          <a:p>
+            <a:pPr lvl="1"/>
+            <a:r>
+              <a:rPr lang="en-US" sz="1100" b="1" dirty="0"/>
+              <a:t>“host port : container port”</a:t>
+            </a:r>
+          </a:p>
+          <a:p>
+            <a:pPr lvl="1"/>
+            <a:endParaRPr lang="en-US" sz="1100" b="1" dirty="0"/>
+          </a:p>
+          <a:p>
+            <a:pPr marL="285750" indent="-285750">
+              <a:buFontTx/>
+              <a:buChar char="-"/>
+            </a:pPr>
+            <a:r>
+              <a:rPr lang="en-US" sz="1100" b="1" dirty="0"/>
+              <a:t>In summary, we need to create a docker file to create a docker image of flask app &amp; run that image inside docker</a:t>
+            </a:r>
+          </a:p>
+          <a:p>
+            <a:r>
+              <a:rPr lang="en-US" sz="1100" b="1" dirty="0"/>
+              <a:t>Container, to access the flask app in local system, we need to perform port mapping</a:t>
+            </a:r>
+          </a:p>
+          <a:p>
+            <a:endParaRPr lang="en-US" sz="1100" b="1" dirty="0"/>
+          </a:p>
+          <a:p>
+            <a:pPr marL="285750" indent="-285750">
+              <a:buFontTx/>
+              <a:buChar char="-"/>
+            </a:pPr>
+            <a:r>
+              <a:rPr lang="en-US" sz="1100" b="1" dirty="0"/>
+              <a:t>In order to create image we have 2 ways:</a:t>
+            </a:r>
+          </a:p>
+          <a:p>
+            <a:r>
+              <a:rPr lang="en-US" sz="1100" b="1" dirty="0"/>
+              <a:t>	1. Create a docker file which contains instructions</a:t>
+            </a:r>
+          </a:p>
+          <a:p>
+            <a:r>
+              <a:rPr lang="en-US" sz="1100" b="1" dirty="0"/>
+              <a:t>	2. Create an image directly using docker commands</a:t>
+            </a:r>
+          </a:p>
+          <a:p>
+            <a:endParaRPr lang="en-US" sz="1100" b="1" dirty="0"/>
+          </a:p>
+          <a:p>
+            <a:pPr marL="171450" indent="-171450">
+              <a:buFontTx/>
+              <a:buChar char="-"/>
+            </a:pPr>
+            <a:r>
+              <a:rPr lang="en-US" sz="1100" b="1" dirty="0"/>
+              <a:t>Write docker file : FROM, COPY, WORKDIR, RUN, CMD</a:t>
+            </a:r>
+          </a:p>
+          <a:p>
+            <a:pPr marL="171450" indent="-171450">
+              <a:buFontTx/>
+              <a:buChar char="-"/>
+            </a:pPr>
+            <a:r>
+              <a:rPr lang="en-US" sz="1100" b="1" dirty="0"/>
+              <a:t>Create docker image using this docker file: “docker build  -t &lt;image name&gt; &lt;.&gt;”</a:t>
+            </a:r>
+          </a:p>
+          <a:p>
+            <a:pPr marL="171450" indent="-171450">
+              <a:buFontTx/>
+              <a:buChar char="-"/>
+            </a:pPr>
+            <a:r>
+              <a:rPr lang="en-US" sz="1100" b="1" dirty="0"/>
+              <a:t>Image name = image name we want to keep &amp; “.” means file is available in the same folder</a:t>
+            </a:r>
+          </a:p>
+          <a:p>
+            <a:pPr marL="171450" indent="-171450">
+              <a:buFontTx/>
+              <a:buChar char="-"/>
+            </a:pPr>
+            <a:r>
+              <a:rPr lang="en-US" sz="1100" b="1" dirty="0"/>
+              <a:t>Once image is created, check it : “docker images” (This is the 1</a:t>
+            </a:r>
+            <a:r>
+              <a:rPr lang="en-US" sz="1100" b="1" baseline="30000" dirty="0"/>
+              <a:t>st</a:t>
+            </a:r>
+            <a:r>
+              <a:rPr lang="en-US" sz="1100" b="1" dirty="0"/>
+              <a:t> way to create an image, 2</a:t>
+            </a:r>
+            <a:r>
+              <a:rPr lang="en-US" sz="1100" b="1" baseline="30000" dirty="0"/>
+              <a:t>nd</a:t>
+            </a:r>
+            <a:r>
+              <a:rPr lang="en-US" sz="1100" b="1" dirty="0"/>
+              <a:t> way is we can convert container to image &amp; share it to next team)</a:t>
+            </a:r>
+          </a:p>
+          <a:p>
+            <a:pPr marL="171450" indent="-171450">
+              <a:buFontTx/>
+              <a:buChar char="-"/>
+            </a:pPr>
+            <a:r>
+              <a:rPr lang="en-US" sz="1100" b="1" dirty="0"/>
+              <a:t>Now we can run this image in container: docker run -d -p &lt;</a:t>
+            </a:r>
+            <a:r>
+              <a:rPr lang="en-US" sz="1100" b="1" dirty="0" err="1"/>
+              <a:t>host_port</a:t>
+            </a:r>
+            <a:r>
+              <a:rPr lang="en-US" sz="1100" b="1" dirty="0"/>
+              <a:t>&gt;:&lt;</a:t>
+            </a:r>
+            <a:r>
+              <a:rPr lang="en-US" sz="1100" b="1" dirty="0" err="1"/>
+              <a:t>container_port</a:t>
+            </a:r>
+            <a:r>
+              <a:rPr lang="en-US" sz="1100" b="1" dirty="0"/>
+              <a:t>&gt; &lt;</a:t>
+            </a:r>
+            <a:r>
+              <a:rPr lang="en-US" sz="1100" b="1" dirty="0" err="1"/>
+              <a:t>image_name</a:t>
+            </a:r>
+            <a:r>
+              <a:rPr lang="en-US" sz="1100" b="1" dirty="0"/>
+              <a:t>&gt;</a:t>
+            </a:r>
+          </a:p>
+          <a:p>
+            <a:pPr marL="171450" indent="-171450">
+              <a:buFontTx/>
+              <a:buChar char="-"/>
+            </a:pPr>
+            <a:r>
+              <a:rPr lang="en-US" sz="1100" b="1" dirty="0"/>
+              <a:t>docker run –d –p 5000:5000 </a:t>
+            </a:r>
+            <a:r>
+              <a:rPr lang="en-US" sz="1100" b="1" dirty="0" err="1"/>
               <a:t>myhelloapp</a:t>
             </a:r>
-            <a:r>
-              <a:rPr lang="en-US" sz="1400" dirty="0"/>
-              <a:t> iamprashantjain2601/</a:t>
-            </a:r>
-            <a:r>
-              <a:rPr lang="en-US" sz="1400" dirty="0" err="1"/>
-              <a:t>projecthelloappdemo</a:t>
-            </a:r>
-            <a:r>
-              <a:rPr lang="en-US" sz="1400" dirty="0"/>
-              <a:t>”</a:t>
-            </a:r>
-          </a:p>
-          <a:p>
-            <a:pPr marL="285750" indent="-285750">
-              <a:buFontTx/>
-              <a:buChar char="-"/>
-            </a:pPr>
-            <a:endParaRPr lang="en-US" sz="1400" dirty="0"/>
-          </a:p>
-          <a:p>
-            <a:pPr marL="285750" indent="-285750">
-              <a:buFontTx/>
-              <a:buChar char="-"/>
-            </a:pPr>
-            <a:endParaRPr lang="en-US" sz="1400" dirty="0"/>
-          </a:p>
-          <a:p>
-            <a:pPr marL="285750" indent="-285750">
-              <a:buFontTx/>
-              <a:buChar char="-"/>
-            </a:pPr>
-            <a:endParaRPr lang="en-US" sz="1400" dirty="0"/>
-          </a:p>
-          <a:p>
-            <a:pPr marL="285750" indent="-285750">
-              <a:buFontTx/>
-              <a:buChar char="-"/>
-            </a:pPr>
-            <a:endParaRPr lang="en-US" sz="1400" dirty="0"/>
-          </a:p>
-          <a:p>
-            <a:pPr marL="285750" indent="-285750">
-              <a:buFontTx/>
-              <a:buChar char="-"/>
-            </a:pPr>
-            <a:endParaRPr lang="en-US" sz="1400" dirty="0"/>
-          </a:p>
-          <a:p>
-            <a:pPr marL="285750" indent="-285750">
-              <a:buFontTx/>
-              <a:buChar char="-"/>
-            </a:pPr>
-            <a:endParaRPr lang="en-US" sz="1400" dirty="0"/>
-          </a:p>
-          <a:p>
-            <a:pPr marL="285750" indent="-285750">
-              <a:buFontTx/>
-              <a:buChar char="-"/>
-            </a:pPr>
-            <a:endParaRPr lang="en-US" sz="1400" dirty="0"/>
-          </a:p>
-          <a:p>
-            <a:pPr marL="285750" indent="-285750">
-              <a:buFontTx/>
-              <a:buChar char="-"/>
-            </a:pPr>
-            <a:endParaRPr lang="en-US" sz="1400" dirty="0"/>
-          </a:p>
-          <a:p>
-            <a:pPr marL="285750" indent="-285750">
-              <a:buFontTx/>
-              <a:buChar char="-"/>
-            </a:pPr>
-            <a:endParaRPr lang="en-US" sz="1400" dirty="0"/>
-          </a:p>
-          <a:p>
-            <a:pPr marL="285750" indent="-285750">
-              <a:buFontTx/>
-              <a:buChar char="-"/>
-            </a:pPr>
-            <a:endParaRPr lang="en-US" sz="1400" dirty="0"/>
-          </a:p>
-          <a:p>
-            <a:pPr marL="285750" indent="-285750">
-              <a:buFontTx/>
-              <a:buChar char="-"/>
-            </a:pPr>
-            <a:r>
-              <a:rPr lang="en-US" sz="1400" dirty="0"/>
-              <a:t>To push: “docker push &lt;username&gt;/&lt;</a:t>
-            </a:r>
-            <a:r>
-              <a:rPr lang="en-US" sz="1400" dirty="0" err="1"/>
-              <a:t>repo_name</a:t>
-            </a:r>
-            <a:r>
-              <a:rPr lang="en-US" sz="1400" dirty="0"/>
-              <a:t>&gt;”</a:t>
-            </a:r>
-          </a:p>
-          <a:p>
-            <a:pPr marL="285750" indent="-285750">
-              <a:buFontTx/>
-              <a:buChar char="-"/>
-            </a:pPr>
-            <a:endParaRPr lang="en-US" sz="1400" dirty="0"/>
+            <a:endParaRPr lang="en-US" sz="1100" b="1" dirty="0"/>
+          </a:p>
+          <a:p>
+            <a:pPr marL="171450" indent="-171450">
+              <a:buFontTx/>
+              <a:buChar char="-"/>
+            </a:pPr>
+            <a:r>
+              <a:rPr lang="en-US" sz="1100" b="1" dirty="0"/>
+              <a:t>Now check in local browser: </a:t>
+            </a:r>
+            <a:r>
+              <a:rPr lang="en-US" sz="1100" b="1" dirty="0">
+                <a:hlinkClick r:id="rId2"/>
+              </a:rPr>
+              <a:t>http://localhost:5000/</a:t>
+            </a:r>
+            <a:r>
+              <a:rPr lang="en-US" sz="1100" b="1" dirty="0"/>
+              <a:t> this app is running from container</a:t>
+            </a:r>
+          </a:p>
+          <a:p>
+            <a:pPr marL="171450" indent="-171450">
+              <a:buFontTx/>
+              <a:buChar char="-"/>
+            </a:pPr>
+            <a:r>
+              <a:rPr lang="en-US" sz="1100" b="1" dirty="0"/>
+              <a:t>To stop this container and free resources: docker stop &lt;</a:t>
+            </a:r>
+            <a:r>
+              <a:rPr lang="en-US" sz="1100" b="1" dirty="0" err="1"/>
+              <a:t>containerid</a:t>
+            </a:r>
+            <a:r>
+              <a:rPr lang="en-US" sz="1100" b="1" dirty="0"/>
+              <a:t>&gt;</a:t>
+            </a:r>
+          </a:p>
+          <a:p>
+            <a:pPr marL="171450" indent="-171450">
+              <a:buFontTx/>
+              <a:buChar char="-"/>
+            </a:pPr>
+            <a:r>
+              <a:rPr lang="en-US" sz="1100" b="1" dirty="0"/>
+              <a:t>Container is an isolated process</a:t>
+            </a:r>
           </a:p>
         </p:txBody>
       </p:sp>
       <p:pic>
         <p:nvPicPr>
-          <p:cNvPr id="5" name="Picture 4">
-            <a:extLst>
-              <a:ext uri="{FF2B5EF4-FFF2-40B4-BE49-F238E27FC236}">
-                <a16:creationId xmlns:a16="http://schemas.microsoft.com/office/drawing/2014/main" id="{8873BB9F-4E30-8867-EE7B-9D4165173763}"/>
-              </a:ext>
-            </a:extLst>
-          </p:cNvPr>
-          <p:cNvPicPr>
-            <a:picLocks noChangeAspect="1"/>
-          </p:cNvPicPr>
-          <p:nvPr/>
-        </p:nvPicPr>
-        <p:blipFill>
-          <a:blip r:embed="rId2"/>
-          <a:stretch>
-            <a:fillRect/>
-          </a:stretch>
-        </p:blipFill>
-        <p:spPr>
-          <a:xfrm>
-            <a:off x="816102" y="1685734"/>
-            <a:ext cx="7048500" cy="1895475"/>
-          </a:xfrm>
-          <a:prstGeom prst="rect">
-            <a:avLst/>
-          </a:prstGeom>
-        </p:spPr>
-      </p:pic>
-      <p:pic>
-        <p:nvPicPr>
-          <p:cNvPr id="7" name="Picture 6">
-            <a:extLst>
-              <a:ext uri="{FF2B5EF4-FFF2-40B4-BE49-F238E27FC236}">
-                <a16:creationId xmlns:a16="http://schemas.microsoft.com/office/drawing/2014/main" id="{A5EED22F-EC51-B6F8-72AE-E1D1C9B303AC}"/>
+          <p:cNvPr id="6" name="Picture 5">
+            <a:extLst>
+              <a:ext uri="{FF2B5EF4-FFF2-40B4-BE49-F238E27FC236}">
+                <a16:creationId xmlns:a16="http://schemas.microsoft.com/office/drawing/2014/main" id="{8F64A991-5A3E-7970-CC55-D8FF54904789}"/>
               </a:ext>
             </a:extLst>
           </p:cNvPr>
@@ -8332,20 +9327,200 @@
         </p:blipFill>
         <p:spPr>
           <a:xfrm>
-            <a:off x="816102" y="4043743"/>
-            <a:ext cx="9077325" cy="2754821"/>
+            <a:off x="7348727" y="130111"/>
+            <a:ext cx="4752976" cy="2347913"/>
           </a:xfrm>
           <a:prstGeom prst="rect">
             <a:avLst/>
           </a:prstGeom>
         </p:spPr>
       </p:pic>
+      <p:cxnSp>
+        <p:nvCxnSpPr>
+          <p:cNvPr id="8" name="Straight Arrow Connector 7">
+            <a:extLst>
+              <a:ext uri="{FF2B5EF4-FFF2-40B4-BE49-F238E27FC236}">
+                <a16:creationId xmlns:a16="http://schemas.microsoft.com/office/drawing/2014/main" id="{7239C7E7-365D-70C0-189F-62F08077D83D}"/>
+              </a:ext>
+            </a:extLst>
+          </p:cNvPr>
+          <p:cNvCxnSpPr/>
+          <p:nvPr/>
+        </p:nvCxnSpPr>
+        <p:spPr>
+          <a:xfrm flipV="1">
+            <a:off x="5184648" y="1773936"/>
+            <a:ext cx="2084832" cy="2889504"/>
+          </a:xfrm>
+          <a:prstGeom prst="straightConnector1">
+            <a:avLst/>
+          </a:prstGeom>
+          <a:ln>
+            <a:tailEnd type="triangle"/>
+          </a:ln>
+        </p:spPr>
+        <p:style>
+          <a:lnRef idx="1">
+            <a:schemeClr val="accent1"/>
+          </a:lnRef>
+          <a:fillRef idx="0">
+            <a:schemeClr val="accent1"/>
+          </a:fillRef>
+          <a:effectRef idx="0">
+            <a:schemeClr val="accent1"/>
+          </a:effectRef>
+          <a:fontRef idx="minor">
+            <a:schemeClr val="tx1"/>
+          </a:fontRef>
+        </p:style>
+      </p:cxnSp>
       <p:pic>
         <p:nvPicPr>
-          <p:cNvPr id="8" name="Picture 4" descr="Docker for Developers: Understanding the Core Concepts – Code with Dan Blog">
-            <a:extLst>
-              <a:ext uri="{FF2B5EF4-FFF2-40B4-BE49-F238E27FC236}">
-                <a16:creationId xmlns:a16="http://schemas.microsoft.com/office/drawing/2014/main" id="{751EA208-EC8C-EE5E-F39E-D315B22084BA}"/>
+          <p:cNvPr id="10" name="Picture 9">
+            <a:extLst>
+              <a:ext uri="{FF2B5EF4-FFF2-40B4-BE49-F238E27FC236}">
+                <a16:creationId xmlns:a16="http://schemas.microsoft.com/office/drawing/2014/main" id="{8BF727A4-7DBB-AAC7-8C54-4A13D4F35BF0}"/>
+              </a:ext>
+            </a:extLst>
+          </p:cNvPr>
+          <p:cNvPicPr>
+            <a:picLocks noChangeAspect="1"/>
+          </p:cNvPicPr>
+          <p:nvPr/>
+        </p:nvPicPr>
+        <p:blipFill>
+          <a:blip r:embed="rId4"/>
+          <a:stretch>
+            <a:fillRect/>
+          </a:stretch>
+        </p:blipFill>
+        <p:spPr>
+          <a:xfrm>
+            <a:off x="7310613" y="3509773"/>
+            <a:ext cx="4777755" cy="870204"/>
+          </a:xfrm>
+          <a:prstGeom prst="rect">
+            <a:avLst/>
+          </a:prstGeom>
+        </p:spPr>
+      </p:pic>
+      <p:cxnSp>
+        <p:nvCxnSpPr>
+          <p:cNvPr id="12" name="Straight Arrow Connector 11">
+            <a:extLst>
+              <a:ext uri="{FF2B5EF4-FFF2-40B4-BE49-F238E27FC236}">
+                <a16:creationId xmlns:a16="http://schemas.microsoft.com/office/drawing/2014/main" id="{E10D6CAE-4963-3805-FE75-65ABDC7BB991}"/>
+              </a:ext>
+            </a:extLst>
+          </p:cNvPr>
+          <p:cNvCxnSpPr/>
+          <p:nvPr/>
+        </p:nvCxnSpPr>
+        <p:spPr>
+          <a:xfrm flipV="1">
+            <a:off x="3502152" y="4187952"/>
+            <a:ext cx="3767328" cy="868680"/>
+          </a:xfrm>
+          <a:prstGeom prst="straightConnector1">
+            <a:avLst/>
+          </a:prstGeom>
+          <a:ln>
+            <a:tailEnd type="triangle"/>
+          </a:ln>
+        </p:spPr>
+        <p:style>
+          <a:lnRef idx="1">
+            <a:schemeClr val="accent1"/>
+          </a:lnRef>
+          <a:fillRef idx="0">
+            <a:schemeClr val="accent1"/>
+          </a:fillRef>
+          <a:effectRef idx="0">
+            <a:schemeClr val="accent1"/>
+          </a:effectRef>
+          <a:fontRef idx="minor">
+            <a:schemeClr val="tx1"/>
+          </a:fontRef>
+        </p:style>
+      </p:cxnSp>
+      <p:pic>
+        <p:nvPicPr>
+          <p:cNvPr id="14" name="Picture 13">
+            <a:extLst>
+              <a:ext uri="{FF2B5EF4-FFF2-40B4-BE49-F238E27FC236}">
+                <a16:creationId xmlns:a16="http://schemas.microsoft.com/office/drawing/2014/main" id="{B9CCE167-FDDC-AF8E-C676-F476EE30297B}"/>
+              </a:ext>
+            </a:extLst>
+          </p:cNvPr>
+          <p:cNvPicPr>
+            <a:picLocks noChangeAspect="1"/>
+          </p:cNvPicPr>
+          <p:nvPr/>
+        </p:nvPicPr>
+        <p:blipFill>
+          <a:blip r:embed="rId5"/>
+          <a:stretch>
+            <a:fillRect/>
+          </a:stretch>
+        </p:blipFill>
+        <p:spPr>
+          <a:xfrm>
+            <a:off x="6967728" y="5173599"/>
+            <a:ext cx="5079508" cy="1304925"/>
+          </a:xfrm>
+          <a:prstGeom prst="rect">
+            <a:avLst/>
+          </a:prstGeom>
+        </p:spPr>
+      </p:pic>
+      <p:cxnSp>
+        <p:nvCxnSpPr>
+          <p:cNvPr id="16" name="Connector: Elbow 15">
+            <a:extLst>
+              <a:ext uri="{FF2B5EF4-FFF2-40B4-BE49-F238E27FC236}">
+                <a16:creationId xmlns:a16="http://schemas.microsoft.com/office/drawing/2014/main" id="{1308D23C-FCD5-74F6-DFF6-30405E9856F6}"/>
+              </a:ext>
+            </a:extLst>
+          </p:cNvPr>
+          <p:cNvCxnSpPr>
+            <a:cxnSpLocks/>
+            <a:endCxn id="14" idx="1"/>
+          </p:cNvCxnSpPr>
+          <p:nvPr/>
+        </p:nvCxnSpPr>
+        <p:spPr>
+          <a:xfrm rot="16200000" flipH="1">
+            <a:off x="6509861" y="5368195"/>
+            <a:ext cx="623126" cy="292608"/>
+          </a:xfrm>
+          <a:prstGeom prst="bentConnector2">
+            <a:avLst/>
+          </a:prstGeom>
+          <a:ln>
+            <a:tailEnd type="triangle"/>
+          </a:ln>
+        </p:spPr>
+        <p:style>
+          <a:lnRef idx="1">
+            <a:schemeClr val="accent1"/>
+          </a:lnRef>
+          <a:fillRef idx="0">
+            <a:schemeClr val="accent1"/>
+          </a:fillRef>
+          <a:effectRef idx="0">
+            <a:schemeClr val="accent1"/>
+          </a:effectRef>
+          <a:fontRef idx="minor">
+            <a:schemeClr val="tx1"/>
+          </a:fontRef>
+        </p:style>
+      </p:cxnSp>
+      <p:pic>
+        <p:nvPicPr>
+          <p:cNvPr id="20" name="Picture 4" descr="Docker for Developers: Understanding the Core Concepts – Code with Dan Blog">
+            <a:extLst>
+              <a:ext uri="{FF2B5EF4-FFF2-40B4-BE49-F238E27FC236}">
+                <a16:creationId xmlns:a16="http://schemas.microsoft.com/office/drawing/2014/main" id="{5C5FD608-C934-BAEE-9BC3-3C6D140C88C4}"/>
               </a:ext>
             </a:extLst>
           </p:cNvPr>
@@ -8355,7 +9530,7 @@
           <p:nvPr/>
         </p:nvPicPr>
         <p:blipFill>
-          <a:blip r:embed="rId4">
+          <a:blip r:embed="rId6">
             <a:extLst>
               <a:ext uri="{28A0092B-C50C-407E-A947-70E740481C1C}">
                 <a14:useLocalDpi xmlns:a14="http://schemas.microsoft.com/office/drawing/2010/main" val="0"/>
@@ -8369,7 +9544,7 @@
         </p:blipFill>
         <p:spPr bwMode="auto">
           <a:xfrm>
-            <a:off x="4909890" y="-10930"/>
+            <a:off x="4719635" y="-42553"/>
             <a:ext cx="889747" cy="585550"/>
           </a:xfrm>
           <a:prstGeom prst="rect">
@@ -8390,7 +9565,7 @@
     </p:spTree>
     <p:extLst>
       <p:ext uri="{BB962C8B-B14F-4D97-AF65-F5344CB8AC3E}">
-        <p14:creationId xmlns:p14="http://schemas.microsoft.com/office/powerpoint/2010/main" val="1402613706"/>
+        <p14:creationId xmlns:p14="http://schemas.microsoft.com/office/powerpoint/2010/main" val="1246518113"/>
       </p:ext>
     </p:extLst>
   </p:cSld>
@@ -8419,10 +9594,10 @@
       </p:grpSpPr>
       <p:sp>
         <p:nvSpPr>
-          <p:cNvPr id="5" name="TextBox 4">
-            <a:extLst>
-              <a:ext uri="{FF2B5EF4-FFF2-40B4-BE49-F238E27FC236}">
-                <a16:creationId xmlns:a16="http://schemas.microsoft.com/office/drawing/2014/main" id="{8F8D8FE7-FE56-A402-6344-F244C2C0EBB2}"/>
+          <p:cNvPr id="3" name="TextBox 2">
+            <a:extLst>
+              <a:ext uri="{FF2B5EF4-FFF2-40B4-BE49-F238E27FC236}">
+                <a16:creationId xmlns:a16="http://schemas.microsoft.com/office/drawing/2014/main" id="{BF3ADDA4-2D04-9658-132E-D101E1AEA431}"/>
               </a:ext>
             </a:extLst>
           </p:cNvPr>
@@ -8431,8 +9606,8 @@
         </p:nvSpPr>
         <p:spPr>
           <a:xfrm>
-            <a:off x="740664" y="832104"/>
-            <a:ext cx="8107028" cy="5078313"/>
+            <a:off x="420624" y="749808"/>
+            <a:ext cx="6723059" cy="3539430"/>
           </a:xfrm>
           <a:prstGeom prst="rect">
             <a:avLst/>
@@ -8450,14 +9625,27 @@
               <a:buChar char="-"/>
             </a:pPr>
             <a:r>
-              <a:rPr lang="en-US" sz="1200" dirty="0"/>
-              <a:t>After it pushed to docker hub, anyone can use it by pulling it same as we push &amp; pull in </a:t>
-            </a:r>
-            <a:r>
-              <a:rPr lang="en-US" sz="1200" dirty="0" err="1"/>
+              <a:rPr lang="en-US" sz="1400" dirty="0"/>
+              <a:t>How to push the image we created previously to docker hub?</a:t>
+            </a:r>
+          </a:p>
+          <a:p>
+            <a:pPr marL="285750" indent="-285750">
+              <a:buFontTx/>
+              <a:buChar char="-"/>
+            </a:pPr>
+            <a:r>
+              <a:rPr lang="en-US" sz="1400" dirty="0"/>
+              <a:t>Docker is same as </a:t>
+            </a:r>
+            <a:r>
+              <a:rPr lang="en-US" sz="1400" dirty="0" err="1"/>
               <a:t>github</a:t>
             </a:r>
-            <a:endParaRPr lang="en-US" sz="1200" dirty="0"/>
+            <a:r>
+              <a:rPr lang="en-US" sz="1400" dirty="0"/>
+              <a:t> where we push our repo</a:t>
+            </a:r>
           </a:p>
           <a:p>
             <a:pPr marL="285750" indent="-285750">
@@ -8465,15 +9653,33 @@
               <a:buChar char="-"/>
             </a:pPr>
             <a:r>
-              <a:rPr lang="en-US" sz="1200" dirty="0"/>
-              <a:t>“docker pull iamprashantjain2601/</a:t>
-            </a:r>
-            <a:r>
-              <a:rPr lang="en-US" sz="1200" dirty="0" err="1"/>
+              <a:rPr lang="en-US" sz="1400" dirty="0"/>
+              <a:t>Login to docker inside terminal: “docker login”</a:t>
+            </a:r>
+          </a:p>
+          <a:p>
+            <a:pPr marL="285750" indent="-285750">
+              <a:buFontTx/>
+              <a:buChar char="-"/>
+            </a:pPr>
+            <a:r>
+              <a:rPr lang="en-US" sz="1400" dirty="0"/>
+              <a:t>Push the image: “docker tag </a:t>
+            </a:r>
+            <a:r>
+              <a:rPr lang="en-US" sz="1400" dirty="0" err="1"/>
+              <a:t>myhelloapp</a:t>
+            </a:r>
+            <a:r>
+              <a:rPr lang="en-US" sz="1400" dirty="0"/>
+              <a:t> iamprashantjain2601/</a:t>
+            </a:r>
+            <a:r>
+              <a:rPr lang="en-US" sz="1400" dirty="0" err="1"/>
               <a:t>projecthelloappdemo</a:t>
             </a:r>
             <a:r>
-              <a:rPr lang="en-US" sz="1200" dirty="0"/>
+              <a:rPr lang="en-US" sz="1400" dirty="0"/>
               <a:t>”</a:t>
             </a:r>
           </a:p>
@@ -8482,266 +9688,104 @@
               <a:buFontTx/>
               <a:buChar char="-"/>
             </a:pPr>
-            <a:r>
-              <a:rPr lang="en-US" sz="1200" dirty="0"/>
-              <a:t>We have various ways to create docker images</a:t>
-            </a:r>
-          </a:p>
-          <a:p>
-            <a:r>
-              <a:rPr lang="en-US" sz="1200" dirty="0"/>
-              <a:t>	1. docker file</a:t>
-            </a:r>
-          </a:p>
-          <a:p>
-            <a:r>
-              <a:rPr lang="en-US" sz="1200" dirty="0"/>
-              <a:t>	2. pull image from docker hub &amp; run inside container</a:t>
-            </a:r>
-          </a:p>
-          <a:p>
-            <a:r>
-              <a:rPr lang="en-US" sz="1200" dirty="0"/>
-              <a:t>	3. create image from docker container</a:t>
-            </a:r>
-          </a:p>
-          <a:p>
-            <a:endParaRPr lang="en-US" sz="1200" dirty="0"/>
-          </a:p>
-          <a:p>
-            <a:r>
-              <a:rPr lang="en-US" sz="1200" dirty="0"/>
-              <a:t>-      </a:t>
-            </a:r>
-            <a:r>
-              <a:rPr lang="en-US" sz="1200" b="1" dirty="0">
-                <a:solidFill>
-                  <a:srgbClr val="FF0000"/>
-                </a:solidFill>
-              </a:rPr>
-              <a:t>How to pull the image and run inside container?</a:t>
-            </a:r>
-          </a:p>
-          <a:p>
-            <a:r>
-              <a:rPr lang="en-US" sz="1200" dirty="0"/>
-              <a:t>-      There is a component inside docker “docker engine”</a:t>
-            </a:r>
+            <a:endParaRPr lang="en-US" sz="1400" dirty="0"/>
           </a:p>
           <a:p>
             <a:pPr marL="285750" indent="-285750">
               <a:buFontTx/>
               <a:buChar char="-"/>
             </a:pPr>
-            <a:r>
-              <a:rPr lang="en-US" sz="1200" dirty="0"/>
-              <a:t>If we run the image 1</a:t>
-            </a:r>
-            <a:r>
-              <a:rPr lang="en-US" sz="1200" baseline="30000" dirty="0"/>
-              <a:t>st</a:t>
-            </a:r>
-            <a:r>
-              <a:rPr lang="en-US" sz="1200" dirty="0"/>
-              <a:t> time, it will find that image in local system, if its not found then it will fetch from </a:t>
-            </a:r>
-            <a:r>
-              <a:rPr lang="en-US" sz="1200" dirty="0" err="1"/>
-              <a:t>dockerhub</a:t>
-            </a:r>
-            <a:endParaRPr lang="en-US" sz="1200" dirty="0"/>
+            <a:endParaRPr lang="en-US" sz="1400" dirty="0"/>
           </a:p>
           <a:p>
             <a:pPr marL="285750" indent="-285750">
               <a:buFontTx/>
               <a:buChar char="-"/>
             </a:pPr>
-            <a:r>
-              <a:rPr lang="en-US" sz="1200" dirty="0"/>
-              <a:t>Pull: “docker pull </a:t>
-            </a:r>
-            <a:r>
-              <a:rPr lang="en-US" sz="1200" dirty="0" err="1"/>
-              <a:t>redis</a:t>
-            </a:r>
-            <a:r>
-              <a:rPr lang="en-US" sz="1200" dirty="0"/>
-              <a:t>”</a:t>
-            </a:r>
+            <a:endParaRPr lang="en-US" sz="1400" dirty="0"/>
           </a:p>
           <a:p>
             <a:pPr marL="285750" indent="-285750">
               <a:buFontTx/>
               <a:buChar char="-"/>
             </a:pPr>
-            <a:r>
-              <a:rPr lang="en-US" sz="1200" dirty="0"/>
-              <a:t>Run: ”docker run –</a:t>
-            </a:r>
-            <a:r>
-              <a:rPr lang="en-US" sz="1200" dirty="0" err="1"/>
-              <a:t>i</a:t>
-            </a:r>
-            <a:r>
-              <a:rPr lang="en-US" sz="1200" dirty="0"/>
-              <a:t> –t ubuntu /bin/bash”</a:t>
-            </a:r>
+            <a:endParaRPr lang="en-US" sz="1400" dirty="0"/>
           </a:p>
           <a:p>
             <a:pPr marL="285750" indent="-285750">
               <a:buFontTx/>
               <a:buChar char="-"/>
             </a:pPr>
-            <a:endParaRPr lang="en-US" sz="1200" dirty="0"/>
+            <a:endParaRPr lang="en-US" sz="1400" dirty="0"/>
           </a:p>
           <a:p>
             <a:pPr marL="285750" indent="-285750">
               <a:buFontTx/>
               <a:buChar char="-"/>
             </a:pPr>
-            <a:endParaRPr lang="en-US" sz="1200" dirty="0"/>
+            <a:endParaRPr lang="en-US" sz="1400" dirty="0"/>
           </a:p>
           <a:p>
             <a:pPr marL="285750" indent="-285750">
               <a:buFontTx/>
               <a:buChar char="-"/>
             </a:pPr>
-            <a:endParaRPr lang="en-US" sz="1200" dirty="0"/>
+            <a:endParaRPr lang="en-US" sz="1400" dirty="0"/>
           </a:p>
           <a:p>
             <a:pPr marL="285750" indent="-285750">
               <a:buFontTx/>
               <a:buChar char="-"/>
             </a:pPr>
-            <a:endParaRPr lang="en-US" sz="1200" dirty="0"/>
+            <a:endParaRPr lang="en-US" sz="1400" dirty="0"/>
           </a:p>
           <a:p>
             <a:pPr marL="285750" indent="-285750">
               <a:buFontTx/>
               <a:buChar char="-"/>
             </a:pPr>
-            <a:endParaRPr lang="en-US" sz="1200" dirty="0"/>
+            <a:endParaRPr lang="en-US" sz="1400" dirty="0"/>
           </a:p>
           <a:p>
             <a:pPr marL="285750" indent="-285750">
               <a:buFontTx/>
               <a:buChar char="-"/>
             </a:pPr>
-            <a:endParaRPr lang="en-US" sz="1200" dirty="0"/>
+            <a:endParaRPr lang="en-US" sz="1400" dirty="0"/>
           </a:p>
           <a:p>
             <a:pPr marL="285750" indent="-285750">
               <a:buFontTx/>
               <a:buChar char="-"/>
             </a:pPr>
-            <a:endParaRPr lang="en-US" sz="1200" dirty="0"/>
+            <a:r>
+              <a:rPr lang="en-US" sz="1400" dirty="0"/>
+              <a:t>To push: “docker push &lt;username&gt;/&lt;</a:t>
+            </a:r>
+            <a:r>
+              <a:rPr lang="en-US" sz="1400" dirty="0" err="1"/>
+              <a:t>repo_name</a:t>
+            </a:r>
+            <a:r>
+              <a:rPr lang="en-US" sz="1400" dirty="0"/>
+              <a:t>&gt;”</a:t>
+            </a:r>
           </a:p>
           <a:p>
             <a:pPr marL="285750" indent="-285750">
               <a:buFontTx/>
               <a:buChar char="-"/>
             </a:pPr>
-            <a:endParaRPr lang="en-US" sz="1200" dirty="0"/>
-          </a:p>
-          <a:p>
-            <a:pPr marL="285750" indent="-285750">
-              <a:buFontTx/>
-              <a:buChar char="-"/>
-            </a:pPr>
-            <a:r>
-              <a:rPr lang="en-US" sz="1200" dirty="0"/>
-              <a:t>When we are pulling </a:t>
-            </a:r>
-            <a:r>
-              <a:rPr lang="en-US" sz="1200" dirty="0" err="1"/>
-              <a:t>os</a:t>
-            </a:r>
-            <a:r>
-              <a:rPr lang="en-US" sz="1200" dirty="0"/>
-              <a:t> like ubuntu, its not going to pull entire OS, only some utility files and rest will be used from host </a:t>
-            </a:r>
-            <a:r>
-              <a:rPr lang="en-US" sz="1200" dirty="0" err="1"/>
-              <a:t>os</a:t>
-            </a:r>
-            <a:endParaRPr lang="en-US" sz="1200" dirty="0"/>
-          </a:p>
-          <a:p>
-            <a:pPr marL="285750" indent="-285750">
-              <a:buFontTx/>
-              <a:buChar char="-"/>
-            </a:pPr>
-            <a:r>
-              <a:rPr lang="en-US" sz="1200" dirty="0">
-                <a:solidFill>
-                  <a:srgbClr val="FF0000"/>
-                </a:solidFill>
-              </a:rPr>
-              <a:t>How to Run any image directly inside the container?</a:t>
-            </a:r>
-          </a:p>
-          <a:p>
-            <a:pPr marL="285750" indent="-285750">
-              <a:buFontTx/>
-              <a:buChar char="-"/>
-            </a:pPr>
-            <a:r>
-              <a:rPr lang="en-US" sz="1200" dirty="0"/>
-              <a:t>docker run -it </a:t>
-            </a:r>
-            <a:r>
-              <a:rPr lang="en-US" sz="1200" dirty="0" err="1"/>
-              <a:t>kalilinux</a:t>
-            </a:r>
-            <a:r>
-              <a:rPr lang="en-US" sz="1200" dirty="0"/>
-              <a:t>/kali-rolling /bin/</a:t>
-            </a:r>
-            <a:r>
-              <a:rPr lang="en-US" sz="1200" dirty="0" err="1"/>
-              <a:t>sh</a:t>
-            </a:r>
-            <a:r>
-              <a:rPr lang="en-US" sz="1200" dirty="0"/>
-              <a:t> (“</a:t>
-            </a:r>
-            <a:r>
-              <a:rPr lang="en-US" sz="1200" dirty="0" err="1"/>
-              <a:t>kalilinux</a:t>
-            </a:r>
-            <a:r>
-              <a:rPr lang="en-US" sz="1200" dirty="0"/>
-              <a:t>/kali-rolling “ is the new image name)</a:t>
-            </a:r>
-          </a:p>
-          <a:p>
-            <a:pPr marL="285750" indent="-285750">
-              <a:buFontTx/>
-              <a:buChar char="-"/>
-            </a:pPr>
-            <a:endParaRPr lang="en-US" sz="1200" dirty="0"/>
-          </a:p>
-          <a:p>
-            <a:pPr marL="285750" indent="-285750">
-              <a:buFontTx/>
-              <a:buChar char="-"/>
-            </a:pPr>
-            <a:endParaRPr lang="en-US" sz="1200" dirty="0"/>
-          </a:p>
-          <a:p>
-            <a:r>
-              <a:rPr lang="en-US" sz="1200" dirty="0"/>
-              <a:t>      </a:t>
-            </a:r>
+            <a:endParaRPr lang="en-US" sz="1400" dirty="0"/>
           </a:p>
         </p:txBody>
       </p:sp>
       <p:pic>
         <p:nvPicPr>
-          <p:cNvPr id="7" name="Picture 6">
-            <a:extLst>
-              <a:ext uri="{FF2B5EF4-FFF2-40B4-BE49-F238E27FC236}">
-                <a16:creationId xmlns:a16="http://schemas.microsoft.com/office/drawing/2014/main" id="{BD889FF2-FA51-581B-829F-41AA10FBD89F}"/>
+          <p:cNvPr id="5" name="Picture 4">
+            <a:extLst>
+              <a:ext uri="{FF2B5EF4-FFF2-40B4-BE49-F238E27FC236}">
+                <a16:creationId xmlns:a16="http://schemas.microsoft.com/office/drawing/2014/main" id="{8873BB9F-4E30-8867-EE7B-9D4165173763}"/>
               </a:ext>
             </a:extLst>
           </p:cNvPr>
@@ -8758,8 +9802,8 @@
         </p:blipFill>
         <p:spPr>
           <a:xfrm>
-            <a:off x="740664" y="3088767"/>
-            <a:ext cx="9496425" cy="1309497"/>
+            <a:off x="816102" y="1685734"/>
+            <a:ext cx="7048500" cy="1895475"/>
           </a:xfrm>
           <a:prstGeom prst="rect">
             <a:avLst/>
@@ -8768,10 +9812,10 @@
       </p:pic>
       <p:pic>
         <p:nvPicPr>
-          <p:cNvPr id="9" name="Picture 8">
-            <a:extLst>
-              <a:ext uri="{FF2B5EF4-FFF2-40B4-BE49-F238E27FC236}">
-                <a16:creationId xmlns:a16="http://schemas.microsoft.com/office/drawing/2014/main" id="{B42CB7B2-4774-954A-E04F-BC4AB18216B7}"/>
+          <p:cNvPr id="7" name="Picture 6">
+            <a:extLst>
+              <a:ext uri="{FF2B5EF4-FFF2-40B4-BE49-F238E27FC236}">
+                <a16:creationId xmlns:a16="http://schemas.microsoft.com/office/drawing/2014/main" id="{A5EED22F-EC51-B6F8-72AE-E1D1C9B303AC}"/>
               </a:ext>
             </a:extLst>
           </p:cNvPr>
@@ -8788,8 +9832,8 @@
         </p:blipFill>
         <p:spPr>
           <a:xfrm>
-            <a:off x="740663" y="5145840"/>
-            <a:ext cx="9496425" cy="1410408"/>
+            <a:off x="816102" y="4043743"/>
+            <a:ext cx="9077325" cy="2754821"/>
           </a:xfrm>
           <a:prstGeom prst="rect">
             <a:avLst/>
@@ -8798,10 +9842,10 @@
       </p:pic>
       <p:pic>
         <p:nvPicPr>
-          <p:cNvPr id="10" name="Picture 4" descr="Docker for Developers: Understanding the Core Concepts – Code with Dan Blog">
-            <a:extLst>
-              <a:ext uri="{FF2B5EF4-FFF2-40B4-BE49-F238E27FC236}">
-                <a16:creationId xmlns:a16="http://schemas.microsoft.com/office/drawing/2014/main" id="{18384F9D-C38A-F4FE-1275-6135A0D7624F}"/>
+          <p:cNvPr id="8" name="Picture 4" descr="Docker for Developers: Understanding the Core Concepts – Code with Dan Blog">
+            <a:extLst>
+              <a:ext uri="{FF2B5EF4-FFF2-40B4-BE49-F238E27FC236}">
+                <a16:creationId xmlns:a16="http://schemas.microsoft.com/office/drawing/2014/main" id="{751EA208-EC8C-EE5E-F39E-D315B22084BA}"/>
               </a:ext>
             </a:extLst>
           </p:cNvPr>
@@ -8825,7 +9869,7 @@
         </p:blipFill>
         <p:spPr bwMode="auto">
           <a:xfrm>
-            <a:off x="5271517" y="0"/>
+            <a:off x="4909890" y="-10930"/>
             <a:ext cx="889747" cy="585550"/>
           </a:xfrm>
           <a:prstGeom prst="rect">
@@ -8846,7 +9890,7 @@
     </p:spTree>
     <p:extLst>
       <p:ext uri="{BB962C8B-B14F-4D97-AF65-F5344CB8AC3E}">
-        <p14:creationId xmlns:p14="http://schemas.microsoft.com/office/powerpoint/2010/main" val="3520430122"/>
+        <p14:creationId xmlns:p14="http://schemas.microsoft.com/office/powerpoint/2010/main" val="1402613706"/>
       </p:ext>
     </p:extLst>
   </p:cSld>
